--- a/output/wordlabs-vis-3day.pptx
+++ b/output/wordlabs-vis-3day.pptx
@@ -6057,7 +6057,7 @@
                 <a:ea typeface="Calibri" pitchFamily="34" charset="-122"/>
                 <a:cs typeface="Calibri" pitchFamily="34" charset="-120"/>
               </a:rPr>
-              <a:t>supervisor</a:t>
+              <a:t>visible</a:t>
             </a:r>
             <a:pPr algn="l" indent="0" marL="0">
               <a:buNone/>
@@ -6071,7 +6071,7 @@
                 <a:ea typeface="Calibri" pitchFamily="34" charset="-122"/>
                 <a:cs typeface="Calibri" pitchFamily="34" charset="-120"/>
               </a:rPr>
-              <a:t> checked that the equipment was </a:t>
+              <a:t> crack in the wall meant the </a:t>
             </a:r>
             <a:pPr algn="l" indent="0" marL="0">
               <a:buNone/>
@@ -6088,7 +6088,7 @@
                 <a:ea typeface="Calibri" pitchFamily="34" charset="-122"/>
                 <a:cs typeface="Calibri" pitchFamily="34" charset="-120"/>
               </a:rPr>
-              <a:t>visible</a:t>
+              <a:t>supervisor</a:t>
             </a:r>
             <a:pPr algn="l" indent="0" marL="0">
               <a:buNone/>
@@ -6102,7 +6102,7 @@
                 <a:ea typeface="Calibri" pitchFamily="34" charset="-122"/>
                 <a:cs typeface="Calibri" pitchFamily="34" charset="-120"/>
               </a:rPr>
-              <a:t> to everyone in the room.</a:t>
+              <a:t> had to close the building.</a:t>
             </a:r>
             <a:endParaRPr lang="en-US" sz="1800" dirty="0"/>
           </a:p>
@@ -6257,7 +6257,7 @@
                 <a:ea typeface="Trebuchet MS" pitchFamily="34" charset="-122"/>
                 <a:cs typeface="Trebuchet MS" pitchFamily="34" charset="-120"/>
               </a:rPr>
-              <a:t>supervisor</a:t>
+              <a:t>visible</a:t>
             </a:r>
             <a:endParaRPr lang="en-US" sz="1400" dirty="0"/>
           </a:p>
@@ -6385,7 +6385,7 @@
                 <a:ea typeface="Trebuchet MS" pitchFamily="34" charset="-122"/>
                 <a:cs typeface="Trebuchet MS" pitchFamily="34" charset="-120"/>
               </a:rPr>
-              <a:t>visible</a:t>
+              <a:t>supervisor</a:t>
             </a:r>
             <a:endParaRPr lang="en-US" sz="1400" dirty="0"/>
           </a:p>
@@ -6855,7 +6855,7 @@
                 <a:ea typeface="Trebuchet MS" pitchFamily="34" charset="-122"/>
                 <a:cs typeface="Trebuchet MS" pitchFamily="34" charset="-120"/>
               </a:rPr>
-              <a:t>supervisor</a:t>
+              <a:t>visible</a:t>
             </a:r>
             <a:endParaRPr lang="en-US" sz="2800" dirty="0"/>
           </a:p>
@@ -7682,7 +7682,7 @@
                 <a:ea typeface="Trebuchet MS" pitchFamily="34" charset="-122"/>
                 <a:cs typeface="Trebuchet MS" pitchFamily="34" charset="-120"/>
               </a:rPr>
-              <a:t>supervisor</a:t>
+              <a:t>visible</a:t>
             </a:r>
             <a:endParaRPr lang="en-US" sz="2800" dirty="0"/>
           </a:p>
@@ -7762,7 +7762,7 @@
         </p:nvSpPr>
         <p:spPr>
           <a:xfrm>
-            <a:off x="2221992" y="2258568"/>
+            <a:off x="2938272" y="2258568"/>
             <a:ext cx="1828800" cy="292608"/>
           </a:xfrm>
           <a:prstGeom prst="rect">
@@ -7771,11 +7771,11 @@
             </a:avLst>
           </a:prstGeom>
           <a:solidFill>
-            <a:srgbClr val="DDD6FE"/>
+            <a:srgbClr val="CCFBF1"/>
           </a:solidFill>
           <a:ln w="19050">
             <a:solidFill>
-              <a:srgbClr val="7C3AED"/>
+              <a:srgbClr val="0D9488"/>
             </a:solidFill>
             <a:prstDash val="solid"/>
           </a:ln>
@@ -7796,7 +7796,7 @@
         </p:nvSpPr>
         <p:spPr>
           <a:xfrm>
-            <a:off x="2221992" y="2258568"/>
+            <a:off x="2938272" y="2258568"/>
             <a:ext cx="1828800" cy="292608"/>
           </a:xfrm>
           <a:prstGeom prst="rect">
@@ -7815,13 +7815,13 @@
             <a:r>
               <a:rPr lang="en-US" sz="1300" b="1" dirty="0">
                 <a:solidFill>
-                  <a:srgbClr val="4C1D95"/>
+                  <a:srgbClr val="0F766E"/>
                 </a:solidFill>
                 <a:latin typeface="Trebuchet MS" pitchFamily="34" charset="0"/>
                 <a:ea typeface="Trebuchet MS" pitchFamily="34" charset="-122"/>
                 <a:cs typeface="Trebuchet MS" pitchFamily="34" charset="-120"/>
               </a:rPr>
-              <a:t>super</a:t>
+              <a:t>vis</a:t>
             </a:r>
             <a:endParaRPr lang="en-US" sz="1300" dirty="0"/>
           </a:p>
@@ -7835,7 +7835,7 @@
         </p:nvSpPr>
         <p:spPr>
           <a:xfrm>
-            <a:off x="2221992" y="2569464"/>
+            <a:off x="2938272" y="2569464"/>
             <a:ext cx="1828800" cy="201168"/>
           </a:xfrm>
           <a:prstGeom prst="rect">
@@ -7860,7 +7860,7 @@
                 <a:ea typeface="Calibri" pitchFamily="34" charset="-122"/>
                 <a:cs typeface="Calibri" pitchFamily="34" charset="-120"/>
               </a:rPr>
-              <a:t>above, over</a:t>
+              <a:t>to see</a:t>
             </a:r>
             <a:endParaRPr lang="en-US" sz="850" dirty="0"/>
           </a:p>
@@ -7874,7 +7874,7 @@
         </p:nvSpPr>
         <p:spPr>
           <a:xfrm>
-            <a:off x="4370832" y="2258568"/>
+            <a:off x="5803392" y="2258568"/>
             <a:ext cx="1828800" cy="292608"/>
           </a:xfrm>
           <a:prstGeom prst="rect">
@@ -7883,11 +7883,11 @@
             </a:avLst>
           </a:prstGeom>
           <a:solidFill>
-            <a:srgbClr val="CCFBF1"/>
+            <a:srgbClr val="FCE7F3"/>
           </a:solidFill>
           <a:ln w="19050">
             <a:solidFill>
-              <a:srgbClr val="0D9488"/>
+              <a:srgbClr val="DB2777"/>
             </a:solidFill>
             <a:prstDash val="solid"/>
           </a:ln>
@@ -7908,7 +7908,7 @@
         </p:nvSpPr>
         <p:spPr>
           <a:xfrm>
-            <a:off x="4370832" y="2258568"/>
+            <a:off x="5803392" y="2258568"/>
             <a:ext cx="1828800" cy="292608"/>
           </a:xfrm>
           <a:prstGeom prst="rect">
@@ -7927,13 +7927,13 @@
             <a:r>
               <a:rPr lang="en-US" sz="1300" b="1" dirty="0">
                 <a:solidFill>
-                  <a:srgbClr val="0F766E"/>
+                  <a:srgbClr val="9D174D"/>
                 </a:solidFill>
                 <a:latin typeface="Trebuchet MS" pitchFamily="34" charset="0"/>
                 <a:ea typeface="Trebuchet MS" pitchFamily="34" charset="-122"/>
                 <a:cs typeface="Trebuchet MS" pitchFamily="34" charset="-120"/>
               </a:rPr>
-              <a:t>vis</a:t>
+              <a:t>ible</a:t>
             </a:r>
             <a:endParaRPr lang="en-US" sz="1300" dirty="0"/>
           </a:p>
@@ -7947,7 +7947,7 @@
         </p:nvSpPr>
         <p:spPr>
           <a:xfrm>
-            <a:off x="4370832" y="2569464"/>
+            <a:off x="5803392" y="2569464"/>
             <a:ext cx="1828800" cy="201168"/>
           </a:xfrm>
           <a:prstGeom prst="rect">
@@ -7972,7 +7972,7 @@
                 <a:ea typeface="Calibri" pitchFamily="34" charset="-122"/>
                 <a:cs typeface="Calibri" pitchFamily="34" charset="-120"/>
               </a:rPr>
-              <a:t>to see</a:t>
+              <a:t>able to be</a:t>
             </a:r>
             <a:endParaRPr lang="en-US" sz="850" dirty="0"/>
           </a:p>
@@ -7986,30 +7986,23 @@
         </p:nvSpPr>
         <p:spPr>
           <a:xfrm>
-            <a:off x="6519672" y="2258568"/>
-            <a:ext cx="1828800" cy="292608"/>
+            <a:off x="365760" y="3273552"/>
+            <a:ext cx="1371600" cy="658368"/>
           </a:xfrm>
           <a:prstGeom prst="rect">
             <a:avLst>
-              <a:gd name="adj" fmla="val 25000"/>
+              <a:gd name="adj" fmla="val 8333"/>
             </a:avLst>
           </a:prstGeom>
           <a:solidFill>
-            <a:srgbClr val="FCE7F3"/>
-          </a:solidFill>
-          <a:ln w="19050">
-            <a:solidFill>
-              <a:srgbClr val="DB2777"/>
-            </a:solidFill>
-            <a:prstDash val="solid"/>
-          </a:ln>
-          <a:effectLst>
-            <a:outerShdw sx="100000" sy="100000" kx="0" ky="0" algn="bl" rotWithShape="0" blurRad="101600" dist="38100" dir="8100000">
-              <a:srgbClr val="000000">
-                <a:alpha val="12000"/>
-              </a:srgbClr>
-            </a:outerShdw>
-          </a:effectLst>
+            <a:srgbClr val="E2E8F0"/>
+          </a:solidFill>
+          <a:ln w="12700">
+            <a:solidFill>
+              <a:srgbClr val="E2E8F0"/>
+            </a:solidFill>
+            <a:prstDash val="solid"/>
+          </a:ln>
         </p:spPr>
       </p:sp>
       <p:sp>
@@ -8020,90 +8013,117 @@
         </p:nvSpPr>
         <p:spPr>
           <a:xfrm>
-            <a:off x="6519672" y="2258568"/>
-            <a:ext cx="1828800" cy="292608"/>
-          </a:xfrm>
-          <a:prstGeom prst="rect">
-            <a:avLst/>
-          </a:prstGeom>
-          <a:noFill/>
-          <a:ln/>
-        </p:spPr>
-        <p:txBody>
-          <a:bodyPr wrap="square" lIns="0" tIns="0" rIns="0" bIns="0" rtlCol="0" anchor="ctr"/>
-          <a:lstStyle/>
-          <a:p>
-            <a:pPr algn="ctr" indent="0" marL="0">
-              <a:buNone/>
-            </a:pPr>
-            <a:r>
-              <a:rPr lang="en-US" sz="1300" b="1" dirty="0">
-                <a:solidFill>
-                  <a:srgbClr val="9D174D"/>
+            <a:off x="365760" y="3273552"/>
+            <a:ext cx="1371600" cy="658368"/>
+          </a:xfrm>
+          <a:prstGeom prst="rect">
+            <a:avLst/>
+          </a:prstGeom>
+          <a:noFill/>
+          <a:ln/>
+        </p:spPr>
+        <p:txBody>
+          <a:bodyPr wrap="square" lIns="0" tIns="0" rIns="0" bIns="0" rtlCol="0" anchor="ctr"/>
+          <a:lstStyle/>
+          <a:p>
+            <a:pPr algn="ctr" indent="0" marL="0">
+              <a:buNone/>
+            </a:pPr>
+            <a:r>
+              <a:rPr lang="en-US" sz="1100" b="1" dirty="0">
+                <a:solidFill>
+                  <a:srgbClr val="475569"/>
                 </a:solidFill>
                 <a:latin typeface="Trebuchet MS" pitchFamily="34" charset="0"/>
                 <a:ea typeface="Trebuchet MS" pitchFamily="34" charset="-122"/>
                 <a:cs typeface="Trebuchet MS" pitchFamily="34" charset="-120"/>
               </a:rPr>
-              <a:t>or</a:t>
-            </a:r>
-            <a:endParaRPr lang="en-US" sz="1300" dirty="0"/>
-          </a:p>
-        </p:txBody>
-      </p:sp>
-      <p:sp>
-        <p:nvSpPr>
-          <p:cNvPr id="24" name="Text 22"/>
-          <p:cNvSpPr/>
-          <p:nvPr/>
-        </p:nvSpPr>
-        <p:spPr>
-          <a:xfrm>
-            <a:off x="6519672" y="2569464"/>
-            <a:ext cx="1828800" cy="201168"/>
-          </a:xfrm>
-          <a:prstGeom prst="rect">
-            <a:avLst/>
-          </a:prstGeom>
-          <a:noFill/>
-          <a:ln/>
-        </p:spPr>
-        <p:txBody>
-          <a:bodyPr wrap="square" lIns="0" tIns="0" rIns="0" bIns="0" rtlCol="0" anchor="t"/>
-          <a:lstStyle/>
-          <a:p>
-            <a:pPr algn="ctr" indent="0" marL="0">
-              <a:buNone/>
-            </a:pPr>
-            <a:r>
-              <a:rPr lang="en-US" sz="850" dirty="0">
-                <a:solidFill>
-                  <a:srgbClr val="475569"/>
+              <a:t>Syllables</a:t>
+            </a:r>
+            <a:endParaRPr lang="en-US" sz="1100" dirty="0"/>
+          </a:p>
+        </p:txBody>
+      </p:sp>
+      <p:sp>
+        <p:nvSpPr>
+          <p:cNvPr id="24" name="Shape 22"/>
+          <p:cNvSpPr/>
+          <p:nvPr/>
+        </p:nvSpPr>
+        <p:spPr>
+          <a:xfrm>
+            <a:off x="1874520" y="3273552"/>
+            <a:ext cx="6903720" cy="658368"/>
+          </a:xfrm>
+          <a:prstGeom prst="rect">
+            <a:avLst>
+              <a:gd name="adj" fmla="val 8333"/>
+            </a:avLst>
+          </a:prstGeom>
+          <a:solidFill>
+            <a:srgbClr val="F8FAFC"/>
+          </a:solidFill>
+          <a:ln w="12700">
+            <a:solidFill>
+              <a:srgbClr val="E2E8F0"/>
+            </a:solidFill>
+            <a:prstDash val="dash"/>
+          </a:ln>
+        </p:spPr>
+      </p:sp>
+      <p:sp>
+        <p:nvSpPr>
+          <p:cNvPr id="25" name="Text 23"/>
+          <p:cNvSpPr/>
+          <p:nvPr/>
+        </p:nvSpPr>
+        <p:spPr>
+          <a:xfrm>
+            <a:off x="1874520" y="3273552"/>
+            <a:ext cx="6903720" cy="658368"/>
+          </a:xfrm>
+          <a:prstGeom prst="rect">
+            <a:avLst/>
+          </a:prstGeom>
+          <a:noFill/>
+          <a:ln/>
+        </p:spPr>
+        <p:txBody>
+          <a:bodyPr wrap="square" rtlCol="0" anchor="ctr"/>
+          <a:lstStyle/>
+          <a:p>
+            <a:pPr algn="ctr" indent="0" marL="0">
+              <a:buNone/>
+            </a:pPr>
+            <a:r>
+              <a:rPr lang="en-US" sz="1100" i="1" dirty="0">
+                <a:solidFill>
+                  <a:srgbClr val="CBD5E1"/>
                 </a:solidFill>
                 <a:latin typeface="Calibri" pitchFamily="34" charset="0"/>
                 <a:ea typeface="Calibri" pitchFamily="34" charset="-122"/>
                 <a:cs typeface="Calibri" pitchFamily="34" charset="-120"/>
               </a:rPr>
-              <a:t>person who does something</a:t>
-            </a:r>
-            <a:endParaRPr lang="en-US" sz="850" dirty="0"/>
-          </a:p>
-        </p:txBody>
-      </p:sp>
-      <p:sp>
-        <p:nvSpPr>
-          <p:cNvPr id="25" name="Shape 23"/>
-          <p:cNvSpPr/>
-          <p:nvPr/>
-        </p:nvSpPr>
-        <p:spPr>
-          <a:xfrm>
-            <a:off x="365760" y="3273552"/>
-            <a:ext cx="1371600" cy="658368"/>
+              <a:t>Write here...</a:t>
+            </a:r>
+            <a:endParaRPr lang="en-US" sz="1100" dirty="0"/>
+          </a:p>
+        </p:txBody>
+      </p:sp>
+      <p:sp>
+        <p:nvSpPr>
+          <p:cNvPr id="26" name="Shape 24"/>
+          <p:cNvSpPr/>
+          <p:nvPr/>
+        </p:nvSpPr>
+        <p:spPr>
+          <a:xfrm>
+            <a:off x="365760" y="4096512"/>
+            <a:ext cx="1371600" cy="804672"/>
           </a:xfrm>
           <a:prstGeom prst="rect">
             <a:avLst>
-              <a:gd name="adj" fmla="val 8333"/>
+              <a:gd name="adj" fmla="val 6818"/>
             </a:avLst>
           </a:prstGeom>
           <a:solidFill>
@@ -8119,14 +8139,14 @@
       </p:sp>
       <p:sp>
         <p:nvSpPr>
-          <p:cNvPr id="26" name="Text 24"/>
-          <p:cNvSpPr/>
-          <p:nvPr/>
-        </p:nvSpPr>
-        <p:spPr>
-          <a:xfrm>
-            <a:off x="365760" y="3273552"/>
-            <a:ext cx="1371600" cy="658368"/>
+          <p:cNvPr id="27" name="Text 25"/>
+          <p:cNvSpPr/>
+          <p:nvPr/>
+        </p:nvSpPr>
+        <p:spPr>
+          <a:xfrm>
+            <a:off x="365760" y="4096512"/>
+            <a:ext cx="1371600" cy="804672"/>
           </a:xfrm>
           <a:prstGeom prst="rect">
             <a:avLst/>
@@ -8150,7 +8170,7 @@
                 <a:ea typeface="Trebuchet MS" pitchFamily="34" charset="-122"/>
                 <a:cs typeface="Trebuchet MS" pitchFamily="34" charset="-120"/>
               </a:rPr>
-              <a:t>Syllables</a:t>
+              <a:t>Phonemes</a:t>
             </a:r>
             <a:endParaRPr lang="en-US" sz="1100" dirty="0"/>
           </a:p>
@@ -8158,80 +8178,14 @@
       </p:sp>
       <p:sp>
         <p:nvSpPr>
-          <p:cNvPr id="27" name="Shape 25"/>
-          <p:cNvSpPr/>
-          <p:nvPr/>
-        </p:nvSpPr>
-        <p:spPr>
-          <a:xfrm>
-            <a:off x="1874520" y="3273552"/>
-            <a:ext cx="6903720" cy="658368"/>
-          </a:xfrm>
-          <a:prstGeom prst="rect">
-            <a:avLst>
-              <a:gd name="adj" fmla="val 8333"/>
-            </a:avLst>
-          </a:prstGeom>
-          <a:solidFill>
-            <a:srgbClr val="F8FAFC"/>
-          </a:solidFill>
-          <a:ln w="12700">
-            <a:solidFill>
-              <a:srgbClr val="E2E8F0"/>
-            </a:solidFill>
-            <a:prstDash val="dash"/>
-          </a:ln>
-        </p:spPr>
-      </p:sp>
-      <p:sp>
-        <p:nvSpPr>
-          <p:cNvPr id="28" name="Text 26"/>
-          <p:cNvSpPr/>
-          <p:nvPr/>
-        </p:nvSpPr>
-        <p:spPr>
-          <a:xfrm>
-            <a:off x="1874520" y="3273552"/>
-            <a:ext cx="6903720" cy="658368"/>
-          </a:xfrm>
-          <a:prstGeom prst="rect">
-            <a:avLst/>
-          </a:prstGeom>
-          <a:noFill/>
-          <a:ln/>
-        </p:spPr>
-        <p:txBody>
-          <a:bodyPr wrap="square" rtlCol="0" anchor="ctr"/>
-          <a:lstStyle/>
-          <a:p>
-            <a:pPr algn="ctr" indent="0" marL="0">
-              <a:buNone/>
-            </a:pPr>
-            <a:r>
-              <a:rPr lang="en-US" sz="1100" i="1" dirty="0">
-                <a:solidFill>
-                  <a:srgbClr val="CBD5E1"/>
-                </a:solidFill>
-                <a:latin typeface="Calibri" pitchFamily="34" charset="0"/>
-                <a:ea typeface="Calibri" pitchFamily="34" charset="-122"/>
-                <a:cs typeface="Calibri" pitchFamily="34" charset="-120"/>
-              </a:rPr>
-              <a:t>Write here...</a:t>
-            </a:r>
-            <a:endParaRPr lang="en-US" sz="1100" dirty="0"/>
-          </a:p>
-        </p:txBody>
-      </p:sp>
-      <p:sp>
-        <p:nvSpPr>
-          <p:cNvPr id="29" name="Shape 27"/>
-          <p:cNvSpPr/>
-          <p:nvPr/>
-        </p:nvSpPr>
-        <p:spPr>
-          <a:xfrm>
-            <a:off x="365760" y="4096512"/>
-            <a:ext cx="1371600" cy="804672"/>
+          <p:cNvPr id="28" name="Shape 26"/>
+          <p:cNvSpPr/>
+          <p:nvPr/>
+        </p:nvSpPr>
+        <p:spPr>
+          <a:xfrm>
+            <a:off x="1874520" y="4096512"/>
+            <a:ext cx="6903720" cy="804672"/>
           </a:xfrm>
           <a:prstGeom prst="rect">
             <a:avLst>
@@ -8239,85 +8193,19 @@
             </a:avLst>
           </a:prstGeom>
           <a:solidFill>
-            <a:srgbClr val="E2E8F0"/>
+            <a:srgbClr val="F8FAFC"/>
           </a:solidFill>
           <a:ln w="12700">
             <a:solidFill>
               <a:srgbClr val="E2E8F0"/>
             </a:solidFill>
-            <a:prstDash val="solid"/>
-          </a:ln>
-        </p:spPr>
-      </p:sp>
-      <p:sp>
-        <p:nvSpPr>
-          <p:cNvPr id="30" name="Text 28"/>
-          <p:cNvSpPr/>
-          <p:nvPr/>
-        </p:nvSpPr>
-        <p:spPr>
-          <a:xfrm>
-            <a:off x="365760" y="4096512"/>
-            <a:ext cx="1371600" cy="804672"/>
-          </a:xfrm>
-          <a:prstGeom prst="rect">
-            <a:avLst/>
-          </a:prstGeom>
-          <a:noFill/>
-          <a:ln/>
-        </p:spPr>
-        <p:txBody>
-          <a:bodyPr wrap="square" lIns="0" tIns="0" rIns="0" bIns="0" rtlCol="0" anchor="ctr"/>
-          <a:lstStyle/>
-          <a:p>
-            <a:pPr algn="ctr" indent="0" marL="0">
-              <a:buNone/>
-            </a:pPr>
-            <a:r>
-              <a:rPr lang="en-US" sz="1100" b="1" dirty="0">
-                <a:solidFill>
-                  <a:srgbClr val="475569"/>
-                </a:solidFill>
-                <a:latin typeface="Trebuchet MS" pitchFamily="34" charset="0"/>
-                <a:ea typeface="Trebuchet MS" pitchFamily="34" charset="-122"/>
-                <a:cs typeface="Trebuchet MS" pitchFamily="34" charset="-120"/>
-              </a:rPr>
-              <a:t>Phonemes</a:t>
-            </a:r>
-            <a:endParaRPr lang="en-US" sz="1100" dirty="0"/>
-          </a:p>
-        </p:txBody>
-      </p:sp>
-      <p:sp>
-        <p:nvSpPr>
-          <p:cNvPr id="31" name="Shape 29"/>
-          <p:cNvSpPr/>
-          <p:nvPr/>
-        </p:nvSpPr>
-        <p:spPr>
-          <a:xfrm>
-            <a:off x="1874520" y="4096512"/>
-            <a:ext cx="6903720" cy="804672"/>
-          </a:xfrm>
-          <a:prstGeom prst="rect">
-            <a:avLst>
-              <a:gd name="adj" fmla="val 6818"/>
-            </a:avLst>
-          </a:prstGeom>
-          <a:solidFill>
-            <a:srgbClr val="F8FAFC"/>
-          </a:solidFill>
-          <a:ln w="12700">
-            <a:solidFill>
-              <a:srgbClr val="E2E8F0"/>
-            </a:solidFill>
             <a:prstDash val="dash"/>
           </a:ln>
         </p:spPr>
       </p:sp>
       <p:sp>
         <p:nvSpPr>
-          <p:cNvPr id="32" name="Text 30"/>
+          <p:cNvPr id="29" name="Text 27"/>
           <p:cNvSpPr/>
           <p:nvPr/>
         </p:nvSpPr>
@@ -8779,7 +8667,7 @@
                 <a:ea typeface="Trebuchet MS" pitchFamily="34" charset="-122"/>
                 <a:cs typeface="Trebuchet MS" pitchFamily="34" charset="-120"/>
               </a:rPr>
-              <a:t>supervisor</a:t>
+              <a:t>visible</a:t>
             </a:r>
             <a:endParaRPr lang="en-US" sz="2800" dirty="0"/>
           </a:p>
@@ -8859,7 +8747,7 @@
         </p:nvSpPr>
         <p:spPr>
           <a:xfrm>
-            <a:off x="2221992" y="2258568"/>
+            <a:off x="2938272" y="2258568"/>
             <a:ext cx="1828800" cy="292608"/>
           </a:xfrm>
           <a:prstGeom prst="rect">
@@ -8868,11 +8756,11 @@
             </a:avLst>
           </a:prstGeom>
           <a:solidFill>
-            <a:srgbClr val="DDD6FE"/>
+            <a:srgbClr val="CCFBF1"/>
           </a:solidFill>
           <a:ln w="19050">
             <a:solidFill>
-              <a:srgbClr val="7C3AED"/>
+              <a:srgbClr val="0D9488"/>
             </a:solidFill>
             <a:prstDash val="solid"/>
           </a:ln>
@@ -8893,7 +8781,7 @@
         </p:nvSpPr>
         <p:spPr>
           <a:xfrm>
-            <a:off x="2221992" y="2258568"/>
+            <a:off x="2938272" y="2258568"/>
             <a:ext cx="1828800" cy="292608"/>
           </a:xfrm>
           <a:prstGeom prst="rect">
@@ -8912,13 +8800,13 @@
             <a:r>
               <a:rPr lang="en-US" sz="1300" b="1" dirty="0">
                 <a:solidFill>
-                  <a:srgbClr val="4C1D95"/>
+                  <a:srgbClr val="0F766E"/>
                 </a:solidFill>
                 <a:latin typeface="Trebuchet MS" pitchFamily="34" charset="0"/>
                 <a:ea typeface="Trebuchet MS" pitchFamily="34" charset="-122"/>
                 <a:cs typeface="Trebuchet MS" pitchFamily="34" charset="-120"/>
               </a:rPr>
-              <a:t>super</a:t>
+              <a:t>vis</a:t>
             </a:r>
             <a:endParaRPr lang="en-US" sz="1300" dirty="0"/>
           </a:p>
@@ -8932,7 +8820,7 @@
         </p:nvSpPr>
         <p:spPr>
           <a:xfrm>
-            <a:off x="2221992" y="2569464"/>
+            <a:off x="2938272" y="2569464"/>
             <a:ext cx="1828800" cy="201168"/>
           </a:xfrm>
           <a:prstGeom prst="rect">
@@ -8957,7 +8845,7 @@
                 <a:ea typeface="Calibri" pitchFamily="34" charset="-122"/>
                 <a:cs typeface="Calibri" pitchFamily="34" charset="-120"/>
               </a:rPr>
-              <a:t>above, over</a:t>
+              <a:t>to see</a:t>
             </a:r>
             <a:endParaRPr lang="en-US" sz="850" dirty="0"/>
           </a:p>
@@ -8971,7 +8859,7 @@
         </p:nvSpPr>
         <p:spPr>
           <a:xfrm>
-            <a:off x="4370832" y="2258568"/>
+            <a:off x="5803392" y="2258568"/>
             <a:ext cx="1828800" cy="292608"/>
           </a:xfrm>
           <a:prstGeom prst="rect">
@@ -8980,11 +8868,11 @@
             </a:avLst>
           </a:prstGeom>
           <a:solidFill>
-            <a:srgbClr val="CCFBF1"/>
+            <a:srgbClr val="FCE7F3"/>
           </a:solidFill>
           <a:ln w="19050">
             <a:solidFill>
-              <a:srgbClr val="0D9488"/>
+              <a:srgbClr val="DB2777"/>
             </a:solidFill>
             <a:prstDash val="solid"/>
           </a:ln>
@@ -9005,7 +8893,7 @@
         </p:nvSpPr>
         <p:spPr>
           <a:xfrm>
-            <a:off x="4370832" y="2258568"/>
+            <a:off x="5803392" y="2258568"/>
             <a:ext cx="1828800" cy="292608"/>
           </a:xfrm>
           <a:prstGeom prst="rect">
@@ -9024,13 +8912,13 @@
             <a:r>
               <a:rPr lang="en-US" sz="1300" b="1" dirty="0">
                 <a:solidFill>
-                  <a:srgbClr val="0F766E"/>
+                  <a:srgbClr val="9D174D"/>
                 </a:solidFill>
                 <a:latin typeface="Trebuchet MS" pitchFamily="34" charset="0"/>
                 <a:ea typeface="Trebuchet MS" pitchFamily="34" charset="-122"/>
                 <a:cs typeface="Trebuchet MS" pitchFamily="34" charset="-120"/>
               </a:rPr>
-              <a:t>vis</a:t>
+              <a:t>ible</a:t>
             </a:r>
             <a:endParaRPr lang="en-US" sz="1300" dirty="0"/>
           </a:p>
@@ -9044,7 +8932,7 @@
         </p:nvSpPr>
         <p:spPr>
           <a:xfrm>
-            <a:off x="4370832" y="2569464"/>
+            <a:off x="5803392" y="2569464"/>
             <a:ext cx="1828800" cy="201168"/>
           </a:xfrm>
           <a:prstGeom prst="rect">
@@ -9069,7 +8957,7 @@
                 <a:ea typeface="Calibri" pitchFamily="34" charset="-122"/>
                 <a:cs typeface="Calibri" pitchFamily="34" charset="-120"/>
               </a:rPr>
-              <a:t>to see</a:t>
+              <a:t>able to be</a:t>
             </a:r>
             <a:endParaRPr lang="en-US" sz="850" dirty="0"/>
           </a:p>
@@ -9083,30 +8971,23 @@
         </p:nvSpPr>
         <p:spPr>
           <a:xfrm>
-            <a:off x="6519672" y="2258568"/>
-            <a:ext cx="1828800" cy="292608"/>
+            <a:off x="365760" y="3273552"/>
+            <a:ext cx="1371600" cy="658368"/>
           </a:xfrm>
           <a:prstGeom prst="rect">
             <a:avLst>
-              <a:gd name="adj" fmla="val 25000"/>
+              <a:gd name="adj" fmla="val 8333"/>
             </a:avLst>
           </a:prstGeom>
           <a:solidFill>
-            <a:srgbClr val="FCE7F3"/>
-          </a:solidFill>
-          <a:ln w="19050">
-            <a:solidFill>
-              <a:srgbClr val="DB2777"/>
-            </a:solidFill>
-            <a:prstDash val="solid"/>
-          </a:ln>
-          <a:effectLst>
-            <a:outerShdw sx="100000" sy="100000" kx="0" ky="0" algn="bl" rotWithShape="0" blurRad="101600" dist="38100" dir="8100000">
-              <a:srgbClr val="000000">
-                <a:alpha val="12000"/>
-              </a:srgbClr>
-            </a:outerShdw>
-          </a:effectLst>
+            <a:srgbClr val="E2E8F0"/>
+          </a:solidFill>
+          <a:ln w="12700">
+            <a:solidFill>
+              <a:srgbClr val="E2E8F0"/>
+            </a:solidFill>
+            <a:prstDash val="solid"/>
+          </a:ln>
         </p:spPr>
       </p:sp>
       <p:sp>
@@ -9117,86 +8998,47 @@
         </p:nvSpPr>
         <p:spPr>
           <a:xfrm>
-            <a:off x="6519672" y="2258568"/>
-            <a:ext cx="1828800" cy="292608"/>
-          </a:xfrm>
-          <a:prstGeom prst="rect">
-            <a:avLst/>
-          </a:prstGeom>
-          <a:noFill/>
-          <a:ln/>
-        </p:spPr>
-        <p:txBody>
-          <a:bodyPr wrap="square" lIns="0" tIns="0" rIns="0" bIns="0" rtlCol="0" anchor="ctr"/>
-          <a:lstStyle/>
-          <a:p>
-            <a:pPr algn="ctr" indent="0" marL="0">
-              <a:buNone/>
-            </a:pPr>
-            <a:r>
-              <a:rPr lang="en-US" sz="1300" b="1" dirty="0">
-                <a:solidFill>
-                  <a:srgbClr val="9D174D"/>
+            <a:off x="365760" y="3273552"/>
+            <a:ext cx="1371600" cy="658368"/>
+          </a:xfrm>
+          <a:prstGeom prst="rect">
+            <a:avLst/>
+          </a:prstGeom>
+          <a:noFill/>
+          <a:ln/>
+        </p:spPr>
+        <p:txBody>
+          <a:bodyPr wrap="square" lIns="0" tIns="0" rIns="0" bIns="0" rtlCol="0" anchor="ctr"/>
+          <a:lstStyle/>
+          <a:p>
+            <a:pPr algn="ctr" indent="0" marL="0">
+              <a:buNone/>
+            </a:pPr>
+            <a:r>
+              <a:rPr lang="en-US" sz="1100" b="1" dirty="0">
+                <a:solidFill>
+                  <a:srgbClr val="475569"/>
                 </a:solidFill>
                 <a:latin typeface="Trebuchet MS" pitchFamily="34" charset="0"/>
                 <a:ea typeface="Trebuchet MS" pitchFamily="34" charset="-122"/>
                 <a:cs typeface="Trebuchet MS" pitchFamily="34" charset="-120"/>
               </a:rPr>
-              <a:t>or</a:t>
-            </a:r>
-            <a:endParaRPr lang="en-US" sz="1300" dirty="0"/>
-          </a:p>
-        </p:txBody>
-      </p:sp>
-      <p:sp>
-        <p:nvSpPr>
-          <p:cNvPr id="24" name="Text 22"/>
-          <p:cNvSpPr/>
-          <p:nvPr/>
-        </p:nvSpPr>
-        <p:spPr>
-          <a:xfrm>
-            <a:off x="6519672" y="2569464"/>
-            <a:ext cx="1828800" cy="201168"/>
-          </a:xfrm>
-          <a:prstGeom prst="rect">
-            <a:avLst/>
-          </a:prstGeom>
-          <a:noFill/>
-          <a:ln/>
-        </p:spPr>
-        <p:txBody>
-          <a:bodyPr wrap="square" lIns="0" tIns="0" rIns="0" bIns="0" rtlCol="0" anchor="t"/>
-          <a:lstStyle/>
-          <a:p>
-            <a:pPr algn="ctr" indent="0" marL="0">
-              <a:buNone/>
-            </a:pPr>
-            <a:r>
-              <a:rPr lang="en-US" sz="850" dirty="0">
-                <a:solidFill>
-                  <a:srgbClr val="475569"/>
-                </a:solidFill>
-                <a:latin typeface="Calibri" pitchFamily="34" charset="0"/>
-                <a:ea typeface="Calibri" pitchFamily="34" charset="-122"/>
-                <a:cs typeface="Calibri" pitchFamily="34" charset="-120"/>
-              </a:rPr>
-              <a:t>person who does something</a:t>
-            </a:r>
-            <a:endParaRPr lang="en-US" sz="850" dirty="0"/>
-          </a:p>
-        </p:txBody>
-      </p:sp>
-      <p:sp>
-        <p:nvSpPr>
-          <p:cNvPr id="25" name="Shape 23"/>
-          <p:cNvSpPr/>
-          <p:nvPr/>
-        </p:nvSpPr>
-        <p:spPr>
-          <a:xfrm>
-            <a:off x="365760" y="3273552"/>
-            <a:ext cx="1371600" cy="658368"/>
+              <a:t>Syllables</a:t>
+            </a:r>
+            <a:endParaRPr lang="en-US" sz="1100" dirty="0"/>
+          </a:p>
+        </p:txBody>
+      </p:sp>
+      <p:sp>
+        <p:nvSpPr>
+          <p:cNvPr id="24" name="Shape 22"/>
+          <p:cNvSpPr/>
+          <p:nvPr/>
+        </p:nvSpPr>
+        <p:spPr>
+          <a:xfrm>
+            <a:off x="1874520" y="3273552"/>
+            <a:ext cx="6903720" cy="658368"/>
           </a:xfrm>
           <a:prstGeom prst="rect">
             <a:avLst>
@@ -9204,11 +9046,38 @@
             </a:avLst>
           </a:prstGeom>
           <a:solidFill>
-            <a:srgbClr val="E2E8F0"/>
-          </a:solidFill>
-          <a:ln w="12700">
-            <a:solidFill>
-              <a:srgbClr val="E2E8F0"/>
+            <a:srgbClr val="CCFBF1"/>
+          </a:solidFill>
+          <a:ln w="12700">
+            <a:solidFill>
+              <a:srgbClr val="0D9488"/>
+            </a:solidFill>
+            <a:prstDash val="solid"/>
+          </a:ln>
+        </p:spPr>
+      </p:sp>
+      <p:sp>
+        <p:nvSpPr>
+          <p:cNvPr id="25" name="Shape 23"/>
+          <p:cNvSpPr/>
+          <p:nvPr/>
+        </p:nvSpPr>
+        <p:spPr>
+          <a:xfrm>
+            <a:off x="2313432" y="3364992"/>
+            <a:ext cx="1645920" cy="475488"/>
+          </a:xfrm>
+          <a:prstGeom prst="rect">
+            <a:avLst>
+              <a:gd name="adj" fmla="val 9615"/>
+            </a:avLst>
+          </a:prstGeom>
+          <a:solidFill>
+            <a:srgbClr val="FFFFFF"/>
+          </a:solidFill>
+          <a:ln w="12700">
+            <a:solidFill>
+              <a:srgbClr val="0D9488"/>
             </a:solidFill>
             <a:prstDash val="solid"/>
           </a:ln>
@@ -9222,63 +9091,75 @@
         </p:nvSpPr>
         <p:spPr>
           <a:xfrm>
-            <a:off x="365760" y="3273552"/>
-            <a:ext cx="1371600" cy="658368"/>
-          </a:xfrm>
-          <a:prstGeom prst="rect">
-            <a:avLst/>
-          </a:prstGeom>
-          <a:noFill/>
-          <a:ln/>
-        </p:spPr>
-        <p:txBody>
-          <a:bodyPr wrap="square" lIns="0" tIns="0" rIns="0" bIns="0" rtlCol="0" anchor="ctr"/>
-          <a:lstStyle/>
-          <a:p>
-            <a:pPr algn="ctr" indent="0" marL="0">
-              <a:buNone/>
-            </a:pPr>
-            <a:r>
-              <a:rPr lang="en-US" sz="1100" b="1" dirty="0">
-                <a:solidFill>
-                  <a:srgbClr val="475569"/>
+            <a:off x="2313432" y="3364992"/>
+            <a:ext cx="1645920" cy="475488"/>
+          </a:xfrm>
+          <a:prstGeom prst="rect">
+            <a:avLst/>
+          </a:prstGeom>
+          <a:noFill/>
+          <a:ln/>
+        </p:spPr>
+        <p:txBody>
+          <a:bodyPr wrap="square" lIns="0" tIns="0" rIns="0" bIns="0" rtlCol="0" anchor="ctr"/>
+          <a:lstStyle/>
+          <a:p>
+            <a:pPr algn="ctr" indent="0" marL="0">
+              <a:buNone/>
+            </a:pPr>
+            <a:r>
+              <a:rPr lang="en-US" sz="1400" b="1" dirty="0">
+                <a:solidFill>
+                  <a:srgbClr val="0D9488"/>
                 </a:solidFill>
                 <a:latin typeface="Trebuchet MS" pitchFamily="34" charset="0"/>
                 <a:ea typeface="Trebuchet MS" pitchFamily="34" charset="-122"/>
                 <a:cs typeface="Trebuchet MS" pitchFamily="34" charset="-120"/>
               </a:rPr>
-              <a:t>Syllables</a:t>
-            </a:r>
-            <a:endParaRPr lang="en-US" sz="1100" dirty="0"/>
-          </a:p>
-        </p:txBody>
-      </p:sp>
-      <p:sp>
-        <p:nvSpPr>
-          <p:cNvPr id="27" name="Shape 25"/>
-          <p:cNvSpPr/>
-          <p:nvPr/>
-        </p:nvSpPr>
-        <p:spPr>
-          <a:xfrm>
-            <a:off x="1874520" y="3273552"/>
-            <a:ext cx="6903720" cy="658368"/>
-          </a:xfrm>
-          <a:prstGeom prst="rect">
-            <a:avLst>
-              <a:gd name="adj" fmla="val 8333"/>
-            </a:avLst>
-          </a:prstGeom>
-          <a:solidFill>
-            <a:srgbClr val="CCFBF1"/>
-          </a:solidFill>
-          <a:ln w="12700">
-            <a:solidFill>
-              <a:srgbClr val="0D9488"/>
-            </a:solidFill>
-            <a:prstDash val="solid"/>
-          </a:ln>
-        </p:spPr>
+              <a:t>vi</a:t>
+            </a:r>
+            <a:endParaRPr lang="en-US" sz="1400" dirty="0"/>
+          </a:p>
+        </p:txBody>
+      </p:sp>
+      <p:sp>
+        <p:nvSpPr>
+          <p:cNvPr id="27" name="Text 25"/>
+          <p:cNvSpPr/>
+          <p:nvPr/>
+        </p:nvSpPr>
+        <p:spPr>
+          <a:xfrm>
+            <a:off x="3959352" y="3364992"/>
+            <a:ext cx="411480" cy="475488"/>
+          </a:xfrm>
+          <a:prstGeom prst="rect">
+            <a:avLst/>
+          </a:prstGeom>
+          <a:noFill/>
+          <a:ln/>
+        </p:spPr>
+        <p:txBody>
+          <a:bodyPr wrap="square" lIns="0" tIns="0" rIns="0" bIns="0" rtlCol="0" anchor="ctr"/>
+          <a:lstStyle/>
+          <a:p>
+            <a:pPr algn="ctr" indent="0" marL="0">
+              <a:buNone/>
+            </a:pPr>
+            <a:r>
+              <a:rPr lang="en-US" sz="1600" b="1" dirty="0">
+                <a:solidFill>
+                  <a:srgbClr val="0D9488"/>
+                </a:solidFill>
+                <a:latin typeface="Trebuchet MS" pitchFamily="34" charset="0"/>
+                <a:ea typeface="Trebuchet MS" pitchFamily="34" charset="-122"/>
+                <a:cs typeface="Trebuchet MS" pitchFamily="34" charset="-120"/>
+              </a:rPr>
+              <a:t>·</a:t>
+            </a:r>
+            <a:endParaRPr lang="en-US" sz="1600" dirty="0"/>
+          </a:p>
+        </p:txBody>
       </p:sp>
       <p:sp>
         <p:nvSpPr>
@@ -9288,8 +9169,8 @@
         </p:nvSpPr>
         <p:spPr>
           <a:xfrm>
-            <a:off x="1975104" y="3364992"/>
-            <a:ext cx="1554480" cy="475488"/>
+            <a:off x="4370832" y="3364992"/>
+            <a:ext cx="1645920" cy="475488"/>
           </a:xfrm>
           <a:prstGeom prst="rect">
             <a:avLst>
@@ -9315,8 +9196,8 @@
         </p:nvSpPr>
         <p:spPr>
           <a:xfrm>
-            <a:off x="1975104" y="3364992"/>
-            <a:ext cx="1554480" cy="475488"/>
+            <a:off x="4370832" y="3364992"/>
+            <a:ext cx="1645920" cy="475488"/>
           </a:xfrm>
           <a:prstGeom prst="rect">
             <a:avLst/>
@@ -9340,7 +9221,7 @@
                 <a:ea typeface="Trebuchet MS" pitchFamily="34" charset="-122"/>
                 <a:cs typeface="Trebuchet MS" pitchFamily="34" charset="-120"/>
               </a:rPr>
-              <a:t>su</a:t>
+              <a:t>si</a:t>
             </a:r>
             <a:endParaRPr lang="en-US" sz="1400" dirty="0"/>
           </a:p>
@@ -9354,8 +9235,8 @@
         </p:nvSpPr>
         <p:spPr>
           <a:xfrm>
-            <a:off x="3529584" y="3364992"/>
-            <a:ext cx="73152" cy="475488"/>
+            <a:off x="6016752" y="3364992"/>
+            <a:ext cx="411480" cy="475488"/>
           </a:xfrm>
           <a:prstGeom prst="rect">
             <a:avLst/>
@@ -9393,8 +9274,8 @@
         </p:nvSpPr>
         <p:spPr>
           <a:xfrm>
-            <a:off x="3602736" y="3364992"/>
-            <a:ext cx="1554480" cy="475488"/>
+            <a:off x="6428232" y="3364992"/>
+            <a:ext cx="1645920" cy="475488"/>
           </a:xfrm>
           <a:prstGeom prst="rect">
             <a:avLst>
@@ -9420,8 +9301,8 @@
         </p:nvSpPr>
         <p:spPr>
           <a:xfrm>
-            <a:off x="3602736" y="3364992"/>
-            <a:ext cx="1554480" cy="475488"/>
+            <a:off x="6428232" y="3364992"/>
+            <a:ext cx="1645920" cy="475488"/>
           </a:xfrm>
           <a:prstGeom prst="rect">
             <a:avLst/>
@@ -9445,7 +9326,7 @@
                 <a:ea typeface="Trebuchet MS" pitchFamily="34" charset="-122"/>
                 <a:cs typeface="Trebuchet MS" pitchFamily="34" charset="-120"/>
               </a:rPr>
-              <a:t>per</a:t>
+              <a:t>ble</a:t>
             </a:r>
             <a:endParaRPr lang="en-US" sz="1400" dirty="0"/>
           </a:p>
@@ -9453,224 +9334,80 @@
       </p:sp>
       <p:sp>
         <p:nvSpPr>
-          <p:cNvPr id="33" name="Text 31"/>
-          <p:cNvSpPr/>
-          <p:nvPr/>
-        </p:nvSpPr>
-        <p:spPr>
-          <a:xfrm>
-            <a:off x="5157216" y="3364992"/>
-            <a:ext cx="73152" cy="475488"/>
-          </a:xfrm>
-          <a:prstGeom prst="rect">
-            <a:avLst/>
-          </a:prstGeom>
-          <a:noFill/>
-          <a:ln/>
-        </p:spPr>
-        <p:txBody>
-          <a:bodyPr wrap="square" lIns="0" tIns="0" rIns="0" bIns="0" rtlCol="0" anchor="ctr"/>
-          <a:lstStyle/>
-          <a:p>
-            <a:pPr algn="ctr" indent="0" marL="0">
-              <a:buNone/>
-            </a:pPr>
-            <a:r>
-              <a:rPr lang="en-US" sz="1600" b="1" dirty="0">
-                <a:solidFill>
-                  <a:srgbClr val="0D9488"/>
+          <p:cNvPr id="33" name="Shape 31"/>
+          <p:cNvSpPr/>
+          <p:nvPr/>
+        </p:nvSpPr>
+        <p:spPr>
+          <a:xfrm>
+            <a:off x="365760" y="4096512"/>
+            <a:ext cx="1371600" cy="804672"/>
+          </a:xfrm>
+          <a:prstGeom prst="rect">
+            <a:avLst>
+              <a:gd name="adj" fmla="val 6818"/>
+            </a:avLst>
+          </a:prstGeom>
+          <a:solidFill>
+            <a:srgbClr val="E2E8F0"/>
+          </a:solidFill>
+          <a:ln w="12700">
+            <a:solidFill>
+              <a:srgbClr val="E2E8F0"/>
+            </a:solidFill>
+            <a:prstDash val="solid"/>
+          </a:ln>
+        </p:spPr>
+      </p:sp>
+      <p:sp>
+        <p:nvSpPr>
+          <p:cNvPr id="34" name="Text 32"/>
+          <p:cNvSpPr/>
+          <p:nvPr/>
+        </p:nvSpPr>
+        <p:spPr>
+          <a:xfrm>
+            <a:off x="365760" y="4096512"/>
+            <a:ext cx="1371600" cy="804672"/>
+          </a:xfrm>
+          <a:prstGeom prst="rect">
+            <a:avLst/>
+          </a:prstGeom>
+          <a:noFill/>
+          <a:ln/>
+        </p:spPr>
+        <p:txBody>
+          <a:bodyPr wrap="square" lIns="0" tIns="0" rIns="0" bIns="0" rtlCol="0" anchor="ctr"/>
+          <a:lstStyle/>
+          <a:p>
+            <a:pPr algn="ctr" indent="0" marL="0">
+              <a:buNone/>
+            </a:pPr>
+            <a:r>
+              <a:rPr lang="en-US" sz="1100" b="1" dirty="0">
+                <a:solidFill>
+                  <a:srgbClr val="475569"/>
                 </a:solidFill>
                 <a:latin typeface="Trebuchet MS" pitchFamily="34" charset="0"/>
                 <a:ea typeface="Trebuchet MS" pitchFamily="34" charset="-122"/>
                 <a:cs typeface="Trebuchet MS" pitchFamily="34" charset="-120"/>
               </a:rPr>
-              <a:t>·</a:t>
-            </a:r>
-            <a:endParaRPr lang="en-US" sz="1600" dirty="0"/>
-          </a:p>
-        </p:txBody>
-      </p:sp>
-      <p:sp>
-        <p:nvSpPr>
-          <p:cNvPr id="34" name="Shape 32"/>
-          <p:cNvSpPr/>
-          <p:nvPr/>
-        </p:nvSpPr>
-        <p:spPr>
-          <a:xfrm>
-            <a:off x="5230368" y="3364992"/>
-            <a:ext cx="1554480" cy="475488"/>
-          </a:xfrm>
-          <a:prstGeom prst="rect">
-            <a:avLst>
-              <a:gd name="adj" fmla="val 9615"/>
-            </a:avLst>
-          </a:prstGeom>
-          <a:solidFill>
-            <a:srgbClr val="FFFFFF"/>
-          </a:solidFill>
-          <a:ln w="12700">
-            <a:solidFill>
-              <a:srgbClr val="0D9488"/>
-            </a:solidFill>
-            <a:prstDash val="solid"/>
-          </a:ln>
-        </p:spPr>
-      </p:sp>
-      <p:sp>
-        <p:nvSpPr>
-          <p:cNvPr id="35" name="Text 33"/>
-          <p:cNvSpPr/>
-          <p:nvPr/>
-        </p:nvSpPr>
-        <p:spPr>
-          <a:xfrm>
-            <a:off x="5230368" y="3364992"/>
-            <a:ext cx="1554480" cy="475488"/>
-          </a:xfrm>
-          <a:prstGeom prst="rect">
-            <a:avLst/>
-          </a:prstGeom>
-          <a:noFill/>
-          <a:ln/>
-        </p:spPr>
-        <p:txBody>
-          <a:bodyPr wrap="square" lIns="0" tIns="0" rIns="0" bIns="0" rtlCol="0" anchor="ctr"/>
-          <a:lstStyle/>
-          <a:p>
-            <a:pPr algn="ctr" indent="0" marL="0">
-              <a:buNone/>
-            </a:pPr>
-            <a:r>
-              <a:rPr lang="en-US" sz="1400" b="1" dirty="0">
-                <a:solidFill>
-                  <a:srgbClr val="0D9488"/>
-                </a:solidFill>
-                <a:latin typeface="Trebuchet MS" pitchFamily="34" charset="0"/>
-                <a:ea typeface="Trebuchet MS" pitchFamily="34" charset="-122"/>
-                <a:cs typeface="Trebuchet MS" pitchFamily="34" charset="-120"/>
-              </a:rPr>
-              <a:t>vi</a:t>
-            </a:r>
-            <a:endParaRPr lang="en-US" sz="1400" dirty="0"/>
-          </a:p>
-        </p:txBody>
-      </p:sp>
-      <p:sp>
-        <p:nvSpPr>
-          <p:cNvPr id="36" name="Text 34"/>
-          <p:cNvSpPr/>
-          <p:nvPr/>
-        </p:nvSpPr>
-        <p:spPr>
-          <a:xfrm>
-            <a:off x="6784848" y="3364992"/>
-            <a:ext cx="73152" cy="475488"/>
-          </a:xfrm>
-          <a:prstGeom prst="rect">
-            <a:avLst/>
-          </a:prstGeom>
-          <a:noFill/>
-          <a:ln/>
-        </p:spPr>
-        <p:txBody>
-          <a:bodyPr wrap="square" lIns="0" tIns="0" rIns="0" bIns="0" rtlCol="0" anchor="ctr"/>
-          <a:lstStyle/>
-          <a:p>
-            <a:pPr algn="ctr" indent="0" marL="0">
-              <a:buNone/>
-            </a:pPr>
-            <a:r>
-              <a:rPr lang="en-US" sz="1600" b="1" dirty="0">
-                <a:solidFill>
-                  <a:srgbClr val="0D9488"/>
-                </a:solidFill>
-                <a:latin typeface="Trebuchet MS" pitchFamily="34" charset="0"/>
-                <a:ea typeface="Trebuchet MS" pitchFamily="34" charset="-122"/>
-                <a:cs typeface="Trebuchet MS" pitchFamily="34" charset="-120"/>
-              </a:rPr>
-              <a:t>·</a:t>
-            </a:r>
-            <a:endParaRPr lang="en-US" sz="1600" dirty="0"/>
-          </a:p>
-        </p:txBody>
-      </p:sp>
-      <p:sp>
-        <p:nvSpPr>
-          <p:cNvPr id="37" name="Shape 35"/>
-          <p:cNvSpPr/>
-          <p:nvPr/>
-        </p:nvSpPr>
-        <p:spPr>
-          <a:xfrm>
-            <a:off x="6858000" y="3364992"/>
-            <a:ext cx="1554480" cy="475488"/>
-          </a:xfrm>
-          <a:prstGeom prst="rect">
-            <a:avLst>
-              <a:gd name="adj" fmla="val 9615"/>
-            </a:avLst>
-          </a:prstGeom>
-          <a:solidFill>
-            <a:srgbClr val="FFFFFF"/>
-          </a:solidFill>
-          <a:ln w="12700">
-            <a:solidFill>
-              <a:srgbClr val="0D9488"/>
-            </a:solidFill>
-            <a:prstDash val="solid"/>
-          </a:ln>
-        </p:spPr>
-      </p:sp>
-      <p:sp>
-        <p:nvSpPr>
-          <p:cNvPr id="38" name="Text 36"/>
-          <p:cNvSpPr/>
-          <p:nvPr/>
-        </p:nvSpPr>
-        <p:spPr>
-          <a:xfrm>
-            <a:off x="6858000" y="3364992"/>
-            <a:ext cx="1554480" cy="475488"/>
-          </a:xfrm>
-          <a:prstGeom prst="rect">
-            <a:avLst/>
-          </a:prstGeom>
-          <a:noFill/>
-          <a:ln/>
-        </p:spPr>
-        <p:txBody>
-          <a:bodyPr wrap="square" lIns="0" tIns="0" rIns="0" bIns="0" rtlCol="0" anchor="ctr"/>
-          <a:lstStyle/>
-          <a:p>
-            <a:pPr algn="ctr" indent="0" marL="0">
-              <a:buNone/>
-            </a:pPr>
-            <a:r>
-              <a:rPr lang="en-US" sz="1400" b="1" dirty="0">
-                <a:solidFill>
-                  <a:srgbClr val="0D9488"/>
-                </a:solidFill>
-                <a:latin typeface="Trebuchet MS" pitchFamily="34" charset="0"/>
-                <a:ea typeface="Trebuchet MS" pitchFamily="34" charset="-122"/>
-                <a:cs typeface="Trebuchet MS" pitchFamily="34" charset="-120"/>
-              </a:rPr>
-              <a:t>sor</a:t>
-            </a:r>
-            <a:endParaRPr lang="en-US" sz="1400" dirty="0"/>
-          </a:p>
-        </p:txBody>
-      </p:sp>
-      <p:sp>
-        <p:nvSpPr>
-          <p:cNvPr id="39" name="Shape 37"/>
-          <p:cNvSpPr/>
-          <p:nvPr/>
-        </p:nvSpPr>
-        <p:spPr>
-          <a:xfrm>
-            <a:off x="365760" y="4096512"/>
-            <a:ext cx="1371600" cy="804672"/>
+              <a:t>Phonemes</a:t>
+            </a:r>
+            <a:endParaRPr lang="en-US" sz="1100" dirty="0"/>
+          </a:p>
+        </p:txBody>
+      </p:sp>
+      <p:sp>
+        <p:nvSpPr>
+          <p:cNvPr id="35" name="Shape 33"/>
+          <p:cNvSpPr/>
+          <p:nvPr/>
+        </p:nvSpPr>
+        <p:spPr>
+          <a:xfrm>
+            <a:off x="1874520" y="4096512"/>
+            <a:ext cx="6903720" cy="804672"/>
           </a:xfrm>
           <a:prstGeom prst="rect">
             <a:avLst>
@@ -9678,85 +9415,19 @@
             </a:avLst>
           </a:prstGeom>
           <a:solidFill>
-            <a:srgbClr val="E2E8F0"/>
+            <a:srgbClr val="F8FAFC"/>
           </a:solidFill>
           <a:ln w="12700">
             <a:solidFill>
               <a:srgbClr val="E2E8F0"/>
             </a:solidFill>
-            <a:prstDash val="solid"/>
-          </a:ln>
-        </p:spPr>
-      </p:sp>
-      <p:sp>
-        <p:nvSpPr>
-          <p:cNvPr id="40" name="Text 38"/>
-          <p:cNvSpPr/>
-          <p:nvPr/>
-        </p:nvSpPr>
-        <p:spPr>
-          <a:xfrm>
-            <a:off x="365760" y="4096512"/>
-            <a:ext cx="1371600" cy="804672"/>
-          </a:xfrm>
-          <a:prstGeom prst="rect">
-            <a:avLst/>
-          </a:prstGeom>
-          <a:noFill/>
-          <a:ln/>
-        </p:spPr>
-        <p:txBody>
-          <a:bodyPr wrap="square" lIns="0" tIns="0" rIns="0" bIns="0" rtlCol="0" anchor="ctr"/>
-          <a:lstStyle/>
-          <a:p>
-            <a:pPr algn="ctr" indent="0" marL="0">
-              <a:buNone/>
-            </a:pPr>
-            <a:r>
-              <a:rPr lang="en-US" sz="1100" b="1" dirty="0">
-                <a:solidFill>
-                  <a:srgbClr val="475569"/>
-                </a:solidFill>
-                <a:latin typeface="Trebuchet MS" pitchFamily="34" charset="0"/>
-                <a:ea typeface="Trebuchet MS" pitchFamily="34" charset="-122"/>
-                <a:cs typeface="Trebuchet MS" pitchFamily="34" charset="-120"/>
-              </a:rPr>
-              <a:t>Phonemes</a:t>
-            </a:r>
-            <a:endParaRPr lang="en-US" sz="1100" dirty="0"/>
-          </a:p>
-        </p:txBody>
-      </p:sp>
-      <p:sp>
-        <p:nvSpPr>
-          <p:cNvPr id="41" name="Shape 39"/>
-          <p:cNvSpPr/>
-          <p:nvPr/>
-        </p:nvSpPr>
-        <p:spPr>
-          <a:xfrm>
-            <a:off x="1874520" y="4096512"/>
-            <a:ext cx="6903720" cy="804672"/>
-          </a:xfrm>
-          <a:prstGeom prst="rect">
-            <a:avLst>
-              <a:gd name="adj" fmla="val 6818"/>
-            </a:avLst>
-          </a:prstGeom>
-          <a:solidFill>
-            <a:srgbClr val="F8FAFC"/>
-          </a:solidFill>
-          <a:ln w="12700">
-            <a:solidFill>
-              <a:srgbClr val="E2E8F0"/>
-            </a:solidFill>
             <a:prstDash val="dash"/>
           </a:ln>
         </p:spPr>
       </p:sp>
       <p:sp>
         <p:nvSpPr>
-          <p:cNvPr id="42" name="Text 40"/>
+          <p:cNvPr id="36" name="Text 34"/>
           <p:cNvSpPr/>
           <p:nvPr/>
         </p:nvSpPr>
@@ -10218,7 +9889,7 @@
                 <a:ea typeface="Trebuchet MS" pitchFamily="34" charset="-122"/>
                 <a:cs typeface="Trebuchet MS" pitchFamily="34" charset="-120"/>
               </a:rPr>
-              <a:t>supervisor</a:t>
+              <a:t>visible</a:t>
             </a:r>
             <a:endParaRPr lang="en-US" sz="2800" dirty="0"/>
           </a:p>
@@ -10298,7 +9969,7 @@
         </p:nvSpPr>
         <p:spPr>
           <a:xfrm>
-            <a:off x="2221992" y="2258568"/>
+            <a:off x="2938272" y="2258568"/>
             <a:ext cx="1828800" cy="292608"/>
           </a:xfrm>
           <a:prstGeom prst="rect">
@@ -10307,11 +9978,11 @@
             </a:avLst>
           </a:prstGeom>
           <a:solidFill>
-            <a:srgbClr val="DDD6FE"/>
+            <a:srgbClr val="CCFBF1"/>
           </a:solidFill>
           <a:ln w="19050">
             <a:solidFill>
-              <a:srgbClr val="7C3AED"/>
+              <a:srgbClr val="0D9488"/>
             </a:solidFill>
             <a:prstDash val="solid"/>
           </a:ln>
@@ -10332,7 +10003,7 @@
         </p:nvSpPr>
         <p:spPr>
           <a:xfrm>
-            <a:off x="2221992" y="2258568"/>
+            <a:off x="2938272" y="2258568"/>
             <a:ext cx="1828800" cy="292608"/>
           </a:xfrm>
           <a:prstGeom prst="rect">
@@ -10351,13 +10022,13 @@
             <a:r>
               <a:rPr lang="en-US" sz="1300" b="1" dirty="0">
                 <a:solidFill>
-                  <a:srgbClr val="4C1D95"/>
+                  <a:srgbClr val="0F766E"/>
                 </a:solidFill>
                 <a:latin typeface="Trebuchet MS" pitchFamily="34" charset="0"/>
                 <a:ea typeface="Trebuchet MS" pitchFamily="34" charset="-122"/>
                 <a:cs typeface="Trebuchet MS" pitchFamily="34" charset="-120"/>
               </a:rPr>
-              <a:t>super</a:t>
+              <a:t>vis</a:t>
             </a:r>
             <a:endParaRPr lang="en-US" sz="1300" dirty="0"/>
           </a:p>
@@ -10371,7 +10042,7 @@
         </p:nvSpPr>
         <p:spPr>
           <a:xfrm>
-            <a:off x="2221992" y="2569464"/>
+            <a:off x="2938272" y="2569464"/>
             <a:ext cx="1828800" cy="201168"/>
           </a:xfrm>
           <a:prstGeom prst="rect">
@@ -10396,7 +10067,7 @@
                 <a:ea typeface="Calibri" pitchFamily="34" charset="-122"/>
                 <a:cs typeface="Calibri" pitchFamily="34" charset="-120"/>
               </a:rPr>
-              <a:t>above, over</a:t>
+              <a:t>to see</a:t>
             </a:r>
             <a:endParaRPr lang="en-US" sz="850" dirty="0"/>
           </a:p>
@@ -10410,7 +10081,7 @@
         </p:nvSpPr>
         <p:spPr>
           <a:xfrm>
-            <a:off x="4370832" y="2258568"/>
+            <a:off x="5803392" y="2258568"/>
             <a:ext cx="1828800" cy="292608"/>
           </a:xfrm>
           <a:prstGeom prst="rect">
@@ -10419,11 +10090,11 @@
             </a:avLst>
           </a:prstGeom>
           <a:solidFill>
-            <a:srgbClr val="CCFBF1"/>
+            <a:srgbClr val="FCE7F3"/>
           </a:solidFill>
           <a:ln w="19050">
             <a:solidFill>
-              <a:srgbClr val="0D9488"/>
+              <a:srgbClr val="DB2777"/>
             </a:solidFill>
             <a:prstDash val="solid"/>
           </a:ln>
@@ -10444,7 +10115,7 @@
         </p:nvSpPr>
         <p:spPr>
           <a:xfrm>
-            <a:off x="4370832" y="2258568"/>
+            <a:off x="5803392" y="2258568"/>
             <a:ext cx="1828800" cy="292608"/>
           </a:xfrm>
           <a:prstGeom prst="rect">
@@ -10463,13 +10134,13 @@
             <a:r>
               <a:rPr lang="en-US" sz="1300" b="1" dirty="0">
                 <a:solidFill>
-                  <a:srgbClr val="0F766E"/>
+                  <a:srgbClr val="9D174D"/>
                 </a:solidFill>
                 <a:latin typeface="Trebuchet MS" pitchFamily="34" charset="0"/>
                 <a:ea typeface="Trebuchet MS" pitchFamily="34" charset="-122"/>
                 <a:cs typeface="Trebuchet MS" pitchFamily="34" charset="-120"/>
               </a:rPr>
-              <a:t>vis</a:t>
+              <a:t>ible</a:t>
             </a:r>
             <a:endParaRPr lang="en-US" sz="1300" dirty="0"/>
           </a:p>
@@ -10483,7 +10154,7 @@
         </p:nvSpPr>
         <p:spPr>
           <a:xfrm>
-            <a:off x="4370832" y="2569464"/>
+            <a:off x="5803392" y="2569464"/>
             <a:ext cx="1828800" cy="201168"/>
           </a:xfrm>
           <a:prstGeom prst="rect">
@@ -10508,7 +10179,7 @@
                 <a:ea typeface="Calibri" pitchFamily="34" charset="-122"/>
                 <a:cs typeface="Calibri" pitchFamily="34" charset="-120"/>
               </a:rPr>
-              <a:t>to see</a:t>
+              <a:t>able to be</a:t>
             </a:r>
             <a:endParaRPr lang="en-US" sz="850" dirty="0"/>
           </a:p>
@@ -10522,30 +10193,23 @@
         </p:nvSpPr>
         <p:spPr>
           <a:xfrm>
-            <a:off x="6519672" y="2258568"/>
-            <a:ext cx="1828800" cy="292608"/>
+            <a:off x="365760" y="3273552"/>
+            <a:ext cx="1371600" cy="658368"/>
           </a:xfrm>
           <a:prstGeom prst="rect">
             <a:avLst>
-              <a:gd name="adj" fmla="val 25000"/>
+              <a:gd name="adj" fmla="val 8333"/>
             </a:avLst>
           </a:prstGeom>
           <a:solidFill>
-            <a:srgbClr val="FCE7F3"/>
-          </a:solidFill>
-          <a:ln w="19050">
-            <a:solidFill>
-              <a:srgbClr val="DB2777"/>
-            </a:solidFill>
-            <a:prstDash val="solid"/>
-          </a:ln>
-          <a:effectLst>
-            <a:outerShdw sx="100000" sy="100000" kx="0" ky="0" algn="bl" rotWithShape="0" blurRad="101600" dist="38100" dir="8100000">
-              <a:srgbClr val="000000">
-                <a:alpha val="12000"/>
-              </a:srgbClr>
-            </a:outerShdw>
-          </a:effectLst>
+            <a:srgbClr val="E2E8F0"/>
+          </a:solidFill>
+          <a:ln w="12700">
+            <a:solidFill>
+              <a:srgbClr val="E2E8F0"/>
+            </a:solidFill>
+            <a:prstDash val="solid"/>
+          </a:ln>
         </p:spPr>
       </p:sp>
       <p:sp>
@@ -10556,47 +10220,641 @@
         </p:nvSpPr>
         <p:spPr>
           <a:xfrm>
-            <a:off x="6519672" y="2258568"/>
-            <a:ext cx="1828800" cy="292608"/>
-          </a:xfrm>
-          <a:prstGeom prst="rect">
-            <a:avLst/>
-          </a:prstGeom>
-          <a:noFill/>
-          <a:ln/>
-        </p:spPr>
-        <p:txBody>
-          <a:bodyPr wrap="square" lIns="0" tIns="0" rIns="0" bIns="0" rtlCol="0" anchor="ctr"/>
-          <a:lstStyle/>
-          <a:p>
-            <a:pPr algn="ctr" indent="0" marL="0">
-              <a:buNone/>
-            </a:pPr>
-            <a:r>
-              <a:rPr lang="en-US" sz="1300" b="1" dirty="0">
-                <a:solidFill>
-                  <a:srgbClr val="9D174D"/>
+            <a:off x="365760" y="3273552"/>
+            <a:ext cx="1371600" cy="658368"/>
+          </a:xfrm>
+          <a:prstGeom prst="rect">
+            <a:avLst/>
+          </a:prstGeom>
+          <a:noFill/>
+          <a:ln/>
+        </p:spPr>
+        <p:txBody>
+          <a:bodyPr wrap="square" lIns="0" tIns="0" rIns="0" bIns="0" rtlCol="0" anchor="ctr"/>
+          <a:lstStyle/>
+          <a:p>
+            <a:pPr algn="ctr" indent="0" marL="0">
+              <a:buNone/>
+            </a:pPr>
+            <a:r>
+              <a:rPr lang="en-US" sz="1100" b="1" dirty="0">
+                <a:solidFill>
+                  <a:srgbClr val="475569"/>
                 </a:solidFill>
                 <a:latin typeface="Trebuchet MS" pitchFamily="34" charset="0"/>
                 <a:ea typeface="Trebuchet MS" pitchFamily="34" charset="-122"/>
                 <a:cs typeface="Trebuchet MS" pitchFamily="34" charset="-120"/>
               </a:rPr>
-              <a:t>or</a:t>
-            </a:r>
-            <a:endParaRPr lang="en-US" sz="1300" dirty="0"/>
-          </a:p>
-        </p:txBody>
-      </p:sp>
-      <p:sp>
-        <p:nvSpPr>
-          <p:cNvPr id="24" name="Text 22"/>
-          <p:cNvSpPr/>
-          <p:nvPr/>
-        </p:nvSpPr>
-        <p:spPr>
-          <a:xfrm>
-            <a:off x="6519672" y="2569464"/>
-            <a:ext cx="1828800" cy="201168"/>
+              <a:t>Syllables</a:t>
+            </a:r>
+            <a:endParaRPr lang="en-US" sz="1100" dirty="0"/>
+          </a:p>
+        </p:txBody>
+      </p:sp>
+      <p:sp>
+        <p:nvSpPr>
+          <p:cNvPr id="24" name="Shape 22"/>
+          <p:cNvSpPr/>
+          <p:nvPr/>
+        </p:nvSpPr>
+        <p:spPr>
+          <a:xfrm>
+            <a:off x="1874520" y="3273552"/>
+            <a:ext cx="6903720" cy="658368"/>
+          </a:xfrm>
+          <a:prstGeom prst="rect">
+            <a:avLst>
+              <a:gd name="adj" fmla="val 8333"/>
+            </a:avLst>
+          </a:prstGeom>
+          <a:solidFill>
+            <a:srgbClr val="CCFBF1"/>
+          </a:solidFill>
+          <a:ln w="12700">
+            <a:solidFill>
+              <a:srgbClr val="0D9488"/>
+            </a:solidFill>
+            <a:prstDash val="solid"/>
+          </a:ln>
+        </p:spPr>
+      </p:sp>
+      <p:sp>
+        <p:nvSpPr>
+          <p:cNvPr id="25" name="Shape 23"/>
+          <p:cNvSpPr/>
+          <p:nvPr/>
+        </p:nvSpPr>
+        <p:spPr>
+          <a:xfrm>
+            <a:off x="2313432" y="3364992"/>
+            <a:ext cx="1645920" cy="475488"/>
+          </a:xfrm>
+          <a:prstGeom prst="rect">
+            <a:avLst>
+              <a:gd name="adj" fmla="val 9615"/>
+            </a:avLst>
+          </a:prstGeom>
+          <a:solidFill>
+            <a:srgbClr val="FFFFFF"/>
+          </a:solidFill>
+          <a:ln w="12700">
+            <a:solidFill>
+              <a:srgbClr val="0D9488"/>
+            </a:solidFill>
+            <a:prstDash val="solid"/>
+          </a:ln>
+        </p:spPr>
+      </p:sp>
+      <p:sp>
+        <p:nvSpPr>
+          <p:cNvPr id="26" name="Text 24"/>
+          <p:cNvSpPr/>
+          <p:nvPr/>
+        </p:nvSpPr>
+        <p:spPr>
+          <a:xfrm>
+            <a:off x="2313432" y="3364992"/>
+            <a:ext cx="1645920" cy="475488"/>
+          </a:xfrm>
+          <a:prstGeom prst="rect">
+            <a:avLst/>
+          </a:prstGeom>
+          <a:noFill/>
+          <a:ln/>
+        </p:spPr>
+        <p:txBody>
+          <a:bodyPr wrap="square" lIns="0" tIns="0" rIns="0" bIns="0" rtlCol="0" anchor="ctr"/>
+          <a:lstStyle/>
+          <a:p>
+            <a:pPr algn="ctr" indent="0" marL="0">
+              <a:buNone/>
+            </a:pPr>
+            <a:r>
+              <a:rPr lang="en-US" sz="1400" b="1" dirty="0">
+                <a:solidFill>
+                  <a:srgbClr val="0D9488"/>
+                </a:solidFill>
+                <a:latin typeface="Trebuchet MS" pitchFamily="34" charset="0"/>
+                <a:ea typeface="Trebuchet MS" pitchFamily="34" charset="-122"/>
+                <a:cs typeface="Trebuchet MS" pitchFamily="34" charset="-120"/>
+              </a:rPr>
+              <a:t>vi</a:t>
+            </a:r>
+            <a:endParaRPr lang="en-US" sz="1400" dirty="0"/>
+          </a:p>
+        </p:txBody>
+      </p:sp>
+      <p:sp>
+        <p:nvSpPr>
+          <p:cNvPr id="27" name="Text 25"/>
+          <p:cNvSpPr/>
+          <p:nvPr/>
+        </p:nvSpPr>
+        <p:spPr>
+          <a:xfrm>
+            <a:off x="3959352" y="3364992"/>
+            <a:ext cx="411480" cy="475488"/>
+          </a:xfrm>
+          <a:prstGeom prst="rect">
+            <a:avLst/>
+          </a:prstGeom>
+          <a:noFill/>
+          <a:ln/>
+        </p:spPr>
+        <p:txBody>
+          <a:bodyPr wrap="square" lIns="0" tIns="0" rIns="0" bIns="0" rtlCol="0" anchor="ctr"/>
+          <a:lstStyle/>
+          <a:p>
+            <a:pPr algn="ctr" indent="0" marL="0">
+              <a:buNone/>
+            </a:pPr>
+            <a:r>
+              <a:rPr lang="en-US" sz="1600" b="1" dirty="0">
+                <a:solidFill>
+                  <a:srgbClr val="0D9488"/>
+                </a:solidFill>
+                <a:latin typeface="Trebuchet MS" pitchFamily="34" charset="0"/>
+                <a:ea typeface="Trebuchet MS" pitchFamily="34" charset="-122"/>
+                <a:cs typeface="Trebuchet MS" pitchFamily="34" charset="-120"/>
+              </a:rPr>
+              <a:t>·</a:t>
+            </a:r>
+            <a:endParaRPr lang="en-US" sz="1600" dirty="0"/>
+          </a:p>
+        </p:txBody>
+      </p:sp>
+      <p:sp>
+        <p:nvSpPr>
+          <p:cNvPr id="28" name="Shape 26"/>
+          <p:cNvSpPr/>
+          <p:nvPr/>
+        </p:nvSpPr>
+        <p:spPr>
+          <a:xfrm>
+            <a:off x="4370832" y="3364992"/>
+            <a:ext cx="1645920" cy="475488"/>
+          </a:xfrm>
+          <a:prstGeom prst="rect">
+            <a:avLst>
+              <a:gd name="adj" fmla="val 9615"/>
+            </a:avLst>
+          </a:prstGeom>
+          <a:solidFill>
+            <a:srgbClr val="FFFFFF"/>
+          </a:solidFill>
+          <a:ln w="12700">
+            <a:solidFill>
+              <a:srgbClr val="0D9488"/>
+            </a:solidFill>
+            <a:prstDash val="solid"/>
+          </a:ln>
+        </p:spPr>
+      </p:sp>
+      <p:sp>
+        <p:nvSpPr>
+          <p:cNvPr id="29" name="Text 27"/>
+          <p:cNvSpPr/>
+          <p:nvPr/>
+        </p:nvSpPr>
+        <p:spPr>
+          <a:xfrm>
+            <a:off x="4370832" y="3364992"/>
+            <a:ext cx="1645920" cy="475488"/>
+          </a:xfrm>
+          <a:prstGeom prst="rect">
+            <a:avLst/>
+          </a:prstGeom>
+          <a:noFill/>
+          <a:ln/>
+        </p:spPr>
+        <p:txBody>
+          <a:bodyPr wrap="square" lIns="0" tIns="0" rIns="0" bIns="0" rtlCol="0" anchor="ctr"/>
+          <a:lstStyle/>
+          <a:p>
+            <a:pPr algn="ctr" indent="0" marL="0">
+              <a:buNone/>
+            </a:pPr>
+            <a:r>
+              <a:rPr lang="en-US" sz="1400" b="1" dirty="0">
+                <a:solidFill>
+                  <a:srgbClr val="0D9488"/>
+                </a:solidFill>
+                <a:latin typeface="Trebuchet MS" pitchFamily="34" charset="0"/>
+                <a:ea typeface="Trebuchet MS" pitchFamily="34" charset="-122"/>
+                <a:cs typeface="Trebuchet MS" pitchFamily="34" charset="-120"/>
+              </a:rPr>
+              <a:t>si</a:t>
+            </a:r>
+            <a:endParaRPr lang="en-US" sz="1400" dirty="0"/>
+          </a:p>
+        </p:txBody>
+      </p:sp>
+      <p:sp>
+        <p:nvSpPr>
+          <p:cNvPr id="30" name="Text 28"/>
+          <p:cNvSpPr/>
+          <p:nvPr/>
+        </p:nvSpPr>
+        <p:spPr>
+          <a:xfrm>
+            <a:off x="6016752" y="3364992"/>
+            <a:ext cx="411480" cy="475488"/>
+          </a:xfrm>
+          <a:prstGeom prst="rect">
+            <a:avLst/>
+          </a:prstGeom>
+          <a:noFill/>
+          <a:ln/>
+        </p:spPr>
+        <p:txBody>
+          <a:bodyPr wrap="square" lIns="0" tIns="0" rIns="0" bIns="0" rtlCol="0" anchor="ctr"/>
+          <a:lstStyle/>
+          <a:p>
+            <a:pPr algn="ctr" indent="0" marL="0">
+              <a:buNone/>
+            </a:pPr>
+            <a:r>
+              <a:rPr lang="en-US" sz="1600" b="1" dirty="0">
+                <a:solidFill>
+                  <a:srgbClr val="0D9488"/>
+                </a:solidFill>
+                <a:latin typeface="Trebuchet MS" pitchFamily="34" charset="0"/>
+                <a:ea typeface="Trebuchet MS" pitchFamily="34" charset="-122"/>
+                <a:cs typeface="Trebuchet MS" pitchFamily="34" charset="-120"/>
+              </a:rPr>
+              <a:t>·</a:t>
+            </a:r>
+            <a:endParaRPr lang="en-US" sz="1600" dirty="0"/>
+          </a:p>
+        </p:txBody>
+      </p:sp>
+      <p:sp>
+        <p:nvSpPr>
+          <p:cNvPr id="31" name="Shape 29"/>
+          <p:cNvSpPr/>
+          <p:nvPr/>
+        </p:nvSpPr>
+        <p:spPr>
+          <a:xfrm>
+            <a:off x="6428232" y="3364992"/>
+            <a:ext cx="1645920" cy="475488"/>
+          </a:xfrm>
+          <a:prstGeom prst="rect">
+            <a:avLst>
+              <a:gd name="adj" fmla="val 9615"/>
+            </a:avLst>
+          </a:prstGeom>
+          <a:solidFill>
+            <a:srgbClr val="FFFFFF"/>
+          </a:solidFill>
+          <a:ln w="12700">
+            <a:solidFill>
+              <a:srgbClr val="0D9488"/>
+            </a:solidFill>
+            <a:prstDash val="solid"/>
+          </a:ln>
+        </p:spPr>
+      </p:sp>
+      <p:sp>
+        <p:nvSpPr>
+          <p:cNvPr id="32" name="Text 30"/>
+          <p:cNvSpPr/>
+          <p:nvPr/>
+        </p:nvSpPr>
+        <p:spPr>
+          <a:xfrm>
+            <a:off x="6428232" y="3364992"/>
+            <a:ext cx="1645920" cy="475488"/>
+          </a:xfrm>
+          <a:prstGeom prst="rect">
+            <a:avLst/>
+          </a:prstGeom>
+          <a:noFill/>
+          <a:ln/>
+        </p:spPr>
+        <p:txBody>
+          <a:bodyPr wrap="square" lIns="0" tIns="0" rIns="0" bIns="0" rtlCol="0" anchor="ctr"/>
+          <a:lstStyle/>
+          <a:p>
+            <a:pPr algn="ctr" indent="0" marL="0">
+              <a:buNone/>
+            </a:pPr>
+            <a:r>
+              <a:rPr lang="en-US" sz="1400" b="1" dirty="0">
+                <a:solidFill>
+                  <a:srgbClr val="0D9488"/>
+                </a:solidFill>
+                <a:latin typeface="Trebuchet MS" pitchFamily="34" charset="0"/>
+                <a:ea typeface="Trebuchet MS" pitchFamily="34" charset="-122"/>
+                <a:cs typeface="Trebuchet MS" pitchFamily="34" charset="-120"/>
+              </a:rPr>
+              <a:t>ble</a:t>
+            </a:r>
+            <a:endParaRPr lang="en-US" sz="1400" dirty="0"/>
+          </a:p>
+        </p:txBody>
+      </p:sp>
+      <p:sp>
+        <p:nvSpPr>
+          <p:cNvPr id="33" name="Shape 31"/>
+          <p:cNvSpPr/>
+          <p:nvPr/>
+        </p:nvSpPr>
+        <p:spPr>
+          <a:xfrm>
+            <a:off x="365760" y="4096512"/>
+            <a:ext cx="1371600" cy="804672"/>
+          </a:xfrm>
+          <a:prstGeom prst="rect">
+            <a:avLst>
+              <a:gd name="adj" fmla="val 6818"/>
+            </a:avLst>
+          </a:prstGeom>
+          <a:solidFill>
+            <a:srgbClr val="E2E8F0"/>
+          </a:solidFill>
+          <a:ln w="12700">
+            <a:solidFill>
+              <a:srgbClr val="E2E8F0"/>
+            </a:solidFill>
+            <a:prstDash val="solid"/>
+          </a:ln>
+        </p:spPr>
+      </p:sp>
+      <p:sp>
+        <p:nvSpPr>
+          <p:cNvPr id="34" name="Text 32"/>
+          <p:cNvSpPr/>
+          <p:nvPr/>
+        </p:nvSpPr>
+        <p:spPr>
+          <a:xfrm>
+            <a:off x="365760" y="4096512"/>
+            <a:ext cx="1371600" cy="804672"/>
+          </a:xfrm>
+          <a:prstGeom prst="rect">
+            <a:avLst/>
+          </a:prstGeom>
+          <a:noFill/>
+          <a:ln/>
+        </p:spPr>
+        <p:txBody>
+          <a:bodyPr wrap="square" lIns="0" tIns="0" rIns="0" bIns="0" rtlCol="0" anchor="ctr"/>
+          <a:lstStyle/>
+          <a:p>
+            <a:pPr algn="ctr" indent="0" marL="0">
+              <a:buNone/>
+            </a:pPr>
+            <a:r>
+              <a:rPr lang="en-US" sz="1100" b="1" dirty="0">
+                <a:solidFill>
+                  <a:srgbClr val="475569"/>
+                </a:solidFill>
+                <a:latin typeface="Trebuchet MS" pitchFamily="34" charset="0"/>
+                <a:ea typeface="Trebuchet MS" pitchFamily="34" charset="-122"/>
+                <a:cs typeface="Trebuchet MS" pitchFamily="34" charset="-120"/>
+              </a:rPr>
+              <a:t>Phonemes</a:t>
+            </a:r>
+            <a:endParaRPr lang="en-US" sz="1100" dirty="0"/>
+          </a:p>
+        </p:txBody>
+      </p:sp>
+      <p:sp>
+        <p:nvSpPr>
+          <p:cNvPr id="35" name="Shape 33"/>
+          <p:cNvSpPr/>
+          <p:nvPr/>
+        </p:nvSpPr>
+        <p:spPr>
+          <a:xfrm>
+            <a:off x="1874520" y="4096512"/>
+            <a:ext cx="6903720" cy="804672"/>
+          </a:xfrm>
+          <a:prstGeom prst="rect">
+            <a:avLst>
+              <a:gd name="adj" fmla="val 6818"/>
+            </a:avLst>
+          </a:prstGeom>
+          <a:solidFill>
+            <a:srgbClr val="FCE7F3"/>
+          </a:solidFill>
+          <a:ln w="12700">
+            <a:solidFill>
+              <a:srgbClr val="DB2777"/>
+            </a:solidFill>
+            <a:prstDash val="solid"/>
+          </a:ln>
+        </p:spPr>
+      </p:sp>
+      <p:sp>
+        <p:nvSpPr>
+          <p:cNvPr id="36" name="Shape 34"/>
+          <p:cNvSpPr/>
+          <p:nvPr/>
+        </p:nvSpPr>
+        <p:spPr>
+          <a:xfrm>
+            <a:off x="2427732" y="4169664"/>
+            <a:ext cx="685800" cy="384048"/>
+          </a:xfrm>
+          <a:prstGeom prst="rect">
+            <a:avLst>
+              <a:gd name="adj" fmla="val 9524"/>
+            </a:avLst>
+          </a:prstGeom>
+          <a:solidFill>
+            <a:srgbClr val="FFFFFF"/>
+          </a:solidFill>
+          <a:ln w="12700">
+            <a:solidFill>
+              <a:srgbClr val="DB2777"/>
+            </a:solidFill>
+            <a:prstDash val="solid"/>
+          </a:ln>
+        </p:spPr>
+      </p:sp>
+      <p:sp>
+        <p:nvSpPr>
+          <p:cNvPr id="37" name="Text 35"/>
+          <p:cNvSpPr/>
+          <p:nvPr/>
+        </p:nvSpPr>
+        <p:spPr>
+          <a:xfrm>
+            <a:off x="2427732" y="4169664"/>
+            <a:ext cx="685800" cy="384048"/>
+          </a:xfrm>
+          <a:prstGeom prst="rect">
+            <a:avLst/>
+          </a:prstGeom>
+          <a:noFill/>
+          <a:ln/>
+        </p:spPr>
+        <p:txBody>
+          <a:bodyPr wrap="square" lIns="0" tIns="0" rIns="0" bIns="0" rtlCol="0" anchor="ctr"/>
+          <a:lstStyle/>
+          <a:p>
+            <a:pPr algn="ctr" indent="0" marL="0">
+              <a:buNone/>
+            </a:pPr>
+            <a:r>
+              <a:rPr lang="en-US" sz="900" b="1" dirty="0">
+                <a:solidFill>
+                  <a:srgbClr val="9D174D"/>
+                </a:solidFill>
+                <a:latin typeface="Trebuchet MS" pitchFamily="34" charset="0"/>
+                <a:ea typeface="Trebuchet MS" pitchFamily="34" charset="-122"/>
+                <a:cs typeface="Trebuchet MS" pitchFamily="34" charset="-120"/>
+              </a:rPr>
+              <a:t>v</a:t>
+            </a:r>
+            <a:endParaRPr lang="en-US" sz="900" dirty="0"/>
+          </a:p>
+        </p:txBody>
+      </p:sp>
+      <p:sp>
+        <p:nvSpPr>
+          <p:cNvPr id="38" name="Shape 36"/>
+          <p:cNvSpPr/>
+          <p:nvPr/>
+        </p:nvSpPr>
+        <p:spPr>
+          <a:xfrm>
+            <a:off x="3639312" y="4169664"/>
+            <a:ext cx="685800" cy="384048"/>
+          </a:xfrm>
+          <a:prstGeom prst="rect">
+            <a:avLst>
+              <a:gd name="adj" fmla="val 9524"/>
+            </a:avLst>
+          </a:prstGeom>
+          <a:solidFill>
+            <a:srgbClr val="FFFFFF"/>
+          </a:solidFill>
+          <a:ln w="12700">
+            <a:solidFill>
+              <a:srgbClr val="DB2777"/>
+            </a:solidFill>
+            <a:prstDash val="solid"/>
+          </a:ln>
+        </p:spPr>
+      </p:sp>
+      <p:sp>
+        <p:nvSpPr>
+          <p:cNvPr id="39" name="Text 37"/>
+          <p:cNvSpPr/>
+          <p:nvPr/>
+        </p:nvSpPr>
+        <p:spPr>
+          <a:xfrm>
+            <a:off x="3639312" y="4169664"/>
+            <a:ext cx="685800" cy="384048"/>
+          </a:xfrm>
+          <a:prstGeom prst="rect">
+            <a:avLst/>
+          </a:prstGeom>
+          <a:noFill/>
+          <a:ln/>
+        </p:spPr>
+        <p:txBody>
+          <a:bodyPr wrap="square" lIns="0" tIns="0" rIns="0" bIns="0" rtlCol="0" anchor="ctr"/>
+          <a:lstStyle/>
+          <a:p>
+            <a:pPr algn="ctr" indent="0" marL="0">
+              <a:buNone/>
+            </a:pPr>
+            <a:r>
+              <a:rPr lang="en-US" sz="900" b="1" dirty="0">
+                <a:solidFill>
+                  <a:srgbClr val="9D174D"/>
+                </a:solidFill>
+                <a:latin typeface="Trebuchet MS" pitchFamily="34" charset="0"/>
+                <a:ea typeface="Trebuchet MS" pitchFamily="34" charset="-122"/>
+                <a:cs typeface="Trebuchet MS" pitchFamily="34" charset="-120"/>
+              </a:rPr>
+              <a:t>i</a:t>
+            </a:r>
+            <a:endParaRPr lang="en-US" sz="900" dirty="0"/>
+          </a:p>
+        </p:txBody>
+      </p:sp>
+      <p:sp>
+        <p:nvSpPr>
+          <p:cNvPr id="40" name="Shape 38"/>
+          <p:cNvSpPr/>
+          <p:nvPr/>
+        </p:nvSpPr>
+        <p:spPr>
+          <a:xfrm>
+            <a:off x="4850892" y="4169664"/>
+            <a:ext cx="685800" cy="384048"/>
+          </a:xfrm>
+          <a:prstGeom prst="rect">
+            <a:avLst>
+              <a:gd name="adj" fmla="val 9524"/>
+            </a:avLst>
+          </a:prstGeom>
+          <a:solidFill>
+            <a:srgbClr val="FFFFFF"/>
+          </a:solidFill>
+          <a:ln w="12700">
+            <a:solidFill>
+              <a:srgbClr val="DB2777"/>
+            </a:solidFill>
+            <a:prstDash val="solid"/>
+          </a:ln>
+        </p:spPr>
+      </p:sp>
+      <p:sp>
+        <p:nvSpPr>
+          <p:cNvPr id="41" name="Text 39"/>
+          <p:cNvSpPr/>
+          <p:nvPr/>
+        </p:nvSpPr>
+        <p:spPr>
+          <a:xfrm>
+            <a:off x="4850892" y="4169664"/>
+            <a:ext cx="685800" cy="384048"/>
+          </a:xfrm>
+          <a:prstGeom prst="rect">
+            <a:avLst/>
+          </a:prstGeom>
+          <a:noFill/>
+          <a:ln/>
+        </p:spPr>
+        <p:txBody>
+          <a:bodyPr wrap="square" lIns="0" tIns="0" rIns="0" bIns="0" rtlCol="0" anchor="ctr"/>
+          <a:lstStyle/>
+          <a:p>
+            <a:pPr algn="ctr" indent="0" marL="0">
+              <a:buNone/>
+            </a:pPr>
+            <a:r>
+              <a:rPr lang="en-US" sz="900" b="1" dirty="0">
+                <a:solidFill>
+                  <a:srgbClr val="9D174D"/>
+                </a:solidFill>
+                <a:latin typeface="Trebuchet MS" pitchFamily="34" charset="0"/>
+                <a:ea typeface="Trebuchet MS" pitchFamily="34" charset="-122"/>
+                <a:cs typeface="Trebuchet MS" pitchFamily="34" charset="-120"/>
+              </a:rPr>
+              <a:t>s</a:t>
+            </a:r>
+            <a:endParaRPr lang="en-US" sz="900" dirty="0"/>
+          </a:p>
+        </p:txBody>
+      </p:sp>
+      <p:sp>
+        <p:nvSpPr>
+          <p:cNvPr id="42" name="Text 40"/>
+          <p:cNvSpPr/>
+          <p:nvPr/>
+        </p:nvSpPr>
+        <p:spPr>
+          <a:xfrm>
+            <a:off x="4850892" y="4572000"/>
+            <a:ext cx="685800" cy="219456"/>
           </a:xfrm>
           <a:prstGeom prst="rect">
             <a:avLst/>
@@ -10612,1110 +10870,147 @@
               <a:buNone/>
             </a:pPr>
             <a:r>
-              <a:rPr lang="en-US" sz="850" dirty="0">
-                <a:solidFill>
-                  <a:srgbClr val="475569"/>
+              <a:rPr lang="en-US" sz="750" i="1" dirty="0">
+                <a:solidFill>
+                  <a:srgbClr val="94A3B8"/>
                 </a:solidFill>
                 <a:latin typeface="Calibri" pitchFamily="34" charset="0"/>
                 <a:ea typeface="Calibri" pitchFamily="34" charset="-122"/>
                 <a:cs typeface="Calibri" pitchFamily="34" charset="-120"/>
               </a:rPr>
-              <a:t>person who does something</a:t>
-            </a:r>
-            <a:endParaRPr lang="en-US" sz="850" dirty="0"/>
-          </a:p>
-        </p:txBody>
-      </p:sp>
-      <p:sp>
-        <p:nvSpPr>
-          <p:cNvPr id="25" name="Shape 23"/>
-          <p:cNvSpPr/>
-          <p:nvPr/>
-        </p:nvSpPr>
-        <p:spPr>
-          <a:xfrm>
-            <a:off x="365760" y="3273552"/>
-            <a:ext cx="1371600" cy="658368"/>
+              <a:t>/z/</a:t>
+            </a:r>
+            <a:endParaRPr lang="en-US" sz="750" dirty="0"/>
+          </a:p>
+        </p:txBody>
+      </p:sp>
+      <p:sp>
+        <p:nvSpPr>
+          <p:cNvPr id="43" name="Shape 41"/>
+          <p:cNvSpPr/>
+          <p:nvPr/>
+        </p:nvSpPr>
+        <p:spPr>
+          <a:xfrm>
+            <a:off x="6062472" y="4169664"/>
+            <a:ext cx="685800" cy="384048"/>
           </a:xfrm>
           <a:prstGeom prst="rect">
             <a:avLst>
-              <a:gd name="adj" fmla="val 8333"/>
+              <a:gd name="adj" fmla="val 9524"/>
             </a:avLst>
           </a:prstGeom>
           <a:solidFill>
-            <a:srgbClr val="E2E8F0"/>
-          </a:solidFill>
-          <a:ln w="12700">
-            <a:solidFill>
-              <a:srgbClr val="E2E8F0"/>
-            </a:solidFill>
-            <a:prstDash val="solid"/>
-          </a:ln>
-        </p:spPr>
-      </p:sp>
-      <p:sp>
-        <p:nvSpPr>
-          <p:cNvPr id="26" name="Text 24"/>
-          <p:cNvSpPr/>
-          <p:nvPr/>
-        </p:nvSpPr>
-        <p:spPr>
-          <a:xfrm>
-            <a:off x="365760" y="3273552"/>
-            <a:ext cx="1371600" cy="658368"/>
-          </a:xfrm>
-          <a:prstGeom prst="rect">
-            <a:avLst/>
-          </a:prstGeom>
-          <a:noFill/>
-          <a:ln/>
-        </p:spPr>
-        <p:txBody>
-          <a:bodyPr wrap="square" lIns="0" tIns="0" rIns="0" bIns="0" rtlCol="0" anchor="ctr"/>
-          <a:lstStyle/>
-          <a:p>
-            <a:pPr algn="ctr" indent="0" marL="0">
-              <a:buNone/>
-            </a:pPr>
-            <a:r>
-              <a:rPr lang="en-US" sz="1100" b="1" dirty="0">
-                <a:solidFill>
-                  <a:srgbClr val="475569"/>
+            <a:srgbClr val="FFFFFF"/>
+          </a:solidFill>
+          <a:ln w="12700">
+            <a:solidFill>
+              <a:srgbClr val="DB2777"/>
+            </a:solidFill>
+            <a:prstDash val="solid"/>
+          </a:ln>
+        </p:spPr>
+      </p:sp>
+      <p:sp>
+        <p:nvSpPr>
+          <p:cNvPr id="44" name="Text 42"/>
+          <p:cNvSpPr/>
+          <p:nvPr/>
+        </p:nvSpPr>
+        <p:spPr>
+          <a:xfrm>
+            <a:off x="6062472" y="4169664"/>
+            <a:ext cx="685800" cy="384048"/>
+          </a:xfrm>
+          <a:prstGeom prst="rect">
+            <a:avLst/>
+          </a:prstGeom>
+          <a:noFill/>
+          <a:ln/>
+        </p:spPr>
+        <p:txBody>
+          <a:bodyPr wrap="square" lIns="0" tIns="0" rIns="0" bIns="0" rtlCol="0" anchor="ctr"/>
+          <a:lstStyle/>
+          <a:p>
+            <a:pPr algn="ctr" indent="0" marL="0">
+              <a:buNone/>
+            </a:pPr>
+            <a:r>
+              <a:rPr lang="en-US" sz="900" b="1" dirty="0">
+                <a:solidFill>
+                  <a:srgbClr val="9D174D"/>
                 </a:solidFill>
                 <a:latin typeface="Trebuchet MS" pitchFamily="34" charset="0"/>
                 <a:ea typeface="Trebuchet MS" pitchFamily="34" charset="-122"/>
                 <a:cs typeface="Trebuchet MS" pitchFamily="34" charset="-120"/>
               </a:rPr>
-              <a:t>Syllables</a:t>
-            </a:r>
-            <a:endParaRPr lang="en-US" sz="1100" dirty="0"/>
-          </a:p>
-        </p:txBody>
-      </p:sp>
-      <p:sp>
-        <p:nvSpPr>
-          <p:cNvPr id="27" name="Shape 25"/>
-          <p:cNvSpPr/>
-          <p:nvPr/>
-        </p:nvSpPr>
-        <p:spPr>
-          <a:xfrm>
-            <a:off x="1874520" y="3273552"/>
-            <a:ext cx="6903720" cy="658368"/>
+              <a:t>i</a:t>
+            </a:r>
+            <a:endParaRPr lang="en-US" sz="900" dirty="0"/>
+          </a:p>
+        </p:txBody>
+      </p:sp>
+      <p:sp>
+        <p:nvSpPr>
+          <p:cNvPr id="45" name="Shape 43"/>
+          <p:cNvSpPr/>
+          <p:nvPr/>
+        </p:nvSpPr>
+        <p:spPr>
+          <a:xfrm>
+            <a:off x="7274052" y="4169664"/>
+            <a:ext cx="685800" cy="384048"/>
           </a:xfrm>
           <a:prstGeom prst="rect">
             <a:avLst>
-              <a:gd name="adj" fmla="val 8333"/>
+              <a:gd name="adj" fmla="val 9524"/>
             </a:avLst>
           </a:prstGeom>
           <a:solidFill>
-            <a:srgbClr val="CCFBF1"/>
-          </a:solidFill>
-          <a:ln w="12700">
-            <a:solidFill>
-              <a:srgbClr val="0D9488"/>
-            </a:solidFill>
-            <a:prstDash val="solid"/>
-          </a:ln>
-        </p:spPr>
-      </p:sp>
-      <p:sp>
-        <p:nvSpPr>
-          <p:cNvPr id="28" name="Shape 26"/>
-          <p:cNvSpPr/>
-          <p:nvPr/>
-        </p:nvSpPr>
-        <p:spPr>
-          <a:xfrm>
-            <a:off x="1975104" y="3364992"/>
-            <a:ext cx="1554480" cy="475488"/>
-          </a:xfrm>
-          <a:prstGeom prst="rect">
-            <a:avLst>
-              <a:gd name="adj" fmla="val 9615"/>
-            </a:avLst>
-          </a:prstGeom>
-          <a:solidFill>
             <a:srgbClr val="FFFFFF"/>
           </a:solidFill>
           <a:ln w="12700">
             <a:solidFill>
-              <a:srgbClr val="0D9488"/>
-            </a:solidFill>
-            <a:prstDash val="solid"/>
-          </a:ln>
-        </p:spPr>
-      </p:sp>
-      <p:sp>
-        <p:nvSpPr>
-          <p:cNvPr id="29" name="Text 27"/>
-          <p:cNvSpPr/>
-          <p:nvPr/>
-        </p:nvSpPr>
-        <p:spPr>
-          <a:xfrm>
-            <a:off x="1975104" y="3364992"/>
-            <a:ext cx="1554480" cy="475488"/>
-          </a:xfrm>
-          <a:prstGeom prst="rect">
-            <a:avLst/>
-          </a:prstGeom>
-          <a:noFill/>
-          <a:ln/>
-        </p:spPr>
-        <p:txBody>
-          <a:bodyPr wrap="square" lIns="0" tIns="0" rIns="0" bIns="0" rtlCol="0" anchor="ctr"/>
-          <a:lstStyle/>
-          <a:p>
-            <a:pPr algn="ctr" indent="0" marL="0">
-              <a:buNone/>
-            </a:pPr>
-            <a:r>
-              <a:rPr lang="en-US" sz="1400" b="1" dirty="0">
-                <a:solidFill>
-                  <a:srgbClr val="0D9488"/>
+              <a:srgbClr val="DB2777"/>
+            </a:solidFill>
+            <a:prstDash val="solid"/>
+          </a:ln>
+        </p:spPr>
+      </p:sp>
+      <p:sp>
+        <p:nvSpPr>
+          <p:cNvPr id="46" name="Text 44"/>
+          <p:cNvSpPr/>
+          <p:nvPr/>
+        </p:nvSpPr>
+        <p:spPr>
+          <a:xfrm>
+            <a:off x="7274052" y="4169664"/>
+            <a:ext cx="685800" cy="384048"/>
+          </a:xfrm>
+          <a:prstGeom prst="rect">
+            <a:avLst/>
+          </a:prstGeom>
+          <a:noFill/>
+          <a:ln/>
+        </p:spPr>
+        <p:txBody>
+          <a:bodyPr wrap="square" lIns="0" tIns="0" rIns="0" bIns="0" rtlCol="0" anchor="ctr"/>
+          <a:lstStyle/>
+          <a:p>
+            <a:pPr algn="ctr" indent="0" marL="0">
+              <a:buNone/>
+            </a:pPr>
+            <a:r>
+              <a:rPr lang="en-US" sz="900" b="1" dirty="0">
+                <a:solidFill>
+                  <a:srgbClr val="9D174D"/>
                 </a:solidFill>
                 <a:latin typeface="Trebuchet MS" pitchFamily="34" charset="0"/>
                 <a:ea typeface="Trebuchet MS" pitchFamily="34" charset="-122"/>
                 <a:cs typeface="Trebuchet MS" pitchFamily="34" charset="-120"/>
               </a:rPr>
-              <a:t>su</a:t>
-            </a:r>
-            <a:endParaRPr lang="en-US" sz="1400" dirty="0"/>
-          </a:p>
-        </p:txBody>
-      </p:sp>
-      <p:sp>
-        <p:nvSpPr>
-          <p:cNvPr id="30" name="Text 28"/>
-          <p:cNvSpPr/>
-          <p:nvPr/>
-        </p:nvSpPr>
-        <p:spPr>
-          <a:xfrm>
-            <a:off x="3529584" y="3364992"/>
-            <a:ext cx="73152" cy="475488"/>
-          </a:xfrm>
-          <a:prstGeom prst="rect">
-            <a:avLst/>
-          </a:prstGeom>
-          <a:noFill/>
-          <a:ln/>
-        </p:spPr>
-        <p:txBody>
-          <a:bodyPr wrap="square" lIns="0" tIns="0" rIns="0" bIns="0" rtlCol="0" anchor="ctr"/>
-          <a:lstStyle/>
-          <a:p>
-            <a:pPr algn="ctr" indent="0" marL="0">
-              <a:buNone/>
-            </a:pPr>
-            <a:r>
-              <a:rPr lang="en-US" sz="1600" b="1" dirty="0">
-                <a:solidFill>
-                  <a:srgbClr val="0D9488"/>
-                </a:solidFill>
-                <a:latin typeface="Trebuchet MS" pitchFamily="34" charset="0"/>
-                <a:ea typeface="Trebuchet MS" pitchFamily="34" charset="-122"/>
-                <a:cs typeface="Trebuchet MS" pitchFamily="34" charset="-120"/>
-              </a:rPr>
-              <a:t>·</a:t>
-            </a:r>
-            <a:endParaRPr lang="en-US" sz="1600" dirty="0"/>
-          </a:p>
-        </p:txBody>
-      </p:sp>
-      <p:sp>
-        <p:nvSpPr>
-          <p:cNvPr id="31" name="Shape 29"/>
-          <p:cNvSpPr/>
-          <p:nvPr/>
-        </p:nvSpPr>
-        <p:spPr>
-          <a:xfrm>
-            <a:off x="3602736" y="3364992"/>
-            <a:ext cx="1554480" cy="475488"/>
-          </a:xfrm>
-          <a:prstGeom prst="rect">
-            <a:avLst>
-              <a:gd name="adj" fmla="val 9615"/>
-            </a:avLst>
-          </a:prstGeom>
-          <a:solidFill>
-            <a:srgbClr val="FFFFFF"/>
-          </a:solidFill>
-          <a:ln w="12700">
-            <a:solidFill>
-              <a:srgbClr val="0D9488"/>
-            </a:solidFill>
-            <a:prstDash val="solid"/>
-          </a:ln>
-        </p:spPr>
-      </p:sp>
-      <p:sp>
-        <p:nvSpPr>
-          <p:cNvPr id="32" name="Text 30"/>
-          <p:cNvSpPr/>
-          <p:nvPr/>
-        </p:nvSpPr>
-        <p:spPr>
-          <a:xfrm>
-            <a:off x="3602736" y="3364992"/>
-            <a:ext cx="1554480" cy="475488"/>
-          </a:xfrm>
-          <a:prstGeom prst="rect">
-            <a:avLst/>
-          </a:prstGeom>
-          <a:noFill/>
-          <a:ln/>
-        </p:spPr>
-        <p:txBody>
-          <a:bodyPr wrap="square" lIns="0" tIns="0" rIns="0" bIns="0" rtlCol="0" anchor="ctr"/>
-          <a:lstStyle/>
-          <a:p>
-            <a:pPr algn="ctr" indent="0" marL="0">
-              <a:buNone/>
-            </a:pPr>
-            <a:r>
-              <a:rPr lang="en-US" sz="1400" b="1" dirty="0">
-                <a:solidFill>
-                  <a:srgbClr val="0D9488"/>
-                </a:solidFill>
-                <a:latin typeface="Trebuchet MS" pitchFamily="34" charset="0"/>
-                <a:ea typeface="Trebuchet MS" pitchFamily="34" charset="-122"/>
-                <a:cs typeface="Trebuchet MS" pitchFamily="34" charset="-120"/>
-              </a:rPr>
-              <a:t>per</a:t>
-            </a:r>
-            <a:endParaRPr lang="en-US" sz="1400" dirty="0"/>
-          </a:p>
-        </p:txBody>
-      </p:sp>
-      <p:sp>
-        <p:nvSpPr>
-          <p:cNvPr id="33" name="Text 31"/>
-          <p:cNvSpPr/>
-          <p:nvPr/>
-        </p:nvSpPr>
-        <p:spPr>
-          <a:xfrm>
-            <a:off x="5157216" y="3364992"/>
-            <a:ext cx="73152" cy="475488"/>
-          </a:xfrm>
-          <a:prstGeom prst="rect">
-            <a:avLst/>
-          </a:prstGeom>
-          <a:noFill/>
-          <a:ln/>
-        </p:spPr>
-        <p:txBody>
-          <a:bodyPr wrap="square" lIns="0" tIns="0" rIns="0" bIns="0" rtlCol="0" anchor="ctr"/>
-          <a:lstStyle/>
-          <a:p>
-            <a:pPr algn="ctr" indent="0" marL="0">
-              <a:buNone/>
-            </a:pPr>
-            <a:r>
-              <a:rPr lang="en-US" sz="1600" b="1" dirty="0">
-                <a:solidFill>
-                  <a:srgbClr val="0D9488"/>
-                </a:solidFill>
-                <a:latin typeface="Trebuchet MS" pitchFamily="34" charset="0"/>
-                <a:ea typeface="Trebuchet MS" pitchFamily="34" charset="-122"/>
-                <a:cs typeface="Trebuchet MS" pitchFamily="34" charset="-120"/>
-              </a:rPr>
-              <a:t>·</a:t>
-            </a:r>
-            <a:endParaRPr lang="en-US" sz="1600" dirty="0"/>
-          </a:p>
-        </p:txBody>
-      </p:sp>
-      <p:sp>
-        <p:nvSpPr>
-          <p:cNvPr id="34" name="Shape 32"/>
-          <p:cNvSpPr/>
-          <p:nvPr/>
-        </p:nvSpPr>
-        <p:spPr>
-          <a:xfrm>
-            <a:off x="5230368" y="3364992"/>
-            <a:ext cx="1554480" cy="475488"/>
-          </a:xfrm>
-          <a:prstGeom prst="rect">
-            <a:avLst>
-              <a:gd name="adj" fmla="val 9615"/>
-            </a:avLst>
-          </a:prstGeom>
-          <a:solidFill>
-            <a:srgbClr val="FFFFFF"/>
-          </a:solidFill>
-          <a:ln w="12700">
-            <a:solidFill>
-              <a:srgbClr val="0D9488"/>
-            </a:solidFill>
-            <a:prstDash val="solid"/>
-          </a:ln>
-        </p:spPr>
-      </p:sp>
-      <p:sp>
-        <p:nvSpPr>
-          <p:cNvPr id="35" name="Text 33"/>
-          <p:cNvSpPr/>
-          <p:nvPr/>
-        </p:nvSpPr>
-        <p:spPr>
-          <a:xfrm>
-            <a:off x="5230368" y="3364992"/>
-            <a:ext cx="1554480" cy="475488"/>
-          </a:xfrm>
-          <a:prstGeom prst="rect">
-            <a:avLst/>
-          </a:prstGeom>
-          <a:noFill/>
-          <a:ln/>
-        </p:spPr>
-        <p:txBody>
-          <a:bodyPr wrap="square" lIns="0" tIns="0" rIns="0" bIns="0" rtlCol="0" anchor="ctr"/>
-          <a:lstStyle/>
-          <a:p>
-            <a:pPr algn="ctr" indent="0" marL="0">
-              <a:buNone/>
-            </a:pPr>
-            <a:r>
-              <a:rPr lang="en-US" sz="1400" b="1" dirty="0">
-                <a:solidFill>
-                  <a:srgbClr val="0D9488"/>
-                </a:solidFill>
-                <a:latin typeface="Trebuchet MS" pitchFamily="34" charset="0"/>
-                <a:ea typeface="Trebuchet MS" pitchFamily="34" charset="-122"/>
-                <a:cs typeface="Trebuchet MS" pitchFamily="34" charset="-120"/>
-              </a:rPr>
-              <a:t>vi</a:t>
-            </a:r>
-            <a:endParaRPr lang="en-US" sz="1400" dirty="0"/>
-          </a:p>
-        </p:txBody>
-      </p:sp>
-      <p:sp>
-        <p:nvSpPr>
-          <p:cNvPr id="36" name="Text 34"/>
-          <p:cNvSpPr/>
-          <p:nvPr/>
-        </p:nvSpPr>
-        <p:spPr>
-          <a:xfrm>
-            <a:off x="6784848" y="3364992"/>
-            <a:ext cx="73152" cy="475488"/>
-          </a:xfrm>
-          <a:prstGeom prst="rect">
-            <a:avLst/>
-          </a:prstGeom>
-          <a:noFill/>
-          <a:ln/>
-        </p:spPr>
-        <p:txBody>
-          <a:bodyPr wrap="square" lIns="0" tIns="0" rIns="0" bIns="0" rtlCol="0" anchor="ctr"/>
-          <a:lstStyle/>
-          <a:p>
-            <a:pPr algn="ctr" indent="0" marL="0">
-              <a:buNone/>
-            </a:pPr>
-            <a:r>
-              <a:rPr lang="en-US" sz="1600" b="1" dirty="0">
-                <a:solidFill>
-                  <a:srgbClr val="0D9488"/>
-                </a:solidFill>
-                <a:latin typeface="Trebuchet MS" pitchFamily="34" charset="0"/>
-                <a:ea typeface="Trebuchet MS" pitchFamily="34" charset="-122"/>
-                <a:cs typeface="Trebuchet MS" pitchFamily="34" charset="-120"/>
-              </a:rPr>
-              <a:t>·</a:t>
-            </a:r>
-            <a:endParaRPr lang="en-US" sz="1600" dirty="0"/>
-          </a:p>
-        </p:txBody>
-      </p:sp>
-      <p:sp>
-        <p:nvSpPr>
-          <p:cNvPr id="37" name="Shape 35"/>
-          <p:cNvSpPr/>
-          <p:nvPr/>
-        </p:nvSpPr>
-        <p:spPr>
-          <a:xfrm>
-            <a:off x="6858000" y="3364992"/>
-            <a:ext cx="1554480" cy="475488"/>
-          </a:xfrm>
-          <a:prstGeom prst="rect">
-            <a:avLst>
-              <a:gd name="adj" fmla="val 9615"/>
-            </a:avLst>
-          </a:prstGeom>
-          <a:solidFill>
-            <a:srgbClr val="FFFFFF"/>
-          </a:solidFill>
-          <a:ln w="12700">
-            <a:solidFill>
-              <a:srgbClr val="0D9488"/>
-            </a:solidFill>
-            <a:prstDash val="solid"/>
-          </a:ln>
-        </p:spPr>
-      </p:sp>
-      <p:sp>
-        <p:nvSpPr>
-          <p:cNvPr id="38" name="Text 36"/>
-          <p:cNvSpPr/>
-          <p:nvPr/>
-        </p:nvSpPr>
-        <p:spPr>
-          <a:xfrm>
-            <a:off x="6858000" y="3364992"/>
-            <a:ext cx="1554480" cy="475488"/>
-          </a:xfrm>
-          <a:prstGeom prst="rect">
-            <a:avLst/>
-          </a:prstGeom>
-          <a:noFill/>
-          <a:ln/>
-        </p:spPr>
-        <p:txBody>
-          <a:bodyPr wrap="square" lIns="0" tIns="0" rIns="0" bIns="0" rtlCol="0" anchor="ctr"/>
-          <a:lstStyle/>
-          <a:p>
-            <a:pPr algn="ctr" indent="0" marL="0">
-              <a:buNone/>
-            </a:pPr>
-            <a:r>
-              <a:rPr lang="en-US" sz="1400" b="1" dirty="0">
-                <a:solidFill>
-                  <a:srgbClr val="0D9488"/>
-                </a:solidFill>
-                <a:latin typeface="Trebuchet MS" pitchFamily="34" charset="0"/>
-                <a:ea typeface="Trebuchet MS" pitchFamily="34" charset="-122"/>
-                <a:cs typeface="Trebuchet MS" pitchFamily="34" charset="-120"/>
-              </a:rPr>
-              <a:t>sor</a:t>
-            </a:r>
-            <a:endParaRPr lang="en-US" sz="1400" dirty="0"/>
-          </a:p>
-        </p:txBody>
-      </p:sp>
-      <p:sp>
-        <p:nvSpPr>
-          <p:cNvPr id="39" name="Shape 37"/>
-          <p:cNvSpPr/>
-          <p:nvPr/>
-        </p:nvSpPr>
-        <p:spPr>
-          <a:xfrm>
-            <a:off x="365760" y="4096512"/>
-            <a:ext cx="1371600" cy="804672"/>
-          </a:xfrm>
-          <a:prstGeom prst="rect">
-            <a:avLst>
-              <a:gd name="adj" fmla="val 6818"/>
-            </a:avLst>
-          </a:prstGeom>
-          <a:solidFill>
-            <a:srgbClr val="E2E8F0"/>
-          </a:solidFill>
-          <a:ln w="12700">
-            <a:solidFill>
-              <a:srgbClr val="E2E8F0"/>
-            </a:solidFill>
-            <a:prstDash val="solid"/>
-          </a:ln>
-        </p:spPr>
-      </p:sp>
-      <p:sp>
-        <p:nvSpPr>
-          <p:cNvPr id="40" name="Text 38"/>
-          <p:cNvSpPr/>
-          <p:nvPr/>
-        </p:nvSpPr>
-        <p:spPr>
-          <a:xfrm>
-            <a:off x="365760" y="4096512"/>
-            <a:ext cx="1371600" cy="804672"/>
-          </a:xfrm>
-          <a:prstGeom prst="rect">
-            <a:avLst/>
-          </a:prstGeom>
-          <a:noFill/>
-          <a:ln/>
-        </p:spPr>
-        <p:txBody>
-          <a:bodyPr wrap="square" lIns="0" tIns="0" rIns="0" bIns="0" rtlCol="0" anchor="ctr"/>
-          <a:lstStyle/>
-          <a:p>
-            <a:pPr algn="ctr" indent="0" marL="0">
-              <a:buNone/>
-            </a:pPr>
-            <a:r>
-              <a:rPr lang="en-US" sz="1100" b="1" dirty="0">
-                <a:solidFill>
-                  <a:srgbClr val="475569"/>
-                </a:solidFill>
-                <a:latin typeface="Trebuchet MS" pitchFamily="34" charset="0"/>
-                <a:ea typeface="Trebuchet MS" pitchFamily="34" charset="-122"/>
-                <a:cs typeface="Trebuchet MS" pitchFamily="34" charset="-120"/>
-              </a:rPr>
-              <a:t>Phonemes</a:t>
-            </a:r>
-            <a:endParaRPr lang="en-US" sz="1100" dirty="0"/>
-          </a:p>
-        </p:txBody>
-      </p:sp>
-      <p:sp>
-        <p:nvSpPr>
-          <p:cNvPr id="41" name="Shape 39"/>
-          <p:cNvSpPr/>
-          <p:nvPr/>
-        </p:nvSpPr>
-        <p:spPr>
-          <a:xfrm>
-            <a:off x="1874520" y="4096512"/>
-            <a:ext cx="6903720" cy="658368"/>
-          </a:xfrm>
-          <a:prstGeom prst="rect">
-            <a:avLst>
-              <a:gd name="adj" fmla="val 8333"/>
-            </a:avLst>
-          </a:prstGeom>
-          <a:solidFill>
-            <a:srgbClr val="FCE7F3"/>
-          </a:solidFill>
-          <a:ln w="12700">
-            <a:solidFill>
-              <a:srgbClr val="DB2777"/>
-            </a:solidFill>
-            <a:prstDash val="solid"/>
-          </a:ln>
-        </p:spPr>
-      </p:sp>
-      <p:sp>
-        <p:nvSpPr>
-          <p:cNvPr id="42" name="Shape 40"/>
-          <p:cNvSpPr/>
-          <p:nvPr/>
-        </p:nvSpPr>
-        <p:spPr>
-          <a:xfrm>
-            <a:off x="2023872" y="4169664"/>
-            <a:ext cx="685800" cy="475488"/>
-          </a:xfrm>
-          <a:prstGeom prst="rect">
-            <a:avLst>
-              <a:gd name="adj" fmla="val 7692"/>
-            </a:avLst>
-          </a:prstGeom>
-          <a:solidFill>
-            <a:srgbClr val="FFFFFF"/>
-          </a:solidFill>
-          <a:ln w="12700">
-            <a:solidFill>
-              <a:srgbClr val="DB2777"/>
-            </a:solidFill>
-            <a:prstDash val="solid"/>
-          </a:ln>
-        </p:spPr>
-      </p:sp>
-      <p:sp>
-        <p:nvSpPr>
-          <p:cNvPr id="43" name="Text 41"/>
-          <p:cNvSpPr/>
-          <p:nvPr/>
-        </p:nvSpPr>
-        <p:spPr>
-          <a:xfrm>
-            <a:off x="2023872" y="4169664"/>
-            <a:ext cx="685800" cy="475488"/>
-          </a:xfrm>
-          <a:prstGeom prst="rect">
-            <a:avLst/>
-          </a:prstGeom>
-          <a:noFill/>
-          <a:ln/>
-        </p:spPr>
-        <p:txBody>
-          <a:bodyPr wrap="square" lIns="0" tIns="0" rIns="0" bIns="0" rtlCol="0" anchor="ctr"/>
-          <a:lstStyle/>
-          <a:p>
-            <a:pPr algn="ctr" indent="0" marL="0">
-              <a:buNone/>
-            </a:pPr>
-            <a:r>
-              <a:rPr lang="en-US" sz="900" b="1" dirty="0">
-                <a:solidFill>
-                  <a:srgbClr val="9D174D"/>
-                </a:solidFill>
-                <a:latin typeface="Trebuchet MS" pitchFamily="34" charset="0"/>
-                <a:ea typeface="Trebuchet MS" pitchFamily="34" charset="-122"/>
-                <a:cs typeface="Trebuchet MS" pitchFamily="34" charset="-120"/>
-              </a:rPr>
-              <a:t>s</a:t>
-            </a:r>
-            <a:endParaRPr lang="en-US" sz="900" dirty="0"/>
-          </a:p>
-        </p:txBody>
-      </p:sp>
-      <p:sp>
-        <p:nvSpPr>
-          <p:cNvPr id="44" name="Shape 42"/>
-          <p:cNvSpPr/>
-          <p:nvPr/>
-        </p:nvSpPr>
-        <p:spPr>
-          <a:xfrm>
-            <a:off x="2831592" y="4169664"/>
-            <a:ext cx="685800" cy="475488"/>
-          </a:xfrm>
-          <a:prstGeom prst="rect">
-            <a:avLst>
-              <a:gd name="adj" fmla="val 7692"/>
-            </a:avLst>
-          </a:prstGeom>
-          <a:solidFill>
-            <a:srgbClr val="FFFFFF"/>
-          </a:solidFill>
-          <a:ln w="12700">
-            <a:solidFill>
-              <a:srgbClr val="DB2777"/>
-            </a:solidFill>
-            <a:prstDash val="solid"/>
-          </a:ln>
-        </p:spPr>
-      </p:sp>
-      <p:sp>
-        <p:nvSpPr>
-          <p:cNvPr id="45" name="Text 43"/>
-          <p:cNvSpPr/>
-          <p:nvPr/>
-        </p:nvSpPr>
-        <p:spPr>
-          <a:xfrm>
-            <a:off x="2831592" y="4169664"/>
-            <a:ext cx="685800" cy="475488"/>
-          </a:xfrm>
-          <a:prstGeom prst="rect">
-            <a:avLst/>
-          </a:prstGeom>
-          <a:noFill/>
-          <a:ln/>
-        </p:spPr>
-        <p:txBody>
-          <a:bodyPr wrap="square" lIns="0" tIns="0" rIns="0" bIns="0" rtlCol="0" anchor="ctr"/>
-          <a:lstStyle/>
-          <a:p>
-            <a:pPr algn="ctr" indent="0" marL="0">
-              <a:buNone/>
-            </a:pPr>
-            <a:r>
-              <a:rPr lang="en-US" sz="900" b="1" dirty="0">
-                <a:solidFill>
-                  <a:srgbClr val="9D174D"/>
-                </a:solidFill>
-                <a:latin typeface="Trebuchet MS" pitchFamily="34" charset="0"/>
-                <a:ea typeface="Trebuchet MS" pitchFamily="34" charset="-122"/>
-                <a:cs typeface="Trebuchet MS" pitchFamily="34" charset="-120"/>
-              </a:rPr>
-              <a:t>u</a:t>
-            </a:r>
-            <a:endParaRPr lang="en-US" sz="900" dirty="0"/>
-          </a:p>
-        </p:txBody>
-      </p:sp>
-      <p:sp>
-        <p:nvSpPr>
-          <p:cNvPr id="46" name="Shape 44"/>
-          <p:cNvSpPr/>
-          <p:nvPr/>
-        </p:nvSpPr>
-        <p:spPr>
-          <a:xfrm>
-            <a:off x="3639312" y="4169664"/>
-            <a:ext cx="685800" cy="475488"/>
-          </a:xfrm>
-          <a:prstGeom prst="rect">
-            <a:avLst>
-              <a:gd name="adj" fmla="val 7692"/>
-            </a:avLst>
-          </a:prstGeom>
-          <a:solidFill>
-            <a:srgbClr val="FFFFFF"/>
-          </a:solidFill>
-          <a:ln w="12700">
-            <a:solidFill>
-              <a:srgbClr val="DB2777"/>
-            </a:solidFill>
-            <a:prstDash val="solid"/>
-          </a:ln>
-        </p:spPr>
-      </p:sp>
-      <p:sp>
-        <p:nvSpPr>
-          <p:cNvPr id="47" name="Text 45"/>
-          <p:cNvSpPr/>
-          <p:nvPr/>
-        </p:nvSpPr>
-        <p:spPr>
-          <a:xfrm>
-            <a:off x="3639312" y="4169664"/>
-            <a:ext cx="685800" cy="475488"/>
-          </a:xfrm>
-          <a:prstGeom prst="rect">
-            <a:avLst/>
-          </a:prstGeom>
-          <a:noFill/>
-          <a:ln/>
-        </p:spPr>
-        <p:txBody>
-          <a:bodyPr wrap="square" lIns="0" tIns="0" rIns="0" bIns="0" rtlCol="0" anchor="ctr"/>
-          <a:lstStyle/>
-          <a:p>
-            <a:pPr algn="ctr" indent="0" marL="0">
-              <a:buNone/>
-            </a:pPr>
-            <a:r>
-              <a:rPr lang="en-US" sz="900" b="1" dirty="0">
-                <a:solidFill>
-                  <a:srgbClr val="9D174D"/>
-                </a:solidFill>
-                <a:latin typeface="Trebuchet MS" pitchFamily="34" charset="0"/>
-                <a:ea typeface="Trebuchet MS" pitchFamily="34" charset="-122"/>
-                <a:cs typeface="Trebuchet MS" pitchFamily="34" charset="-120"/>
-              </a:rPr>
-              <a:t>p</a:t>
-            </a:r>
-            <a:endParaRPr lang="en-US" sz="900" dirty="0"/>
-          </a:p>
-        </p:txBody>
-      </p:sp>
-      <p:sp>
-        <p:nvSpPr>
-          <p:cNvPr id="48" name="Shape 46"/>
-          <p:cNvSpPr/>
-          <p:nvPr/>
-        </p:nvSpPr>
-        <p:spPr>
-          <a:xfrm>
-            <a:off x="4447032" y="4169664"/>
-            <a:ext cx="685800" cy="475488"/>
-          </a:xfrm>
-          <a:prstGeom prst="rect">
-            <a:avLst>
-              <a:gd name="adj" fmla="val 7692"/>
-            </a:avLst>
-          </a:prstGeom>
-          <a:solidFill>
-            <a:srgbClr val="FFFFFF"/>
-          </a:solidFill>
-          <a:ln w="12700">
-            <a:solidFill>
-              <a:srgbClr val="DB2777"/>
-            </a:solidFill>
-            <a:prstDash val="solid"/>
-          </a:ln>
-        </p:spPr>
-      </p:sp>
-      <p:sp>
-        <p:nvSpPr>
-          <p:cNvPr id="49" name="Text 47"/>
-          <p:cNvSpPr/>
-          <p:nvPr/>
-        </p:nvSpPr>
-        <p:spPr>
-          <a:xfrm>
-            <a:off x="4447032" y="4169664"/>
-            <a:ext cx="685800" cy="475488"/>
-          </a:xfrm>
-          <a:prstGeom prst="rect">
-            <a:avLst/>
-          </a:prstGeom>
-          <a:noFill/>
-          <a:ln/>
-        </p:spPr>
-        <p:txBody>
-          <a:bodyPr wrap="square" lIns="0" tIns="0" rIns="0" bIns="0" rtlCol="0" anchor="ctr"/>
-          <a:lstStyle/>
-          <a:p>
-            <a:pPr algn="ctr" indent="0" marL="0">
-              <a:buNone/>
-            </a:pPr>
-            <a:r>
-              <a:rPr lang="en-US" sz="900" b="1" dirty="0">
-                <a:solidFill>
-                  <a:srgbClr val="9D174D"/>
-                </a:solidFill>
-                <a:latin typeface="Trebuchet MS" pitchFamily="34" charset="0"/>
-                <a:ea typeface="Trebuchet MS" pitchFamily="34" charset="-122"/>
-                <a:cs typeface="Trebuchet MS" pitchFamily="34" charset="-120"/>
-              </a:rPr>
-              <a:t>er</a:t>
-            </a:r>
-            <a:endParaRPr lang="en-US" sz="900" dirty="0"/>
-          </a:p>
-        </p:txBody>
-      </p:sp>
-      <p:sp>
-        <p:nvSpPr>
-          <p:cNvPr id="50" name="Shape 48"/>
-          <p:cNvSpPr/>
-          <p:nvPr/>
-        </p:nvSpPr>
-        <p:spPr>
-          <a:xfrm>
-            <a:off x="5254752" y="4169664"/>
-            <a:ext cx="685800" cy="475488"/>
-          </a:xfrm>
-          <a:prstGeom prst="rect">
-            <a:avLst>
-              <a:gd name="adj" fmla="val 7692"/>
-            </a:avLst>
-          </a:prstGeom>
-          <a:solidFill>
-            <a:srgbClr val="FFFFFF"/>
-          </a:solidFill>
-          <a:ln w="12700">
-            <a:solidFill>
-              <a:srgbClr val="DB2777"/>
-            </a:solidFill>
-            <a:prstDash val="solid"/>
-          </a:ln>
-        </p:spPr>
-      </p:sp>
-      <p:sp>
-        <p:nvSpPr>
-          <p:cNvPr id="51" name="Text 49"/>
-          <p:cNvSpPr/>
-          <p:nvPr/>
-        </p:nvSpPr>
-        <p:spPr>
-          <a:xfrm>
-            <a:off x="5254752" y="4169664"/>
-            <a:ext cx="685800" cy="475488"/>
-          </a:xfrm>
-          <a:prstGeom prst="rect">
-            <a:avLst/>
-          </a:prstGeom>
-          <a:noFill/>
-          <a:ln/>
-        </p:spPr>
-        <p:txBody>
-          <a:bodyPr wrap="square" lIns="0" tIns="0" rIns="0" bIns="0" rtlCol="0" anchor="ctr"/>
-          <a:lstStyle/>
-          <a:p>
-            <a:pPr algn="ctr" indent="0" marL="0">
-              <a:buNone/>
-            </a:pPr>
-            <a:r>
-              <a:rPr lang="en-US" sz="900" b="1" dirty="0">
-                <a:solidFill>
-                  <a:srgbClr val="9D174D"/>
-                </a:solidFill>
-                <a:latin typeface="Trebuchet MS" pitchFamily="34" charset="0"/>
-                <a:ea typeface="Trebuchet MS" pitchFamily="34" charset="-122"/>
-                <a:cs typeface="Trebuchet MS" pitchFamily="34" charset="-120"/>
-              </a:rPr>
-              <a:t>v</a:t>
-            </a:r>
-            <a:endParaRPr lang="en-US" sz="900" dirty="0"/>
-          </a:p>
-        </p:txBody>
-      </p:sp>
-      <p:sp>
-        <p:nvSpPr>
-          <p:cNvPr id="52" name="Shape 50"/>
-          <p:cNvSpPr/>
-          <p:nvPr/>
-        </p:nvSpPr>
-        <p:spPr>
-          <a:xfrm>
-            <a:off x="6062472" y="4169664"/>
-            <a:ext cx="685800" cy="475488"/>
-          </a:xfrm>
-          <a:prstGeom prst="rect">
-            <a:avLst>
-              <a:gd name="adj" fmla="val 7692"/>
-            </a:avLst>
-          </a:prstGeom>
-          <a:solidFill>
-            <a:srgbClr val="FFFFFF"/>
-          </a:solidFill>
-          <a:ln w="12700">
-            <a:solidFill>
-              <a:srgbClr val="DB2777"/>
-            </a:solidFill>
-            <a:prstDash val="solid"/>
-          </a:ln>
-        </p:spPr>
-      </p:sp>
-      <p:sp>
-        <p:nvSpPr>
-          <p:cNvPr id="53" name="Text 51"/>
-          <p:cNvSpPr/>
-          <p:nvPr/>
-        </p:nvSpPr>
-        <p:spPr>
-          <a:xfrm>
-            <a:off x="6062472" y="4169664"/>
-            <a:ext cx="685800" cy="475488"/>
-          </a:xfrm>
-          <a:prstGeom prst="rect">
-            <a:avLst/>
-          </a:prstGeom>
-          <a:noFill/>
-          <a:ln/>
-        </p:spPr>
-        <p:txBody>
-          <a:bodyPr wrap="square" lIns="0" tIns="0" rIns="0" bIns="0" rtlCol="0" anchor="ctr"/>
-          <a:lstStyle/>
-          <a:p>
-            <a:pPr algn="ctr" indent="0" marL="0">
-              <a:buNone/>
-            </a:pPr>
-            <a:r>
-              <a:rPr lang="en-US" sz="900" b="1" dirty="0">
-                <a:solidFill>
-                  <a:srgbClr val="9D174D"/>
-                </a:solidFill>
-                <a:latin typeface="Trebuchet MS" pitchFamily="34" charset="0"/>
-                <a:ea typeface="Trebuchet MS" pitchFamily="34" charset="-122"/>
-                <a:cs typeface="Trebuchet MS" pitchFamily="34" charset="-120"/>
-              </a:rPr>
-              <a:t>i</a:t>
-            </a:r>
-            <a:endParaRPr lang="en-US" sz="900" dirty="0"/>
-          </a:p>
-        </p:txBody>
-      </p:sp>
-      <p:sp>
-        <p:nvSpPr>
-          <p:cNvPr id="54" name="Shape 52"/>
-          <p:cNvSpPr/>
-          <p:nvPr/>
-        </p:nvSpPr>
-        <p:spPr>
-          <a:xfrm>
-            <a:off x="6870192" y="4169664"/>
-            <a:ext cx="685800" cy="475488"/>
-          </a:xfrm>
-          <a:prstGeom prst="rect">
-            <a:avLst>
-              <a:gd name="adj" fmla="val 7692"/>
-            </a:avLst>
-          </a:prstGeom>
-          <a:solidFill>
-            <a:srgbClr val="FFFFFF"/>
-          </a:solidFill>
-          <a:ln w="12700">
-            <a:solidFill>
-              <a:srgbClr val="DB2777"/>
-            </a:solidFill>
-            <a:prstDash val="solid"/>
-          </a:ln>
-        </p:spPr>
-      </p:sp>
-      <p:sp>
-        <p:nvSpPr>
-          <p:cNvPr id="55" name="Text 53"/>
-          <p:cNvSpPr/>
-          <p:nvPr/>
-        </p:nvSpPr>
-        <p:spPr>
-          <a:xfrm>
-            <a:off x="6870192" y="4169664"/>
-            <a:ext cx="685800" cy="475488"/>
-          </a:xfrm>
-          <a:prstGeom prst="rect">
-            <a:avLst/>
-          </a:prstGeom>
-          <a:noFill/>
-          <a:ln/>
-        </p:spPr>
-        <p:txBody>
-          <a:bodyPr wrap="square" lIns="0" tIns="0" rIns="0" bIns="0" rtlCol="0" anchor="ctr"/>
-          <a:lstStyle/>
-          <a:p>
-            <a:pPr algn="ctr" indent="0" marL="0">
-              <a:buNone/>
-            </a:pPr>
-            <a:r>
-              <a:rPr lang="en-US" sz="900" b="1" dirty="0">
-                <a:solidFill>
-                  <a:srgbClr val="9D174D"/>
-                </a:solidFill>
-                <a:latin typeface="Trebuchet MS" pitchFamily="34" charset="0"/>
-                <a:ea typeface="Trebuchet MS" pitchFamily="34" charset="-122"/>
-                <a:cs typeface="Trebuchet MS" pitchFamily="34" charset="-120"/>
-              </a:rPr>
-              <a:t>s</a:t>
-            </a:r>
-            <a:endParaRPr lang="en-US" sz="900" dirty="0"/>
-          </a:p>
-        </p:txBody>
-      </p:sp>
-      <p:sp>
-        <p:nvSpPr>
-          <p:cNvPr id="56" name="Shape 54"/>
-          <p:cNvSpPr/>
-          <p:nvPr/>
-        </p:nvSpPr>
-        <p:spPr>
-          <a:xfrm>
-            <a:off x="7677912" y="4169664"/>
-            <a:ext cx="685800" cy="475488"/>
-          </a:xfrm>
-          <a:prstGeom prst="rect">
-            <a:avLst>
-              <a:gd name="adj" fmla="val 7692"/>
-            </a:avLst>
-          </a:prstGeom>
-          <a:solidFill>
-            <a:srgbClr val="FFFFFF"/>
-          </a:solidFill>
-          <a:ln w="12700">
-            <a:solidFill>
-              <a:srgbClr val="DB2777"/>
-            </a:solidFill>
-            <a:prstDash val="solid"/>
-          </a:ln>
-        </p:spPr>
-      </p:sp>
-      <p:sp>
-        <p:nvSpPr>
-          <p:cNvPr id="57" name="Text 55"/>
-          <p:cNvSpPr/>
-          <p:nvPr/>
-        </p:nvSpPr>
-        <p:spPr>
-          <a:xfrm>
-            <a:off x="7677912" y="4169664"/>
-            <a:ext cx="685800" cy="475488"/>
-          </a:xfrm>
-          <a:prstGeom prst="rect">
-            <a:avLst/>
-          </a:prstGeom>
-          <a:noFill/>
-          <a:ln/>
-        </p:spPr>
-        <p:txBody>
-          <a:bodyPr wrap="square" lIns="0" tIns="0" rIns="0" bIns="0" rtlCol="0" anchor="ctr"/>
-          <a:lstStyle/>
-          <a:p>
-            <a:pPr algn="ctr" indent="0" marL="0">
-              <a:buNone/>
-            </a:pPr>
-            <a:r>
-              <a:rPr lang="en-US" sz="900" b="1" dirty="0">
-                <a:solidFill>
-                  <a:srgbClr val="9D174D"/>
-                </a:solidFill>
-                <a:latin typeface="Trebuchet MS" pitchFamily="34" charset="0"/>
-                <a:ea typeface="Trebuchet MS" pitchFamily="34" charset="-122"/>
-                <a:cs typeface="Trebuchet MS" pitchFamily="34" charset="-120"/>
-              </a:rPr>
-              <a:t>or</a:t>
+              <a:t>ble</a:t>
             </a:r>
             <a:endParaRPr lang="en-US" sz="900" dirty="0"/>
           </a:p>
@@ -12146,7 +11441,7 @@
                 <a:ea typeface="Trebuchet MS" pitchFamily="34" charset="-122"/>
                 <a:cs typeface="Trebuchet MS" pitchFamily="34" charset="-120"/>
               </a:rPr>
-              <a:t>visible</a:t>
+              <a:t>supervisor</a:t>
             </a:r>
             <a:endParaRPr lang="en-US" sz="2800" dirty="0"/>
           </a:p>
@@ -12973,7 +12268,7 @@
                 <a:ea typeface="Trebuchet MS" pitchFamily="34" charset="-122"/>
                 <a:cs typeface="Trebuchet MS" pitchFamily="34" charset="-120"/>
               </a:rPr>
-              <a:t>visible</a:t>
+              <a:t>supervisor</a:t>
             </a:r>
             <a:endParaRPr lang="en-US" sz="2800" dirty="0"/>
           </a:p>
@@ -13053,7 +12348,7 @@
         </p:nvSpPr>
         <p:spPr>
           <a:xfrm>
-            <a:off x="2938272" y="2258568"/>
+            <a:off x="2221992" y="2258568"/>
             <a:ext cx="1828800" cy="292608"/>
           </a:xfrm>
           <a:prstGeom prst="rect">
@@ -13062,11 +12357,11 @@
             </a:avLst>
           </a:prstGeom>
           <a:solidFill>
-            <a:srgbClr val="CCFBF1"/>
+            <a:srgbClr val="DDD6FE"/>
           </a:solidFill>
           <a:ln w="19050">
             <a:solidFill>
-              <a:srgbClr val="0D9488"/>
+              <a:srgbClr val="7C3AED"/>
             </a:solidFill>
             <a:prstDash val="solid"/>
           </a:ln>
@@ -13087,7 +12382,7 @@
         </p:nvSpPr>
         <p:spPr>
           <a:xfrm>
-            <a:off x="2938272" y="2258568"/>
+            <a:off x="2221992" y="2258568"/>
             <a:ext cx="1828800" cy="292608"/>
           </a:xfrm>
           <a:prstGeom prst="rect">
@@ -13106,13 +12401,13 @@
             <a:r>
               <a:rPr lang="en-US" sz="1300" b="1" dirty="0">
                 <a:solidFill>
-                  <a:srgbClr val="0F766E"/>
+                  <a:srgbClr val="4C1D95"/>
                 </a:solidFill>
                 <a:latin typeface="Trebuchet MS" pitchFamily="34" charset="0"/>
                 <a:ea typeface="Trebuchet MS" pitchFamily="34" charset="-122"/>
                 <a:cs typeface="Trebuchet MS" pitchFamily="34" charset="-120"/>
               </a:rPr>
-              <a:t>vis</a:t>
+              <a:t>super</a:t>
             </a:r>
             <a:endParaRPr lang="en-US" sz="1300" dirty="0"/>
           </a:p>
@@ -13126,7 +12421,7 @@
         </p:nvSpPr>
         <p:spPr>
           <a:xfrm>
-            <a:off x="2938272" y="2569464"/>
+            <a:off x="2221992" y="2569464"/>
             <a:ext cx="1828800" cy="201168"/>
           </a:xfrm>
           <a:prstGeom prst="rect">
@@ -13151,7 +12446,7 @@
                 <a:ea typeface="Calibri" pitchFamily="34" charset="-122"/>
                 <a:cs typeface="Calibri" pitchFamily="34" charset="-120"/>
               </a:rPr>
-              <a:t>to see</a:t>
+              <a:t>over or above</a:t>
             </a:r>
             <a:endParaRPr lang="en-US" sz="850" dirty="0"/>
           </a:p>
@@ -13165,7 +12460,7 @@
         </p:nvSpPr>
         <p:spPr>
           <a:xfrm>
-            <a:off x="5803392" y="2258568"/>
+            <a:off x="4370832" y="2258568"/>
             <a:ext cx="1828800" cy="292608"/>
           </a:xfrm>
           <a:prstGeom prst="rect">
@@ -13174,11 +12469,11 @@
             </a:avLst>
           </a:prstGeom>
           <a:solidFill>
-            <a:srgbClr val="FCE7F3"/>
+            <a:srgbClr val="CCFBF1"/>
           </a:solidFill>
           <a:ln w="19050">
             <a:solidFill>
-              <a:srgbClr val="DB2777"/>
+              <a:srgbClr val="0D9488"/>
             </a:solidFill>
             <a:prstDash val="solid"/>
           </a:ln>
@@ -13199,7 +12494,7 @@
         </p:nvSpPr>
         <p:spPr>
           <a:xfrm>
-            <a:off x="5803392" y="2258568"/>
+            <a:off x="4370832" y="2258568"/>
             <a:ext cx="1828800" cy="292608"/>
           </a:xfrm>
           <a:prstGeom prst="rect">
@@ -13218,13 +12513,13 @@
             <a:r>
               <a:rPr lang="en-US" sz="1300" b="1" dirty="0">
                 <a:solidFill>
-                  <a:srgbClr val="9D174D"/>
+                  <a:srgbClr val="0F766E"/>
                 </a:solidFill>
                 <a:latin typeface="Trebuchet MS" pitchFamily="34" charset="0"/>
                 <a:ea typeface="Trebuchet MS" pitchFamily="34" charset="-122"/>
                 <a:cs typeface="Trebuchet MS" pitchFamily="34" charset="-120"/>
               </a:rPr>
-              <a:t>ible</a:t>
+              <a:t>vis</a:t>
             </a:r>
             <a:endParaRPr lang="en-US" sz="1300" dirty="0"/>
           </a:p>
@@ -13238,7 +12533,7 @@
         </p:nvSpPr>
         <p:spPr>
           <a:xfrm>
-            <a:off x="5803392" y="2569464"/>
+            <a:off x="4370832" y="2569464"/>
             <a:ext cx="1828800" cy="201168"/>
           </a:xfrm>
           <a:prstGeom prst="rect">
@@ -13263,7 +12558,7 @@
                 <a:ea typeface="Calibri" pitchFamily="34" charset="-122"/>
                 <a:cs typeface="Calibri" pitchFamily="34" charset="-120"/>
               </a:rPr>
-              <a:t>able to be</a:t>
+              <a:t>to see</a:t>
             </a:r>
             <a:endParaRPr lang="en-US" sz="850" dirty="0"/>
           </a:p>
@@ -13272,6 +12567,118 @@
       <p:sp>
         <p:nvSpPr>
           <p:cNvPr id="22" name="Shape 20"/>
+          <p:cNvSpPr/>
+          <p:nvPr/>
+        </p:nvSpPr>
+        <p:spPr>
+          <a:xfrm>
+            <a:off x="6519672" y="2258568"/>
+            <a:ext cx="1828800" cy="292608"/>
+          </a:xfrm>
+          <a:prstGeom prst="rect">
+            <a:avLst>
+              <a:gd name="adj" fmla="val 25000"/>
+            </a:avLst>
+          </a:prstGeom>
+          <a:solidFill>
+            <a:srgbClr val="FCE7F3"/>
+          </a:solidFill>
+          <a:ln w="19050">
+            <a:solidFill>
+              <a:srgbClr val="DB2777"/>
+            </a:solidFill>
+            <a:prstDash val="solid"/>
+          </a:ln>
+          <a:effectLst>
+            <a:outerShdw sx="100000" sy="100000" kx="0" ky="0" algn="bl" rotWithShape="0" blurRad="101600" dist="38100" dir="8100000">
+              <a:srgbClr val="000000">
+                <a:alpha val="12000"/>
+              </a:srgbClr>
+            </a:outerShdw>
+          </a:effectLst>
+        </p:spPr>
+      </p:sp>
+      <p:sp>
+        <p:nvSpPr>
+          <p:cNvPr id="23" name="Text 21"/>
+          <p:cNvSpPr/>
+          <p:nvPr/>
+        </p:nvSpPr>
+        <p:spPr>
+          <a:xfrm>
+            <a:off x="6519672" y="2258568"/>
+            <a:ext cx="1828800" cy="292608"/>
+          </a:xfrm>
+          <a:prstGeom prst="rect">
+            <a:avLst/>
+          </a:prstGeom>
+          <a:noFill/>
+          <a:ln/>
+        </p:spPr>
+        <p:txBody>
+          <a:bodyPr wrap="square" lIns="0" tIns="0" rIns="0" bIns="0" rtlCol="0" anchor="ctr"/>
+          <a:lstStyle/>
+          <a:p>
+            <a:pPr algn="ctr" indent="0" marL="0">
+              <a:buNone/>
+            </a:pPr>
+            <a:r>
+              <a:rPr lang="en-US" sz="1300" b="1" dirty="0">
+                <a:solidFill>
+                  <a:srgbClr val="9D174D"/>
+                </a:solidFill>
+                <a:latin typeface="Trebuchet MS" pitchFamily="34" charset="0"/>
+                <a:ea typeface="Trebuchet MS" pitchFamily="34" charset="-122"/>
+                <a:cs typeface="Trebuchet MS" pitchFamily="34" charset="-120"/>
+              </a:rPr>
+              <a:t>or</a:t>
+            </a:r>
+            <a:endParaRPr lang="en-US" sz="1300" dirty="0"/>
+          </a:p>
+        </p:txBody>
+      </p:sp>
+      <p:sp>
+        <p:nvSpPr>
+          <p:cNvPr id="24" name="Text 22"/>
+          <p:cNvSpPr/>
+          <p:nvPr/>
+        </p:nvSpPr>
+        <p:spPr>
+          <a:xfrm>
+            <a:off x="6519672" y="2569464"/>
+            <a:ext cx="1828800" cy="201168"/>
+          </a:xfrm>
+          <a:prstGeom prst="rect">
+            <a:avLst/>
+          </a:prstGeom>
+          <a:noFill/>
+          <a:ln/>
+        </p:spPr>
+        <p:txBody>
+          <a:bodyPr wrap="square" lIns="0" tIns="0" rIns="0" bIns="0" rtlCol="0" anchor="t"/>
+          <a:lstStyle/>
+          <a:p>
+            <a:pPr algn="ctr" indent="0" marL="0">
+              <a:buNone/>
+            </a:pPr>
+            <a:r>
+              <a:rPr lang="en-US" sz="850" dirty="0">
+                <a:solidFill>
+                  <a:srgbClr val="475569"/>
+                </a:solidFill>
+                <a:latin typeface="Calibri" pitchFamily="34" charset="0"/>
+                <a:ea typeface="Calibri" pitchFamily="34" charset="-122"/>
+                <a:cs typeface="Calibri" pitchFamily="34" charset="-120"/>
+              </a:rPr>
+              <a:t>person who does</a:t>
+            </a:r>
+            <a:endParaRPr lang="en-US" sz="850" dirty="0"/>
+          </a:p>
+        </p:txBody>
+      </p:sp>
+      <p:sp>
+        <p:nvSpPr>
+          <p:cNvPr id="25" name="Shape 23"/>
           <p:cNvSpPr/>
           <p:nvPr/>
         </p:nvSpPr>
@@ -13298,7 +12705,7 @@
       </p:sp>
       <p:sp>
         <p:nvSpPr>
-          <p:cNvPr id="23" name="Text 21"/>
+          <p:cNvPr id="26" name="Text 24"/>
           <p:cNvSpPr/>
           <p:nvPr/>
         </p:nvSpPr>
@@ -13337,7 +12744,7 @@
       </p:sp>
       <p:sp>
         <p:nvSpPr>
-          <p:cNvPr id="24" name="Shape 22"/>
+          <p:cNvPr id="27" name="Shape 25"/>
           <p:cNvSpPr/>
           <p:nvPr/>
         </p:nvSpPr>
@@ -13364,7 +12771,7 @@
       </p:sp>
       <p:sp>
         <p:nvSpPr>
-          <p:cNvPr id="25" name="Text 23"/>
+          <p:cNvPr id="28" name="Text 26"/>
           <p:cNvSpPr/>
           <p:nvPr/>
         </p:nvSpPr>
@@ -13403,7 +12810,7 @@
       </p:sp>
       <p:sp>
         <p:nvSpPr>
-          <p:cNvPr id="26" name="Shape 24"/>
+          <p:cNvPr id="29" name="Shape 27"/>
           <p:cNvSpPr/>
           <p:nvPr/>
         </p:nvSpPr>
@@ -13430,7 +12837,7 @@
       </p:sp>
       <p:sp>
         <p:nvSpPr>
-          <p:cNvPr id="27" name="Text 25"/>
+          <p:cNvPr id="30" name="Text 28"/>
           <p:cNvSpPr/>
           <p:nvPr/>
         </p:nvSpPr>
@@ -13469,7 +12876,7 @@
       </p:sp>
       <p:sp>
         <p:nvSpPr>
-          <p:cNvPr id="28" name="Shape 26"/>
+          <p:cNvPr id="31" name="Shape 29"/>
           <p:cNvSpPr/>
           <p:nvPr/>
         </p:nvSpPr>
@@ -13496,7 +12903,7 @@
       </p:sp>
       <p:sp>
         <p:nvSpPr>
-          <p:cNvPr id="29" name="Text 27"/>
+          <p:cNvPr id="32" name="Text 30"/>
           <p:cNvSpPr/>
           <p:nvPr/>
         </p:nvSpPr>
@@ -13958,7 +13365,7 @@
                 <a:ea typeface="Trebuchet MS" pitchFamily="34" charset="-122"/>
                 <a:cs typeface="Trebuchet MS" pitchFamily="34" charset="-120"/>
               </a:rPr>
-              <a:t>visible</a:t>
+              <a:t>supervisor</a:t>
             </a:r>
             <a:endParaRPr lang="en-US" sz="2800" dirty="0"/>
           </a:p>
@@ -14038,7 +13445,7 @@
         </p:nvSpPr>
         <p:spPr>
           <a:xfrm>
-            <a:off x="2938272" y="2258568"/>
+            <a:off x="2221992" y="2258568"/>
             <a:ext cx="1828800" cy="292608"/>
           </a:xfrm>
           <a:prstGeom prst="rect">
@@ -14047,11 +13454,11 @@
             </a:avLst>
           </a:prstGeom>
           <a:solidFill>
-            <a:srgbClr val="CCFBF1"/>
+            <a:srgbClr val="DDD6FE"/>
           </a:solidFill>
           <a:ln w="19050">
             <a:solidFill>
-              <a:srgbClr val="0D9488"/>
+              <a:srgbClr val="7C3AED"/>
             </a:solidFill>
             <a:prstDash val="solid"/>
           </a:ln>
@@ -14072,7 +13479,7 @@
         </p:nvSpPr>
         <p:spPr>
           <a:xfrm>
-            <a:off x="2938272" y="2258568"/>
+            <a:off x="2221992" y="2258568"/>
             <a:ext cx="1828800" cy="292608"/>
           </a:xfrm>
           <a:prstGeom prst="rect">
@@ -14091,13 +13498,13 @@
             <a:r>
               <a:rPr lang="en-US" sz="1300" b="1" dirty="0">
                 <a:solidFill>
-                  <a:srgbClr val="0F766E"/>
+                  <a:srgbClr val="4C1D95"/>
                 </a:solidFill>
                 <a:latin typeface="Trebuchet MS" pitchFamily="34" charset="0"/>
                 <a:ea typeface="Trebuchet MS" pitchFamily="34" charset="-122"/>
                 <a:cs typeface="Trebuchet MS" pitchFamily="34" charset="-120"/>
               </a:rPr>
-              <a:t>vis</a:t>
+              <a:t>super</a:t>
             </a:r>
             <a:endParaRPr lang="en-US" sz="1300" dirty="0"/>
           </a:p>
@@ -14111,7 +13518,7 @@
         </p:nvSpPr>
         <p:spPr>
           <a:xfrm>
-            <a:off x="2938272" y="2569464"/>
+            <a:off x="2221992" y="2569464"/>
             <a:ext cx="1828800" cy="201168"/>
           </a:xfrm>
           <a:prstGeom prst="rect">
@@ -14136,7 +13543,7 @@
                 <a:ea typeface="Calibri" pitchFamily="34" charset="-122"/>
                 <a:cs typeface="Calibri" pitchFamily="34" charset="-120"/>
               </a:rPr>
-              <a:t>to see</a:t>
+              <a:t>over or above</a:t>
             </a:r>
             <a:endParaRPr lang="en-US" sz="850" dirty="0"/>
           </a:p>
@@ -14150,7 +13557,7 @@
         </p:nvSpPr>
         <p:spPr>
           <a:xfrm>
-            <a:off x="5803392" y="2258568"/>
+            <a:off x="4370832" y="2258568"/>
             <a:ext cx="1828800" cy="292608"/>
           </a:xfrm>
           <a:prstGeom prst="rect">
@@ -14159,11 +13566,11 @@
             </a:avLst>
           </a:prstGeom>
           <a:solidFill>
-            <a:srgbClr val="FCE7F3"/>
+            <a:srgbClr val="CCFBF1"/>
           </a:solidFill>
           <a:ln w="19050">
             <a:solidFill>
-              <a:srgbClr val="DB2777"/>
+              <a:srgbClr val="0D9488"/>
             </a:solidFill>
             <a:prstDash val="solid"/>
           </a:ln>
@@ -14184,7 +13591,7 @@
         </p:nvSpPr>
         <p:spPr>
           <a:xfrm>
-            <a:off x="5803392" y="2258568"/>
+            <a:off x="4370832" y="2258568"/>
             <a:ext cx="1828800" cy="292608"/>
           </a:xfrm>
           <a:prstGeom prst="rect">
@@ -14203,13 +13610,13 @@
             <a:r>
               <a:rPr lang="en-US" sz="1300" b="1" dirty="0">
                 <a:solidFill>
-                  <a:srgbClr val="9D174D"/>
+                  <a:srgbClr val="0F766E"/>
                 </a:solidFill>
                 <a:latin typeface="Trebuchet MS" pitchFamily="34" charset="0"/>
                 <a:ea typeface="Trebuchet MS" pitchFamily="34" charset="-122"/>
                 <a:cs typeface="Trebuchet MS" pitchFamily="34" charset="-120"/>
               </a:rPr>
-              <a:t>ible</a:t>
+              <a:t>vis</a:t>
             </a:r>
             <a:endParaRPr lang="en-US" sz="1300" dirty="0"/>
           </a:p>
@@ -14223,7 +13630,7 @@
         </p:nvSpPr>
         <p:spPr>
           <a:xfrm>
-            <a:off x="5803392" y="2569464"/>
+            <a:off x="4370832" y="2569464"/>
             <a:ext cx="1828800" cy="201168"/>
           </a:xfrm>
           <a:prstGeom prst="rect">
@@ -14248,7 +13655,7 @@
                 <a:ea typeface="Calibri" pitchFamily="34" charset="-122"/>
                 <a:cs typeface="Calibri" pitchFamily="34" charset="-120"/>
               </a:rPr>
-              <a:t>able to be</a:t>
+              <a:t>to see</a:t>
             </a:r>
             <a:endParaRPr lang="en-US" sz="850" dirty="0"/>
           </a:p>
@@ -14257,6 +13664,118 @@
       <p:sp>
         <p:nvSpPr>
           <p:cNvPr id="22" name="Shape 20"/>
+          <p:cNvSpPr/>
+          <p:nvPr/>
+        </p:nvSpPr>
+        <p:spPr>
+          <a:xfrm>
+            <a:off x="6519672" y="2258568"/>
+            <a:ext cx="1828800" cy="292608"/>
+          </a:xfrm>
+          <a:prstGeom prst="rect">
+            <a:avLst>
+              <a:gd name="adj" fmla="val 25000"/>
+            </a:avLst>
+          </a:prstGeom>
+          <a:solidFill>
+            <a:srgbClr val="FCE7F3"/>
+          </a:solidFill>
+          <a:ln w="19050">
+            <a:solidFill>
+              <a:srgbClr val="DB2777"/>
+            </a:solidFill>
+            <a:prstDash val="solid"/>
+          </a:ln>
+          <a:effectLst>
+            <a:outerShdw sx="100000" sy="100000" kx="0" ky="0" algn="bl" rotWithShape="0" blurRad="101600" dist="38100" dir="8100000">
+              <a:srgbClr val="000000">
+                <a:alpha val="12000"/>
+              </a:srgbClr>
+            </a:outerShdw>
+          </a:effectLst>
+        </p:spPr>
+      </p:sp>
+      <p:sp>
+        <p:nvSpPr>
+          <p:cNvPr id="23" name="Text 21"/>
+          <p:cNvSpPr/>
+          <p:nvPr/>
+        </p:nvSpPr>
+        <p:spPr>
+          <a:xfrm>
+            <a:off x="6519672" y="2258568"/>
+            <a:ext cx="1828800" cy="292608"/>
+          </a:xfrm>
+          <a:prstGeom prst="rect">
+            <a:avLst/>
+          </a:prstGeom>
+          <a:noFill/>
+          <a:ln/>
+        </p:spPr>
+        <p:txBody>
+          <a:bodyPr wrap="square" lIns="0" tIns="0" rIns="0" bIns="0" rtlCol="0" anchor="ctr"/>
+          <a:lstStyle/>
+          <a:p>
+            <a:pPr algn="ctr" indent="0" marL="0">
+              <a:buNone/>
+            </a:pPr>
+            <a:r>
+              <a:rPr lang="en-US" sz="1300" b="1" dirty="0">
+                <a:solidFill>
+                  <a:srgbClr val="9D174D"/>
+                </a:solidFill>
+                <a:latin typeface="Trebuchet MS" pitchFamily="34" charset="0"/>
+                <a:ea typeface="Trebuchet MS" pitchFamily="34" charset="-122"/>
+                <a:cs typeface="Trebuchet MS" pitchFamily="34" charset="-120"/>
+              </a:rPr>
+              <a:t>or</a:t>
+            </a:r>
+            <a:endParaRPr lang="en-US" sz="1300" dirty="0"/>
+          </a:p>
+        </p:txBody>
+      </p:sp>
+      <p:sp>
+        <p:nvSpPr>
+          <p:cNvPr id="24" name="Text 22"/>
+          <p:cNvSpPr/>
+          <p:nvPr/>
+        </p:nvSpPr>
+        <p:spPr>
+          <a:xfrm>
+            <a:off x="6519672" y="2569464"/>
+            <a:ext cx="1828800" cy="201168"/>
+          </a:xfrm>
+          <a:prstGeom prst="rect">
+            <a:avLst/>
+          </a:prstGeom>
+          <a:noFill/>
+          <a:ln/>
+        </p:spPr>
+        <p:txBody>
+          <a:bodyPr wrap="square" lIns="0" tIns="0" rIns="0" bIns="0" rtlCol="0" anchor="t"/>
+          <a:lstStyle/>
+          <a:p>
+            <a:pPr algn="ctr" indent="0" marL="0">
+              <a:buNone/>
+            </a:pPr>
+            <a:r>
+              <a:rPr lang="en-US" sz="850" dirty="0">
+                <a:solidFill>
+                  <a:srgbClr val="475569"/>
+                </a:solidFill>
+                <a:latin typeface="Calibri" pitchFamily="34" charset="0"/>
+                <a:ea typeface="Calibri" pitchFamily="34" charset="-122"/>
+                <a:cs typeface="Calibri" pitchFamily="34" charset="-120"/>
+              </a:rPr>
+              <a:t>person who does</a:t>
+            </a:r>
+            <a:endParaRPr lang="en-US" sz="850" dirty="0"/>
+          </a:p>
+        </p:txBody>
+      </p:sp>
+      <p:sp>
+        <p:nvSpPr>
+          <p:cNvPr id="25" name="Shape 23"/>
           <p:cNvSpPr/>
           <p:nvPr/>
         </p:nvSpPr>
@@ -14283,7 +13802,7 @@
       </p:sp>
       <p:sp>
         <p:nvSpPr>
-          <p:cNvPr id="23" name="Text 21"/>
+          <p:cNvPr id="26" name="Text 24"/>
           <p:cNvSpPr/>
           <p:nvPr/>
         </p:nvSpPr>
@@ -14322,7 +13841,7 @@
       </p:sp>
       <p:sp>
         <p:nvSpPr>
-          <p:cNvPr id="24" name="Shape 22"/>
+          <p:cNvPr id="27" name="Shape 25"/>
           <p:cNvSpPr/>
           <p:nvPr/>
         </p:nvSpPr>
@@ -14349,14 +13868,14 @@
       </p:sp>
       <p:sp>
         <p:nvSpPr>
-          <p:cNvPr id="25" name="Shape 23"/>
-          <p:cNvSpPr/>
-          <p:nvPr/>
-        </p:nvSpPr>
-        <p:spPr>
-          <a:xfrm>
-            <a:off x="2313432" y="3364992"/>
-            <a:ext cx="1645920" cy="475488"/>
+          <p:cNvPr id="28" name="Shape 26"/>
+          <p:cNvSpPr/>
+          <p:nvPr/>
+        </p:nvSpPr>
+        <p:spPr>
+          <a:xfrm>
+            <a:off x="1975104" y="3364992"/>
+            <a:ext cx="1554480" cy="475488"/>
           </a:xfrm>
           <a:prstGeom prst="rect">
             <a:avLst>
@@ -14376,14 +13895,14 @@
       </p:sp>
       <p:sp>
         <p:nvSpPr>
-          <p:cNvPr id="26" name="Text 24"/>
-          <p:cNvSpPr/>
-          <p:nvPr/>
-        </p:nvSpPr>
-        <p:spPr>
-          <a:xfrm>
-            <a:off x="2313432" y="3364992"/>
-            <a:ext cx="1645920" cy="475488"/>
+          <p:cNvPr id="29" name="Text 27"/>
+          <p:cNvSpPr/>
+          <p:nvPr/>
+        </p:nvSpPr>
+        <p:spPr>
+          <a:xfrm>
+            <a:off x="1975104" y="3364992"/>
+            <a:ext cx="1554480" cy="475488"/>
           </a:xfrm>
           <a:prstGeom prst="rect">
             <a:avLst/>
@@ -14407,7 +13926,7 @@
                 <a:ea typeface="Trebuchet MS" pitchFamily="34" charset="-122"/>
                 <a:cs typeface="Trebuchet MS" pitchFamily="34" charset="-120"/>
               </a:rPr>
-              <a:t>vis</a:t>
+              <a:t>su</a:t>
             </a:r>
             <a:endParaRPr lang="en-US" sz="1400" dirty="0"/>
           </a:p>
@@ -14415,14 +13934,14 @@
       </p:sp>
       <p:sp>
         <p:nvSpPr>
-          <p:cNvPr id="27" name="Text 25"/>
-          <p:cNvSpPr/>
-          <p:nvPr/>
-        </p:nvSpPr>
-        <p:spPr>
-          <a:xfrm>
-            <a:off x="3959352" y="3364992"/>
-            <a:ext cx="411480" cy="475488"/>
+          <p:cNvPr id="30" name="Text 28"/>
+          <p:cNvSpPr/>
+          <p:nvPr/>
+        </p:nvSpPr>
+        <p:spPr>
+          <a:xfrm>
+            <a:off x="3529584" y="3364992"/>
+            <a:ext cx="73152" cy="475488"/>
           </a:xfrm>
           <a:prstGeom prst="rect">
             <a:avLst/>
@@ -14454,14 +13973,14 @@
       </p:sp>
       <p:sp>
         <p:nvSpPr>
-          <p:cNvPr id="28" name="Shape 26"/>
-          <p:cNvSpPr/>
-          <p:nvPr/>
-        </p:nvSpPr>
-        <p:spPr>
-          <a:xfrm>
-            <a:off x="4370832" y="3364992"/>
-            <a:ext cx="1645920" cy="475488"/>
+          <p:cNvPr id="31" name="Shape 29"/>
+          <p:cNvSpPr/>
+          <p:nvPr/>
+        </p:nvSpPr>
+        <p:spPr>
+          <a:xfrm>
+            <a:off x="3602736" y="3364992"/>
+            <a:ext cx="1554480" cy="475488"/>
           </a:xfrm>
           <a:prstGeom prst="rect">
             <a:avLst>
@@ -14481,14 +14000,14 @@
       </p:sp>
       <p:sp>
         <p:nvSpPr>
-          <p:cNvPr id="29" name="Text 27"/>
-          <p:cNvSpPr/>
-          <p:nvPr/>
-        </p:nvSpPr>
-        <p:spPr>
-          <a:xfrm>
-            <a:off x="4370832" y="3364992"/>
-            <a:ext cx="1645920" cy="475488"/>
+          <p:cNvPr id="32" name="Text 30"/>
+          <p:cNvSpPr/>
+          <p:nvPr/>
+        </p:nvSpPr>
+        <p:spPr>
+          <a:xfrm>
+            <a:off x="3602736" y="3364992"/>
+            <a:ext cx="1554480" cy="475488"/>
           </a:xfrm>
           <a:prstGeom prst="rect">
             <a:avLst/>
@@ -14512,7 +14031,7 @@
                 <a:ea typeface="Trebuchet MS" pitchFamily="34" charset="-122"/>
                 <a:cs typeface="Trebuchet MS" pitchFamily="34" charset="-120"/>
               </a:rPr>
-              <a:t>i</a:t>
+              <a:t>per</a:t>
             </a:r>
             <a:endParaRPr lang="en-US" sz="1400" dirty="0"/>
           </a:p>
@@ -14520,14 +14039,14 @@
       </p:sp>
       <p:sp>
         <p:nvSpPr>
-          <p:cNvPr id="30" name="Text 28"/>
-          <p:cNvSpPr/>
-          <p:nvPr/>
-        </p:nvSpPr>
-        <p:spPr>
-          <a:xfrm>
-            <a:off x="6016752" y="3364992"/>
-            <a:ext cx="411480" cy="475488"/>
+          <p:cNvPr id="33" name="Text 31"/>
+          <p:cNvSpPr/>
+          <p:nvPr/>
+        </p:nvSpPr>
+        <p:spPr>
+          <a:xfrm>
+            <a:off x="5157216" y="3364992"/>
+            <a:ext cx="73152" cy="475488"/>
           </a:xfrm>
           <a:prstGeom prst="rect">
             <a:avLst/>
@@ -14559,14 +14078,14 @@
       </p:sp>
       <p:sp>
         <p:nvSpPr>
-          <p:cNvPr id="31" name="Shape 29"/>
-          <p:cNvSpPr/>
-          <p:nvPr/>
-        </p:nvSpPr>
-        <p:spPr>
-          <a:xfrm>
-            <a:off x="6428232" y="3364992"/>
-            <a:ext cx="1645920" cy="475488"/>
+          <p:cNvPr id="34" name="Shape 32"/>
+          <p:cNvSpPr/>
+          <p:nvPr/>
+        </p:nvSpPr>
+        <p:spPr>
+          <a:xfrm>
+            <a:off x="5230368" y="3364992"/>
+            <a:ext cx="1554480" cy="475488"/>
           </a:xfrm>
           <a:prstGeom prst="rect">
             <a:avLst>
@@ -14586,14 +14105,14 @@
       </p:sp>
       <p:sp>
         <p:nvSpPr>
-          <p:cNvPr id="32" name="Text 30"/>
-          <p:cNvSpPr/>
-          <p:nvPr/>
-        </p:nvSpPr>
-        <p:spPr>
-          <a:xfrm>
-            <a:off x="6428232" y="3364992"/>
-            <a:ext cx="1645920" cy="475488"/>
+          <p:cNvPr id="35" name="Text 33"/>
+          <p:cNvSpPr/>
+          <p:nvPr/>
+        </p:nvSpPr>
+        <p:spPr>
+          <a:xfrm>
+            <a:off x="5230368" y="3364992"/>
+            <a:ext cx="1554480" cy="475488"/>
           </a:xfrm>
           <a:prstGeom prst="rect">
             <a:avLst/>
@@ -14617,7 +14136,7 @@
                 <a:ea typeface="Trebuchet MS" pitchFamily="34" charset="-122"/>
                 <a:cs typeface="Trebuchet MS" pitchFamily="34" charset="-120"/>
               </a:rPr>
-              <a:t>ble</a:t>
+              <a:t>vi</a:t>
             </a:r>
             <a:endParaRPr lang="en-US" sz="1400" dirty="0"/>
           </a:p>
@@ -14625,7 +14144,112 @@
       </p:sp>
       <p:sp>
         <p:nvSpPr>
-          <p:cNvPr id="33" name="Shape 31"/>
+          <p:cNvPr id="36" name="Text 34"/>
+          <p:cNvSpPr/>
+          <p:nvPr/>
+        </p:nvSpPr>
+        <p:spPr>
+          <a:xfrm>
+            <a:off x="6784848" y="3364992"/>
+            <a:ext cx="73152" cy="475488"/>
+          </a:xfrm>
+          <a:prstGeom prst="rect">
+            <a:avLst/>
+          </a:prstGeom>
+          <a:noFill/>
+          <a:ln/>
+        </p:spPr>
+        <p:txBody>
+          <a:bodyPr wrap="square" lIns="0" tIns="0" rIns="0" bIns="0" rtlCol="0" anchor="ctr"/>
+          <a:lstStyle/>
+          <a:p>
+            <a:pPr algn="ctr" indent="0" marL="0">
+              <a:buNone/>
+            </a:pPr>
+            <a:r>
+              <a:rPr lang="en-US" sz="1600" b="1" dirty="0">
+                <a:solidFill>
+                  <a:srgbClr val="0D9488"/>
+                </a:solidFill>
+                <a:latin typeface="Trebuchet MS" pitchFamily="34" charset="0"/>
+                <a:ea typeface="Trebuchet MS" pitchFamily="34" charset="-122"/>
+                <a:cs typeface="Trebuchet MS" pitchFamily="34" charset="-120"/>
+              </a:rPr>
+              <a:t>·</a:t>
+            </a:r>
+            <a:endParaRPr lang="en-US" sz="1600" dirty="0"/>
+          </a:p>
+        </p:txBody>
+      </p:sp>
+      <p:sp>
+        <p:nvSpPr>
+          <p:cNvPr id="37" name="Shape 35"/>
+          <p:cNvSpPr/>
+          <p:nvPr/>
+        </p:nvSpPr>
+        <p:spPr>
+          <a:xfrm>
+            <a:off x="6858000" y="3364992"/>
+            <a:ext cx="1554480" cy="475488"/>
+          </a:xfrm>
+          <a:prstGeom prst="rect">
+            <a:avLst>
+              <a:gd name="adj" fmla="val 9615"/>
+            </a:avLst>
+          </a:prstGeom>
+          <a:solidFill>
+            <a:srgbClr val="FFFFFF"/>
+          </a:solidFill>
+          <a:ln w="12700">
+            <a:solidFill>
+              <a:srgbClr val="0D9488"/>
+            </a:solidFill>
+            <a:prstDash val="solid"/>
+          </a:ln>
+        </p:spPr>
+      </p:sp>
+      <p:sp>
+        <p:nvSpPr>
+          <p:cNvPr id="38" name="Text 36"/>
+          <p:cNvSpPr/>
+          <p:nvPr/>
+        </p:nvSpPr>
+        <p:spPr>
+          <a:xfrm>
+            <a:off x="6858000" y="3364992"/>
+            <a:ext cx="1554480" cy="475488"/>
+          </a:xfrm>
+          <a:prstGeom prst="rect">
+            <a:avLst/>
+          </a:prstGeom>
+          <a:noFill/>
+          <a:ln/>
+        </p:spPr>
+        <p:txBody>
+          <a:bodyPr wrap="square" lIns="0" tIns="0" rIns="0" bIns="0" rtlCol="0" anchor="ctr"/>
+          <a:lstStyle/>
+          <a:p>
+            <a:pPr algn="ctr" indent="0" marL="0">
+              <a:buNone/>
+            </a:pPr>
+            <a:r>
+              <a:rPr lang="en-US" sz="1400" b="1" dirty="0">
+                <a:solidFill>
+                  <a:srgbClr val="0D9488"/>
+                </a:solidFill>
+                <a:latin typeface="Trebuchet MS" pitchFamily="34" charset="0"/>
+                <a:ea typeface="Trebuchet MS" pitchFamily="34" charset="-122"/>
+                <a:cs typeface="Trebuchet MS" pitchFamily="34" charset="-120"/>
+              </a:rPr>
+              <a:t>sor</a:t>
+            </a:r>
+            <a:endParaRPr lang="en-US" sz="1400" dirty="0"/>
+          </a:p>
+        </p:txBody>
+      </p:sp>
+      <p:sp>
+        <p:nvSpPr>
+          <p:cNvPr id="39" name="Shape 37"/>
           <p:cNvSpPr/>
           <p:nvPr/>
         </p:nvSpPr>
@@ -14652,7 +14276,7 @@
       </p:sp>
       <p:sp>
         <p:nvSpPr>
-          <p:cNvPr id="34" name="Text 32"/>
+          <p:cNvPr id="40" name="Text 38"/>
           <p:cNvSpPr/>
           <p:nvPr/>
         </p:nvSpPr>
@@ -14691,7 +14315,7 @@
       </p:sp>
       <p:sp>
         <p:nvSpPr>
-          <p:cNvPr id="35" name="Shape 33"/>
+          <p:cNvPr id="41" name="Shape 39"/>
           <p:cNvSpPr/>
           <p:nvPr/>
         </p:nvSpPr>
@@ -14718,7 +14342,7 @@
       </p:sp>
       <p:sp>
         <p:nvSpPr>
-          <p:cNvPr id="36" name="Text 34"/>
+          <p:cNvPr id="42" name="Text 40"/>
           <p:cNvSpPr/>
           <p:nvPr/>
         </p:nvSpPr>
@@ -15445,7 +15069,7 @@
                 <a:ea typeface="Trebuchet MS" pitchFamily="34" charset="-122"/>
                 <a:cs typeface="Trebuchet MS" pitchFamily="34" charset="-120"/>
               </a:rPr>
-              <a:t>visible</a:t>
+              <a:t>supervisor</a:t>
             </a:r>
             <a:endParaRPr lang="en-US" sz="2800" dirty="0"/>
           </a:p>
@@ -15525,7 +15149,7 @@
         </p:nvSpPr>
         <p:spPr>
           <a:xfrm>
-            <a:off x="2938272" y="2258568"/>
+            <a:off x="2221992" y="2258568"/>
             <a:ext cx="1828800" cy="292608"/>
           </a:xfrm>
           <a:prstGeom prst="rect">
@@ -15534,11 +15158,11 @@
             </a:avLst>
           </a:prstGeom>
           <a:solidFill>
-            <a:srgbClr val="CCFBF1"/>
+            <a:srgbClr val="DDD6FE"/>
           </a:solidFill>
           <a:ln w="19050">
             <a:solidFill>
-              <a:srgbClr val="0D9488"/>
+              <a:srgbClr val="7C3AED"/>
             </a:solidFill>
             <a:prstDash val="solid"/>
           </a:ln>
@@ -15559,7 +15183,7 @@
         </p:nvSpPr>
         <p:spPr>
           <a:xfrm>
-            <a:off x="2938272" y="2258568"/>
+            <a:off x="2221992" y="2258568"/>
             <a:ext cx="1828800" cy="292608"/>
           </a:xfrm>
           <a:prstGeom prst="rect">
@@ -15578,13 +15202,13 @@
             <a:r>
               <a:rPr lang="en-US" sz="1300" b="1" dirty="0">
                 <a:solidFill>
-                  <a:srgbClr val="0F766E"/>
+                  <a:srgbClr val="4C1D95"/>
                 </a:solidFill>
                 <a:latin typeface="Trebuchet MS" pitchFamily="34" charset="0"/>
                 <a:ea typeface="Trebuchet MS" pitchFamily="34" charset="-122"/>
                 <a:cs typeface="Trebuchet MS" pitchFamily="34" charset="-120"/>
               </a:rPr>
-              <a:t>vis</a:t>
+              <a:t>super</a:t>
             </a:r>
             <a:endParaRPr lang="en-US" sz="1300" dirty="0"/>
           </a:p>
@@ -15598,7 +15222,7 @@
         </p:nvSpPr>
         <p:spPr>
           <a:xfrm>
-            <a:off x="2938272" y="2569464"/>
+            <a:off x="2221992" y="2569464"/>
             <a:ext cx="1828800" cy="201168"/>
           </a:xfrm>
           <a:prstGeom prst="rect">
@@ -15623,7 +15247,7 @@
                 <a:ea typeface="Calibri" pitchFamily="34" charset="-122"/>
                 <a:cs typeface="Calibri" pitchFamily="34" charset="-120"/>
               </a:rPr>
-              <a:t>to see</a:t>
+              <a:t>over or above</a:t>
             </a:r>
             <a:endParaRPr lang="en-US" sz="850" dirty="0"/>
           </a:p>
@@ -15637,7 +15261,7 @@
         </p:nvSpPr>
         <p:spPr>
           <a:xfrm>
-            <a:off x="5803392" y="2258568"/>
+            <a:off x="4370832" y="2258568"/>
             <a:ext cx="1828800" cy="292608"/>
           </a:xfrm>
           <a:prstGeom prst="rect">
@@ -15646,11 +15270,11 @@
             </a:avLst>
           </a:prstGeom>
           <a:solidFill>
-            <a:srgbClr val="FCE7F3"/>
+            <a:srgbClr val="CCFBF1"/>
           </a:solidFill>
           <a:ln w="19050">
             <a:solidFill>
-              <a:srgbClr val="DB2777"/>
+              <a:srgbClr val="0D9488"/>
             </a:solidFill>
             <a:prstDash val="solid"/>
           </a:ln>
@@ -15671,7 +15295,7 @@
         </p:nvSpPr>
         <p:spPr>
           <a:xfrm>
-            <a:off x="5803392" y="2258568"/>
+            <a:off x="4370832" y="2258568"/>
             <a:ext cx="1828800" cy="292608"/>
           </a:xfrm>
           <a:prstGeom prst="rect">
@@ -15690,13 +15314,13 @@
             <a:r>
               <a:rPr lang="en-US" sz="1300" b="1" dirty="0">
                 <a:solidFill>
-                  <a:srgbClr val="9D174D"/>
+                  <a:srgbClr val="0F766E"/>
                 </a:solidFill>
                 <a:latin typeface="Trebuchet MS" pitchFamily="34" charset="0"/>
                 <a:ea typeface="Trebuchet MS" pitchFamily="34" charset="-122"/>
                 <a:cs typeface="Trebuchet MS" pitchFamily="34" charset="-120"/>
               </a:rPr>
-              <a:t>ible</a:t>
+              <a:t>vis</a:t>
             </a:r>
             <a:endParaRPr lang="en-US" sz="1300" dirty="0"/>
           </a:p>
@@ -15710,7 +15334,7 @@
         </p:nvSpPr>
         <p:spPr>
           <a:xfrm>
-            <a:off x="5803392" y="2569464"/>
+            <a:off x="4370832" y="2569464"/>
             <a:ext cx="1828800" cy="201168"/>
           </a:xfrm>
           <a:prstGeom prst="rect">
@@ -15735,7 +15359,7 @@
                 <a:ea typeface="Calibri" pitchFamily="34" charset="-122"/>
                 <a:cs typeface="Calibri" pitchFamily="34" charset="-120"/>
               </a:rPr>
-              <a:t>able to be</a:t>
+              <a:t>to see</a:t>
             </a:r>
             <a:endParaRPr lang="en-US" sz="850" dirty="0"/>
           </a:p>
@@ -15744,6 +15368,118 @@
       <p:sp>
         <p:nvSpPr>
           <p:cNvPr id="22" name="Shape 20"/>
+          <p:cNvSpPr/>
+          <p:nvPr/>
+        </p:nvSpPr>
+        <p:spPr>
+          <a:xfrm>
+            <a:off x="6519672" y="2258568"/>
+            <a:ext cx="1828800" cy="292608"/>
+          </a:xfrm>
+          <a:prstGeom prst="rect">
+            <a:avLst>
+              <a:gd name="adj" fmla="val 25000"/>
+            </a:avLst>
+          </a:prstGeom>
+          <a:solidFill>
+            <a:srgbClr val="FCE7F3"/>
+          </a:solidFill>
+          <a:ln w="19050">
+            <a:solidFill>
+              <a:srgbClr val="DB2777"/>
+            </a:solidFill>
+            <a:prstDash val="solid"/>
+          </a:ln>
+          <a:effectLst>
+            <a:outerShdw sx="100000" sy="100000" kx="0" ky="0" algn="bl" rotWithShape="0" blurRad="101600" dist="38100" dir="8100000">
+              <a:srgbClr val="000000">
+                <a:alpha val="12000"/>
+              </a:srgbClr>
+            </a:outerShdw>
+          </a:effectLst>
+        </p:spPr>
+      </p:sp>
+      <p:sp>
+        <p:nvSpPr>
+          <p:cNvPr id="23" name="Text 21"/>
+          <p:cNvSpPr/>
+          <p:nvPr/>
+        </p:nvSpPr>
+        <p:spPr>
+          <a:xfrm>
+            <a:off x="6519672" y="2258568"/>
+            <a:ext cx="1828800" cy="292608"/>
+          </a:xfrm>
+          <a:prstGeom prst="rect">
+            <a:avLst/>
+          </a:prstGeom>
+          <a:noFill/>
+          <a:ln/>
+        </p:spPr>
+        <p:txBody>
+          <a:bodyPr wrap="square" lIns="0" tIns="0" rIns="0" bIns="0" rtlCol="0" anchor="ctr"/>
+          <a:lstStyle/>
+          <a:p>
+            <a:pPr algn="ctr" indent="0" marL="0">
+              <a:buNone/>
+            </a:pPr>
+            <a:r>
+              <a:rPr lang="en-US" sz="1300" b="1" dirty="0">
+                <a:solidFill>
+                  <a:srgbClr val="9D174D"/>
+                </a:solidFill>
+                <a:latin typeface="Trebuchet MS" pitchFamily="34" charset="0"/>
+                <a:ea typeface="Trebuchet MS" pitchFamily="34" charset="-122"/>
+                <a:cs typeface="Trebuchet MS" pitchFamily="34" charset="-120"/>
+              </a:rPr>
+              <a:t>or</a:t>
+            </a:r>
+            <a:endParaRPr lang="en-US" sz="1300" dirty="0"/>
+          </a:p>
+        </p:txBody>
+      </p:sp>
+      <p:sp>
+        <p:nvSpPr>
+          <p:cNvPr id="24" name="Text 22"/>
+          <p:cNvSpPr/>
+          <p:nvPr/>
+        </p:nvSpPr>
+        <p:spPr>
+          <a:xfrm>
+            <a:off x="6519672" y="2569464"/>
+            <a:ext cx="1828800" cy="201168"/>
+          </a:xfrm>
+          <a:prstGeom prst="rect">
+            <a:avLst/>
+          </a:prstGeom>
+          <a:noFill/>
+          <a:ln/>
+        </p:spPr>
+        <p:txBody>
+          <a:bodyPr wrap="square" lIns="0" tIns="0" rIns="0" bIns="0" rtlCol="0" anchor="t"/>
+          <a:lstStyle/>
+          <a:p>
+            <a:pPr algn="ctr" indent="0" marL="0">
+              <a:buNone/>
+            </a:pPr>
+            <a:r>
+              <a:rPr lang="en-US" sz="850" dirty="0">
+                <a:solidFill>
+                  <a:srgbClr val="475569"/>
+                </a:solidFill>
+                <a:latin typeface="Calibri" pitchFamily="34" charset="0"/>
+                <a:ea typeface="Calibri" pitchFamily="34" charset="-122"/>
+                <a:cs typeface="Calibri" pitchFamily="34" charset="-120"/>
+              </a:rPr>
+              <a:t>person who does</a:t>
+            </a:r>
+            <a:endParaRPr lang="en-US" sz="850" dirty="0"/>
+          </a:p>
+        </p:txBody>
+      </p:sp>
+      <p:sp>
+        <p:nvSpPr>
+          <p:cNvPr id="25" name="Shape 23"/>
           <p:cNvSpPr/>
           <p:nvPr/>
         </p:nvSpPr>
@@ -15770,7 +15506,7 @@
       </p:sp>
       <p:sp>
         <p:nvSpPr>
-          <p:cNvPr id="23" name="Text 21"/>
+          <p:cNvPr id="26" name="Text 24"/>
           <p:cNvSpPr/>
           <p:nvPr/>
         </p:nvSpPr>
@@ -15809,7 +15545,7 @@
       </p:sp>
       <p:sp>
         <p:nvSpPr>
-          <p:cNvPr id="24" name="Shape 22"/>
+          <p:cNvPr id="27" name="Shape 25"/>
           <p:cNvSpPr/>
           <p:nvPr/>
         </p:nvSpPr>
@@ -15836,14 +15572,14 @@
       </p:sp>
       <p:sp>
         <p:nvSpPr>
-          <p:cNvPr id="25" name="Shape 23"/>
-          <p:cNvSpPr/>
-          <p:nvPr/>
-        </p:nvSpPr>
-        <p:spPr>
-          <a:xfrm>
-            <a:off x="2313432" y="3364992"/>
-            <a:ext cx="1645920" cy="475488"/>
+          <p:cNvPr id="28" name="Shape 26"/>
+          <p:cNvSpPr/>
+          <p:nvPr/>
+        </p:nvSpPr>
+        <p:spPr>
+          <a:xfrm>
+            <a:off x="1975104" y="3364992"/>
+            <a:ext cx="1554480" cy="475488"/>
           </a:xfrm>
           <a:prstGeom prst="rect">
             <a:avLst>
@@ -15863,14 +15599,14 @@
       </p:sp>
       <p:sp>
         <p:nvSpPr>
-          <p:cNvPr id="26" name="Text 24"/>
-          <p:cNvSpPr/>
-          <p:nvPr/>
-        </p:nvSpPr>
-        <p:spPr>
-          <a:xfrm>
-            <a:off x="2313432" y="3364992"/>
-            <a:ext cx="1645920" cy="475488"/>
+          <p:cNvPr id="29" name="Text 27"/>
+          <p:cNvSpPr/>
+          <p:nvPr/>
+        </p:nvSpPr>
+        <p:spPr>
+          <a:xfrm>
+            <a:off x="1975104" y="3364992"/>
+            <a:ext cx="1554480" cy="475488"/>
           </a:xfrm>
           <a:prstGeom prst="rect">
             <a:avLst/>
@@ -15894,7 +15630,7 @@
                 <a:ea typeface="Trebuchet MS" pitchFamily="34" charset="-122"/>
                 <a:cs typeface="Trebuchet MS" pitchFamily="34" charset="-120"/>
               </a:rPr>
-              <a:t>vis</a:t>
+              <a:t>su</a:t>
             </a:r>
             <a:endParaRPr lang="en-US" sz="1400" dirty="0"/>
           </a:p>
@@ -15902,14 +15638,14 @@
       </p:sp>
       <p:sp>
         <p:nvSpPr>
-          <p:cNvPr id="27" name="Text 25"/>
-          <p:cNvSpPr/>
-          <p:nvPr/>
-        </p:nvSpPr>
-        <p:spPr>
-          <a:xfrm>
-            <a:off x="3959352" y="3364992"/>
-            <a:ext cx="411480" cy="475488"/>
+          <p:cNvPr id="30" name="Text 28"/>
+          <p:cNvSpPr/>
+          <p:nvPr/>
+        </p:nvSpPr>
+        <p:spPr>
+          <a:xfrm>
+            <a:off x="3529584" y="3364992"/>
+            <a:ext cx="73152" cy="475488"/>
           </a:xfrm>
           <a:prstGeom prst="rect">
             <a:avLst/>
@@ -15941,14 +15677,14 @@
       </p:sp>
       <p:sp>
         <p:nvSpPr>
-          <p:cNvPr id="28" name="Shape 26"/>
-          <p:cNvSpPr/>
-          <p:nvPr/>
-        </p:nvSpPr>
-        <p:spPr>
-          <a:xfrm>
-            <a:off x="4370832" y="3364992"/>
-            <a:ext cx="1645920" cy="475488"/>
+          <p:cNvPr id="31" name="Shape 29"/>
+          <p:cNvSpPr/>
+          <p:nvPr/>
+        </p:nvSpPr>
+        <p:spPr>
+          <a:xfrm>
+            <a:off x="3602736" y="3364992"/>
+            <a:ext cx="1554480" cy="475488"/>
           </a:xfrm>
           <a:prstGeom prst="rect">
             <a:avLst>
@@ -15968,14 +15704,14 @@
       </p:sp>
       <p:sp>
         <p:nvSpPr>
-          <p:cNvPr id="29" name="Text 27"/>
-          <p:cNvSpPr/>
-          <p:nvPr/>
-        </p:nvSpPr>
-        <p:spPr>
-          <a:xfrm>
-            <a:off x="4370832" y="3364992"/>
-            <a:ext cx="1645920" cy="475488"/>
+          <p:cNvPr id="32" name="Text 30"/>
+          <p:cNvSpPr/>
+          <p:nvPr/>
+        </p:nvSpPr>
+        <p:spPr>
+          <a:xfrm>
+            <a:off x="3602736" y="3364992"/>
+            <a:ext cx="1554480" cy="475488"/>
           </a:xfrm>
           <a:prstGeom prst="rect">
             <a:avLst/>
@@ -15999,7 +15735,7 @@
                 <a:ea typeface="Trebuchet MS" pitchFamily="34" charset="-122"/>
                 <a:cs typeface="Trebuchet MS" pitchFamily="34" charset="-120"/>
               </a:rPr>
-              <a:t>i</a:t>
+              <a:t>per</a:t>
             </a:r>
             <a:endParaRPr lang="en-US" sz="1400" dirty="0"/>
           </a:p>
@@ -16007,14 +15743,14 @@
       </p:sp>
       <p:sp>
         <p:nvSpPr>
-          <p:cNvPr id="30" name="Text 28"/>
-          <p:cNvSpPr/>
-          <p:nvPr/>
-        </p:nvSpPr>
-        <p:spPr>
-          <a:xfrm>
-            <a:off x="6016752" y="3364992"/>
-            <a:ext cx="411480" cy="475488"/>
+          <p:cNvPr id="33" name="Text 31"/>
+          <p:cNvSpPr/>
+          <p:nvPr/>
+        </p:nvSpPr>
+        <p:spPr>
+          <a:xfrm>
+            <a:off x="5157216" y="3364992"/>
+            <a:ext cx="73152" cy="475488"/>
           </a:xfrm>
           <a:prstGeom prst="rect">
             <a:avLst/>
@@ -16046,14 +15782,14 @@
       </p:sp>
       <p:sp>
         <p:nvSpPr>
-          <p:cNvPr id="31" name="Shape 29"/>
-          <p:cNvSpPr/>
-          <p:nvPr/>
-        </p:nvSpPr>
-        <p:spPr>
-          <a:xfrm>
-            <a:off x="6428232" y="3364992"/>
-            <a:ext cx="1645920" cy="475488"/>
+          <p:cNvPr id="34" name="Shape 32"/>
+          <p:cNvSpPr/>
+          <p:nvPr/>
+        </p:nvSpPr>
+        <p:spPr>
+          <a:xfrm>
+            <a:off x="5230368" y="3364992"/>
+            <a:ext cx="1554480" cy="475488"/>
           </a:xfrm>
           <a:prstGeom prst="rect">
             <a:avLst>
@@ -16073,14 +15809,14 @@
       </p:sp>
       <p:sp>
         <p:nvSpPr>
-          <p:cNvPr id="32" name="Text 30"/>
-          <p:cNvSpPr/>
-          <p:nvPr/>
-        </p:nvSpPr>
-        <p:spPr>
-          <a:xfrm>
-            <a:off x="6428232" y="3364992"/>
-            <a:ext cx="1645920" cy="475488"/>
+          <p:cNvPr id="35" name="Text 33"/>
+          <p:cNvSpPr/>
+          <p:nvPr/>
+        </p:nvSpPr>
+        <p:spPr>
+          <a:xfrm>
+            <a:off x="5230368" y="3364992"/>
+            <a:ext cx="1554480" cy="475488"/>
           </a:xfrm>
           <a:prstGeom prst="rect">
             <a:avLst/>
@@ -16104,7 +15840,7 @@
                 <a:ea typeface="Trebuchet MS" pitchFamily="34" charset="-122"/>
                 <a:cs typeface="Trebuchet MS" pitchFamily="34" charset="-120"/>
               </a:rPr>
-              <a:t>ble</a:t>
+              <a:t>vi</a:t>
             </a:r>
             <a:endParaRPr lang="en-US" sz="1400" dirty="0"/>
           </a:p>
@@ -16112,7 +15848,112 @@
       </p:sp>
       <p:sp>
         <p:nvSpPr>
-          <p:cNvPr id="33" name="Shape 31"/>
+          <p:cNvPr id="36" name="Text 34"/>
+          <p:cNvSpPr/>
+          <p:nvPr/>
+        </p:nvSpPr>
+        <p:spPr>
+          <a:xfrm>
+            <a:off x="6784848" y="3364992"/>
+            <a:ext cx="73152" cy="475488"/>
+          </a:xfrm>
+          <a:prstGeom prst="rect">
+            <a:avLst/>
+          </a:prstGeom>
+          <a:noFill/>
+          <a:ln/>
+        </p:spPr>
+        <p:txBody>
+          <a:bodyPr wrap="square" lIns="0" tIns="0" rIns="0" bIns="0" rtlCol="0" anchor="ctr"/>
+          <a:lstStyle/>
+          <a:p>
+            <a:pPr algn="ctr" indent="0" marL="0">
+              <a:buNone/>
+            </a:pPr>
+            <a:r>
+              <a:rPr lang="en-US" sz="1600" b="1" dirty="0">
+                <a:solidFill>
+                  <a:srgbClr val="0D9488"/>
+                </a:solidFill>
+                <a:latin typeface="Trebuchet MS" pitchFamily="34" charset="0"/>
+                <a:ea typeface="Trebuchet MS" pitchFamily="34" charset="-122"/>
+                <a:cs typeface="Trebuchet MS" pitchFamily="34" charset="-120"/>
+              </a:rPr>
+              <a:t>·</a:t>
+            </a:r>
+            <a:endParaRPr lang="en-US" sz="1600" dirty="0"/>
+          </a:p>
+        </p:txBody>
+      </p:sp>
+      <p:sp>
+        <p:nvSpPr>
+          <p:cNvPr id="37" name="Shape 35"/>
+          <p:cNvSpPr/>
+          <p:nvPr/>
+        </p:nvSpPr>
+        <p:spPr>
+          <a:xfrm>
+            <a:off x="6858000" y="3364992"/>
+            <a:ext cx="1554480" cy="475488"/>
+          </a:xfrm>
+          <a:prstGeom prst="rect">
+            <a:avLst>
+              <a:gd name="adj" fmla="val 9615"/>
+            </a:avLst>
+          </a:prstGeom>
+          <a:solidFill>
+            <a:srgbClr val="FFFFFF"/>
+          </a:solidFill>
+          <a:ln w="12700">
+            <a:solidFill>
+              <a:srgbClr val="0D9488"/>
+            </a:solidFill>
+            <a:prstDash val="solid"/>
+          </a:ln>
+        </p:spPr>
+      </p:sp>
+      <p:sp>
+        <p:nvSpPr>
+          <p:cNvPr id="38" name="Text 36"/>
+          <p:cNvSpPr/>
+          <p:nvPr/>
+        </p:nvSpPr>
+        <p:spPr>
+          <a:xfrm>
+            <a:off x="6858000" y="3364992"/>
+            <a:ext cx="1554480" cy="475488"/>
+          </a:xfrm>
+          <a:prstGeom prst="rect">
+            <a:avLst/>
+          </a:prstGeom>
+          <a:noFill/>
+          <a:ln/>
+        </p:spPr>
+        <p:txBody>
+          <a:bodyPr wrap="square" lIns="0" tIns="0" rIns="0" bIns="0" rtlCol="0" anchor="ctr"/>
+          <a:lstStyle/>
+          <a:p>
+            <a:pPr algn="ctr" indent="0" marL="0">
+              <a:buNone/>
+            </a:pPr>
+            <a:r>
+              <a:rPr lang="en-US" sz="1400" b="1" dirty="0">
+                <a:solidFill>
+                  <a:srgbClr val="0D9488"/>
+                </a:solidFill>
+                <a:latin typeface="Trebuchet MS" pitchFamily="34" charset="0"/>
+                <a:ea typeface="Trebuchet MS" pitchFamily="34" charset="-122"/>
+                <a:cs typeface="Trebuchet MS" pitchFamily="34" charset="-120"/>
+              </a:rPr>
+              <a:t>sor</a:t>
+            </a:r>
+            <a:endParaRPr lang="en-US" sz="1400" dirty="0"/>
+          </a:p>
+        </p:txBody>
+      </p:sp>
+      <p:sp>
+        <p:nvSpPr>
+          <p:cNvPr id="39" name="Shape 37"/>
           <p:cNvSpPr/>
           <p:nvPr/>
         </p:nvSpPr>
@@ -16139,7 +15980,7 @@
       </p:sp>
       <p:sp>
         <p:nvSpPr>
-          <p:cNvPr id="34" name="Text 32"/>
+          <p:cNvPr id="40" name="Text 38"/>
           <p:cNvSpPr/>
           <p:nvPr/>
         </p:nvSpPr>
@@ -16178,18 +16019,18 @@
       </p:sp>
       <p:sp>
         <p:nvSpPr>
-          <p:cNvPr id="35" name="Shape 33"/>
+          <p:cNvPr id="41" name="Shape 39"/>
           <p:cNvSpPr/>
           <p:nvPr/>
         </p:nvSpPr>
         <p:spPr>
           <a:xfrm>
             <a:off x="1874520" y="4096512"/>
-            <a:ext cx="6903720" cy="658368"/>
+            <a:ext cx="6903720" cy="804672"/>
           </a:xfrm>
           <a:prstGeom prst="rect">
             <a:avLst>
-              <a:gd name="adj" fmla="val 8333"/>
+              <a:gd name="adj" fmla="val 6818"/>
             </a:avLst>
           </a:prstGeom>
           <a:solidFill>
@@ -16205,18 +16046,18 @@
       </p:sp>
       <p:sp>
         <p:nvSpPr>
-          <p:cNvPr id="36" name="Shape 34"/>
-          <p:cNvSpPr/>
-          <p:nvPr/>
-        </p:nvSpPr>
-        <p:spPr>
-          <a:xfrm>
-            <a:off x="2254649" y="4169664"/>
-            <a:ext cx="685800" cy="475488"/>
+          <p:cNvPr id="42" name="Shape 40"/>
+          <p:cNvSpPr/>
+          <p:nvPr/>
+        </p:nvSpPr>
+        <p:spPr>
+          <a:xfrm>
+            <a:off x="2023872" y="4169664"/>
+            <a:ext cx="685800" cy="384048"/>
           </a:xfrm>
           <a:prstGeom prst="rect">
             <a:avLst>
-              <a:gd name="adj" fmla="val 7692"/>
+              <a:gd name="adj" fmla="val 9524"/>
             </a:avLst>
           </a:prstGeom>
           <a:solidFill>
@@ -16232,14 +16073,14 @@
       </p:sp>
       <p:sp>
         <p:nvSpPr>
-          <p:cNvPr id="37" name="Text 35"/>
-          <p:cNvSpPr/>
-          <p:nvPr/>
-        </p:nvSpPr>
-        <p:spPr>
-          <a:xfrm>
-            <a:off x="2254649" y="4169664"/>
-            <a:ext cx="685800" cy="475488"/>
+          <p:cNvPr id="43" name="Text 41"/>
+          <p:cNvSpPr/>
+          <p:nvPr/>
+        </p:nvSpPr>
+        <p:spPr>
+          <a:xfrm>
+            <a:off x="2023872" y="4169664"/>
+            <a:ext cx="685800" cy="384048"/>
           </a:xfrm>
           <a:prstGeom prst="rect">
             <a:avLst/>
@@ -16263,7 +16104,7 @@
                 <a:ea typeface="Trebuchet MS" pitchFamily="34" charset="-122"/>
                 <a:cs typeface="Trebuchet MS" pitchFamily="34" charset="-120"/>
               </a:rPr>
-              <a:t>v</a:t>
+              <a:t>s</a:t>
             </a:r>
             <a:endParaRPr lang="en-US" sz="900" dirty="0"/>
           </a:p>
@@ -16271,18 +16112,18 @@
       </p:sp>
       <p:sp>
         <p:nvSpPr>
-          <p:cNvPr id="38" name="Shape 36"/>
-          <p:cNvSpPr/>
-          <p:nvPr/>
-        </p:nvSpPr>
-        <p:spPr>
-          <a:xfrm>
-            <a:off x="3293146" y="4169664"/>
-            <a:ext cx="685800" cy="475488"/>
+          <p:cNvPr id="44" name="Shape 42"/>
+          <p:cNvSpPr/>
+          <p:nvPr/>
+        </p:nvSpPr>
+        <p:spPr>
+          <a:xfrm>
+            <a:off x="2831592" y="4169664"/>
+            <a:ext cx="685800" cy="384048"/>
           </a:xfrm>
           <a:prstGeom prst="rect">
             <a:avLst>
-              <a:gd name="adj" fmla="val 7692"/>
+              <a:gd name="adj" fmla="val 9524"/>
             </a:avLst>
           </a:prstGeom>
           <a:solidFill>
@@ -16298,14 +16139,14 @@
       </p:sp>
       <p:sp>
         <p:nvSpPr>
-          <p:cNvPr id="39" name="Text 37"/>
-          <p:cNvSpPr/>
-          <p:nvPr/>
-        </p:nvSpPr>
-        <p:spPr>
-          <a:xfrm>
-            <a:off x="3293146" y="4169664"/>
-            <a:ext cx="685800" cy="475488"/>
+          <p:cNvPr id="45" name="Text 43"/>
+          <p:cNvSpPr/>
+          <p:nvPr/>
+        </p:nvSpPr>
+        <p:spPr>
+          <a:xfrm>
+            <a:off x="2831592" y="4169664"/>
+            <a:ext cx="685800" cy="384048"/>
           </a:xfrm>
           <a:prstGeom prst="rect">
             <a:avLst/>
@@ -16329,7 +16170,7 @@
                 <a:ea typeface="Trebuchet MS" pitchFamily="34" charset="-122"/>
                 <a:cs typeface="Trebuchet MS" pitchFamily="34" charset="-120"/>
               </a:rPr>
-              <a:t>i</a:t>
+              <a:t>u</a:t>
             </a:r>
             <a:endParaRPr lang="en-US" sz="900" dirty="0"/>
           </a:p>
@@ -16337,18 +16178,18 @@
       </p:sp>
       <p:sp>
         <p:nvSpPr>
-          <p:cNvPr id="40" name="Shape 38"/>
-          <p:cNvSpPr/>
-          <p:nvPr/>
-        </p:nvSpPr>
-        <p:spPr>
-          <a:xfrm>
-            <a:off x="4331643" y="4169664"/>
-            <a:ext cx="685800" cy="475488"/>
+          <p:cNvPr id="46" name="Shape 44"/>
+          <p:cNvSpPr/>
+          <p:nvPr/>
+        </p:nvSpPr>
+        <p:spPr>
+          <a:xfrm>
+            <a:off x="3639312" y="4169664"/>
+            <a:ext cx="685800" cy="384048"/>
           </a:xfrm>
           <a:prstGeom prst="rect">
             <a:avLst>
-              <a:gd name="adj" fmla="val 7692"/>
+              <a:gd name="adj" fmla="val 9524"/>
             </a:avLst>
           </a:prstGeom>
           <a:solidFill>
@@ -16364,14 +16205,14 @@
       </p:sp>
       <p:sp>
         <p:nvSpPr>
-          <p:cNvPr id="41" name="Text 39"/>
-          <p:cNvSpPr/>
-          <p:nvPr/>
-        </p:nvSpPr>
-        <p:spPr>
-          <a:xfrm>
-            <a:off x="4331643" y="4169664"/>
-            <a:ext cx="685800" cy="475488"/>
+          <p:cNvPr id="47" name="Text 45"/>
+          <p:cNvSpPr/>
+          <p:nvPr/>
+        </p:nvSpPr>
+        <p:spPr>
+          <a:xfrm>
+            <a:off x="3639312" y="4169664"/>
+            <a:ext cx="685800" cy="384048"/>
           </a:xfrm>
           <a:prstGeom prst="rect">
             <a:avLst/>
@@ -16395,7 +16236,7 @@
                 <a:ea typeface="Trebuchet MS" pitchFamily="34" charset="-122"/>
                 <a:cs typeface="Trebuchet MS" pitchFamily="34" charset="-120"/>
               </a:rPr>
-              <a:t>s</a:t>
+              <a:t>p</a:t>
             </a:r>
             <a:endParaRPr lang="en-US" sz="900" dirty="0"/>
           </a:p>
@@ -16403,18 +16244,18 @@
       </p:sp>
       <p:sp>
         <p:nvSpPr>
-          <p:cNvPr id="42" name="Shape 40"/>
-          <p:cNvSpPr/>
-          <p:nvPr/>
-        </p:nvSpPr>
-        <p:spPr>
-          <a:xfrm>
-            <a:off x="5370141" y="4169664"/>
-            <a:ext cx="685800" cy="475488"/>
+          <p:cNvPr id="48" name="Shape 46"/>
+          <p:cNvSpPr/>
+          <p:nvPr/>
+        </p:nvSpPr>
+        <p:spPr>
+          <a:xfrm>
+            <a:off x="4447032" y="4169664"/>
+            <a:ext cx="685800" cy="384048"/>
           </a:xfrm>
           <a:prstGeom prst="rect">
             <a:avLst>
-              <a:gd name="adj" fmla="val 7692"/>
+              <a:gd name="adj" fmla="val 9524"/>
             </a:avLst>
           </a:prstGeom>
           <a:solidFill>
@@ -16430,14 +16271,14 @@
       </p:sp>
       <p:sp>
         <p:nvSpPr>
-          <p:cNvPr id="43" name="Text 41"/>
-          <p:cNvSpPr/>
-          <p:nvPr/>
-        </p:nvSpPr>
-        <p:spPr>
-          <a:xfrm>
-            <a:off x="5370141" y="4169664"/>
-            <a:ext cx="685800" cy="475488"/>
+          <p:cNvPr id="49" name="Text 47"/>
+          <p:cNvSpPr/>
+          <p:nvPr/>
+        </p:nvSpPr>
+        <p:spPr>
+          <a:xfrm>
+            <a:off x="4447032" y="4169664"/>
+            <a:ext cx="685800" cy="384048"/>
           </a:xfrm>
           <a:prstGeom prst="rect">
             <a:avLst/>
@@ -16461,7 +16302,7 @@
                 <a:ea typeface="Trebuchet MS" pitchFamily="34" charset="-122"/>
                 <a:cs typeface="Trebuchet MS" pitchFamily="34" charset="-120"/>
               </a:rPr>
-              <a:t>i</a:t>
+              <a:t>er</a:t>
             </a:r>
             <a:endParaRPr lang="en-US" sz="900" dirty="0"/>
           </a:p>
@@ -16469,18 +16310,18 @@
       </p:sp>
       <p:sp>
         <p:nvSpPr>
-          <p:cNvPr id="44" name="Shape 42"/>
-          <p:cNvSpPr/>
-          <p:nvPr/>
-        </p:nvSpPr>
-        <p:spPr>
-          <a:xfrm>
-            <a:off x="6408638" y="4169664"/>
-            <a:ext cx="685800" cy="475488"/>
+          <p:cNvPr id="50" name="Shape 48"/>
+          <p:cNvSpPr/>
+          <p:nvPr/>
+        </p:nvSpPr>
+        <p:spPr>
+          <a:xfrm>
+            <a:off x="5254752" y="4169664"/>
+            <a:ext cx="685800" cy="384048"/>
           </a:xfrm>
           <a:prstGeom prst="rect">
             <a:avLst>
-              <a:gd name="adj" fmla="val 7692"/>
+              <a:gd name="adj" fmla="val 9524"/>
             </a:avLst>
           </a:prstGeom>
           <a:solidFill>
@@ -16496,14 +16337,14 @@
       </p:sp>
       <p:sp>
         <p:nvSpPr>
-          <p:cNvPr id="45" name="Text 43"/>
-          <p:cNvSpPr/>
-          <p:nvPr/>
-        </p:nvSpPr>
-        <p:spPr>
-          <a:xfrm>
-            <a:off x="6408638" y="4169664"/>
-            <a:ext cx="685800" cy="475488"/>
+          <p:cNvPr id="51" name="Text 49"/>
+          <p:cNvSpPr/>
+          <p:nvPr/>
+        </p:nvSpPr>
+        <p:spPr>
+          <a:xfrm>
+            <a:off x="5254752" y="4169664"/>
+            <a:ext cx="685800" cy="384048"/>
           </a:xfrm>
           <a:prstGeom prst="rect">
             <a:avLst/>
@@ -16527,7 +16368,7 @@
                 <a:ea typeface="Trebuchet MS" pitchFamily="34" charset="-122"/>
                 <a:cs typeface="Trebuchet MS" pitchFamily="34" charset="-120"/>
               </a:rPr>
-              <a:t>b</a:t>
+              <a:t>v</a:t>
             </a:r>
             <a:endParaRPr lang="en-US" sz="900" dirty="0"/>
           </a:p>
@@ -16535,18 +16376,18 @@
       </p:sp>
       <p:sp>
         <p:nvSpPr>
-          <p:cNvPr id="46" name="Shape 44"/>
-          <p:cNvSpPr/>
-          <p:nvPr/>
-        </p:nvSpPr>
-        <p:spPr>
-          <a:xfrm>
-            <a:off x="7447135" y="4169664"/>
-            <a:ext cx="685800" cy="475488"/>
+          <p:cNvPr id="52" name="Shape 50"/>
+          <p:cNvSpPr/>
+          <p:nvPr/>
+        </p:nvSpPr>
+        <p:spPr>
+          <a:xfrm>
+            <a:off x="6062472" y="4169664"/>
+            <a:ext cx="685800" cy="384048"/>
           </a:xfrm>
           <a:prstGeom prst="rect">
             <a:avLst>
-              <a:gd name="adj" fmla="val 7692"/>
+              <a:gd name="adj" fmla="val 9524"/>
             </a:avLst>
           </a:prstGeom>
           <a:solidFill>
@@ -16562,14 +16403,14 @@
       </p:sp>
       <p:sp>
         <p:nvSpPr>
-          <p:cNvPr id="47" name="Text 45"/>
-          <p:cNvSpPr/>
-          <p:nvPr/>
-        </p:nvSpPr>
-        <p:spPr>
-          <a:xfrm>
-            <a:off x="7447135" y="4169664"/>
-            <a:ext cx="685800" cy="475488"/>
+          <p:cNvPr id="53" name="Text 51"/>
+          <p:cNvSpPr/>
+          <p:nvPr/>
+        </p:nvSpPr>
+        <p:spPr>
+          <a:xfrm>
+            <a:off x="6062472" y="4169664"/>
+            <a:ext cx="685800" cy="384048"/>
           </a:xfrm>
           <a:prstGeom prst="rect">
             <a:avLst/>
@@ -16593,7 +16434,178 @@
                 <a:ea typeface="Trebuchet MS" pitchFamily="34" charset="-122"/>
                 <a:cs typeface="Trebuchet MS" pitchFamily="34" charset="-120"/>
               </a:rPr>
-              <a:t>le</a:t>
+              <a:t>i</a:t>
+            </a:r>
+            <a:endParaRPr lang="en-US" sz="900" dirty="0"/>
+          </a:p>
+        </p:txBody>
+      </p:sp>
+      <p:sp>
+        <p:nvSpPr>
+          <p:cNvPr id="54" name="Shape 52"/>
+          <p:cNvSpPr/>
+          <p:nvPr/>
+        </p:nvSpPr>
+        <p:spPr>
+          <a:xfrm>
+            <a:off x="6870192" y="4169664"/>
+            <a:ext cx="685800" cy="384048"/>
+          </a:xfrm>
+          <a:prstGeom prst="rect">
+            <a:avLst>
+              <a:gd name="adj" fmla="val 9524"/>
+            </a:avLst>
+          </a:prstGeom>
+          <a:solidFill>
+            <a:srgbClr val="FFFFFF"/>
+          </a:solidFill>
+          <a:ln w="12700">
+            <a:solidFill>
+              <a:srgbClr val="DB2777"/>
+            </a:solidFill>
+            <a:prstDash val="solid"/>
+          </a:ln>
+        </p:spPr>
+      </p:sp>
+      <p:sp>
+        <p:nvSpPr>
+          <p:cNvPr id="55" name="Text 53"/>
+          <p:cNvSpPr/>
+          <p:nvPr/>
+        </p:nvSpPr>
+        <p:spPr>
+          <a:xfrm>
+            <a:off x="6870192" y="4169664"/>
+            <a:ext cx="685800" cy="384048"/>
+          </a:xfrm>
+          <a:prstGeom prst="rect">
+            <a:avLst/>
+          </a:prstGeom>
+          <a:noFill/>
+          <a:ln/>
+        </p:spPr>
+        <p:txBody>
+          <a:bodyPr wrap="square" lIns="0" tIns="0" rIns="0" bIns="0" rtlCol="0" anchor="ctr"/>
+          <a:lstStyle/>
+          <a:p>
+            <a:pPr algn="ctr" indent="0" marL="0">
+              <a:buNone/>
+            </a:pPr>
+            <a:r>
+              <a:rPr lang="en-US" sz="900" b="1" dirty="0">
+                <a:solidFill>
+                  <a:srgbClr val="9D174D"/>
+                </a:solidFill>
+                <a:latin typeface="Trebuchet MS" pitchFamily="34" charset="0"/>
+                <a:ea typeface="Trebuchet MS" pitchFamily="34" charset="-122"/>
+                <a:cs typeface="Trebuchet MS" pitchFamily="34" charset="-120"/>
+              </a:rPr>
+              <a:t>s</a:t>
+            </a:r>
+            <a:endParaRPr lang="en-US" sz="900" dirty="0"/>
+          </a:p>
+        </p:txBody>
+      </p:sp>
+      <p:sp>
+        <p:nvSpPr>
+          <p:cNvPr id="56" name="Text 54"/>
+          <p:cNvSpPr/>
+          <p:nvPr/>
+        </p:nvSpPr>
+        <p:spPr>
+          <a:xfrm>
+            <a:off x="6870192" y="4572000"/>
+            <a:ext cx="685800" cy="219456"/>
+          </a:xfrm>
+          <a:prstGeom prst="rect">
+            <a:avLst/>
+          </a:prstGeom>
+          <a:noFill/>
+          <a:ln/>
+        </p:spPr>
+        <p:txBody>
+          <a:bodyPr wrap="square" lIns="0" tIns="0" rIns="0" bIns="0" rtlCol="0" anchor="t"/>
+          <a:lstStyle/>
+          <a:p>
+            <a:pPr algn="ctr" indent="0" marL="0">
+              <a:buNone/>
+            </a:pPr>
+            <a:r>
+              <a:rPr lang="en-US" sz="750" i="1" dirty="0">
+                <a:solidFill>
+                  <a:srgbClr val="94A3B8"/>
+                </a:solidFill>
+                <a:latin typeface="Calibri" pitchFamily="34" charset="0"/>
+                <a:ea typeface="Calibri" pitchFamily="34" charset="-122"/>
+                <a:cs typeface="Calibri" pitchFamily="34" charset="-120"/>
+              </a:rPr>
+              <a:t>/z/</a:t>
+            </a:r>
+            <a:endParaRPr lang="en-US" sz="750" dirty="0"/>
+          </a:p>
+        </p:txBody>
+      </p:sp>
+      <p:sp>
+        <p:nvSpPr>
+          <p:cNvPr id="57" name="Shape 55"/>
+          <p:cNvSpPr/>
+          <p:nvPr/>
+        </p:nvSpPr>
+        <p:spPr>
+          <a:xfrm>
+            <a:off x="7677912" y="4169664"/>
+            <a:ext cx="685800" cy="384048"/>
+          </a:xfrm>
+          <a:prstGeom prst="rect">
+            <a:avLst>
+              <a:gd name="adj" fmla="val 9524"/>
+            </a:avLst>
+          </a:prstGeom>
+          <a:solidFill>
+            <a:srgbClr val="FFFFFF"/>
+          </a:solidFill>
+          <a:ln w="12700">
+            <a:solidFill>
+              <a:srgbClr val="DB2777"/>
+            </a:solidFill>
+            <a:prstDash val="solid"/>
+          </a:ln>
+        </p:spPr>
+      </p:sp>
+      <p:sp>
+        <p:nvSpPr>
+          <p:cNvPr id="58" name="Text 56"/>
+          <p:cNvSpPr/>
+          <p:nvPr/>
+        </p:nvSpPr>
+        <p:spPr>
+          <a:xfrm>
+            <a:off x="7677912" y="4169664"/>
+            <a:ext cx="685800" cy="384048"/>
+          </a:xfrm>
+          <a:prstGeom prst="rect">
+            <a:avLst/>
+          </a:prstGeom>
+          <a:noFill/>
+          <a:ln/>
+        </p:spPr>
+        <p:txBody>
+          <a:bodyPr wrap="square" lIns="0" tIns="0" rIns="0" bIns="0" rtlCol="0" anchor="ctr"/>
+          <a:lstStyle/>
+          <a:p>
+            <a:pPr algn="ctr" indent="0" marL="0">
+              <a:buNone/>
+            </a:pPr>
+            <a:r>
+              <a:rPr lang="en-US" sz="900" b="1" dirty="0">
+                <a:solidFill>
+                  <a:srgbClr val="9D174D"/>
+                </a:solidFill>
+                <a:latin typeface="Trebuchet MS" pitchFamily="34" charset="0"/>
+                <a:ea typeface="Trebuchet MS" pitchFamily="34" charset="-122"/>
+                <a:cs typeface="Trebuchet MS" pitchFamily="34" charset="-120"/>
+              </a:rPr>
+              <a:t>or</a:t>
             </a:r>
             <a:endParaRPr lang="en-US" sz="900" dirty="0"/>
           </a:p>
@@ -17501,7 +17513,7 @@
                 <a:ea typeface="Trebuchet MS" pitchFamily="34" charset="-122"/>
                 <a:cs typeface="Trebuchet MS" pitchFamily="34" charset="-120"/>
               </a:rPr>
-              <a:t>2</a:t>
+              <a:t>1</a:t>
             </a:r>
             <a:pPr algn="ctr" indent="0" marL="0">
               <a:buNone/>
@@ -17515,7 +17527,7 @@
                 <a:ea typeface="Trebuchet MS" pitchFamily="34" charset="-122"/>
                 <a:cs typeface="Trebuchet MS" pitchFamily="34" charset="-120"/>
               </a:rPr>
-              <a:t>  punctuation marks</a:t>
+              <a:t>  punctuation mark</a:t>
             </a:r>
             <a:endParaRPr lang="en-US" sz="2800" dirty="0"/>
           </a:p>
@@ -17950,7 +17962,7 @@
                 <a:ea typeface="Calibri" pitchFamily="34" charset="-122"/>
                 <a:cs typeface="Calibri" pitchFamily="34" charset="-120"/>
               </a:rPr>
-              <a:t>, the students discovered that good </a:t>
+              <a:t>, our teacher used a </a:t>
             </a:r>
             <a:pPr algn="l" indent="0" marL="0">
               <a:buNone/>
@@ -17967,7 +17979,7 @@
                 <a:ea typeface="Calibri" pitchFamily="34" charset="-122"/>
                 <a:cs typeface="Calibri" pitchFamily="34" charset="-120"/>
               </a:rPr>
-              <a:t>vision</a:t>
+              <a:t>visual</a:t>
             </a:r>
             <a:pPr algn="l" indent="0" marL="0">
               <a:buNone/>
@@ -17981,7 +17993,7 @@
                 <a:ea typeface="Calibri" pitchFamily="34" charset="-122"/>
                 <a:cs typeface="Calibri" pitchFamily="34" charset="-120"/>
               </a:rPr>
-              <a:t> is important for reading, so they </a:t>
+              <a:t> display to explain the </a:t>
             </a:r>
             <a:pPr algn="l" indent="0" marL="0">
               <a:buNone/>
@@ -17998,7 +18010,7 @@
                 <a:ea typeface="Calibri" pitchFamily="34" charset="-122"/>
                 <a:cs typeface="Calibri" pitchFamily="34" charset="-120"/>
               </a:rPr>
-              <a:t>visited</a:t>
+              <a:t>television</a:t>
             </a:r>
             <a:pPr algn="l" indent="0" marL="0">
               <a:buNone/>
@@ -18012,7 +18024,7 @@
                 <a:ea typeface="Calibri" pitchFamily="34" charset="-122"/>
                 <a:cs typeface="Calibri" pitchFamily="34" charset="-120"/>
               </a:rPr>
-              <a:t> the eye doctor.</a:t>
+              <a:t> programme.</a:t>
             </a:r>
             <a:endParaRPr lang="en-US" sz="1800" dirty="0"/>
           </a:p>
@@ -18295,7 +18307,7 @@
                 <a:ea typeface="Trebuchet MS" pitchFamily="34" charset="-122"/>
                 <a:cs typeface="Trebuchet MS" pitchFamily="34" charset="-120"/>
               </a:rPr>
-              <a:t>vision</a:t>
+              <a:t>visual</a:t>
             </a:r>
             <a:endParaRPr lang="en-US" sz="1400" dirty="0"/>
           </a:p>
@@ -18423,7 +18435,7 @@
                 <a:ea typeface="Trebuchet MS" pitchFamily="34" charset="-122"/>
                 <a:cs typeface="Trebuchet MS" pitchFamily="34" charset="-120"/>
               </a:rPr>
-              <a:t>visited</a:t>
+              <a:t>television</a:t>
             </a:r>
             <a:endParaRPr lang="en-US" sz="1400" dirty="0"/>
           </a:p>
@@ -23881,7 +23893,7 @@
                 <a:ea typeface="Trebuchet MS" pitchFamily="34" charset="-122"/>
                 <a:cs typeface="Trebuchet MS" pitchFamily="34" charset="-120"/>
               </a:rPr>
-              <a:t>vision</a:t>
+              <a:t>visual</a:t>
             </a:r>
             <a:endParaRPr lang="en-US" sz="2800" dirty="0"/>
           </a:p>
@@ -24708,7 +24720,7 @@
                 <a:ea typeface="Trebuchet MS" pitchFamily="34" charset="-122"/>
                 <a:cs typeface="Trebuchet MS" pitchFamily="34" charset="-120"/>
               </a:rPr>
-              <a:t>vision</a:t>
+              <a:t>visual</a:t>
             </a:r>
             <a:endParaRPr lang="en-US" sz="2800" dirty="0"/>
           </a:p>
@@ -24788,7 +24800,7 @@
         </p:nvSpPr>
         <p:spPr>
           <a:xfrm>
-            <a:off x="2938272" y="2258568"/>
+            <a:off x="2221992" y="2258568"/>
             <a:ext cx="1828800" cy="292608"/>
           </a:xfrm>
           <a:prstGeom prst="rect">
@@ -24822,7 +24834,7 @@
         </p:nvSpPr>
         <p:spPr>
           <a:xfrm>
-            <a:off x="2938272" y="2258568"/>
+            <a:off x="2221992" y="2258568"/>
             <a:ext cx="1828800" cy="292608"/>
           </a:xfrm>
           <a:prstGeom prst="rect">
@@ -24861,7 +24873,7 @@
         </p:nvSpPr>
         <p:spPr>
           <a:xfrm>
-            <a:off x="2938272" y="2569464"/>
+            <a:off x="2221992" y="2569464"/>
             <a:ext cx="1828800" cy="201168"/>
           </a:xfrm>
           <a:prstGeom prst="rect">
@@ -24900,7 +24912,7 @@
         </p:nvSpPr>
         <p:spPr>
           <a:xfrm>
-            <a:off x="5803392" y="2258568"/>
+            <a:off x="4370832" y="2258568"/>
             <a:ext cx="1828800" cy="292608"/>
           </a:xfrm>
           <a:prstGeom prst="rect">
@@ -24934,7 +24946,7 @@
         </p:nvSpPr>
         <p:spPr>
           <a:xfrm>
-            <a:off x="5803392" y="2258568"/>
+            <a:off x="4370832" y="2258568"/>
             <a:ext cx="1828800" cy="292608"/>
           </a:xfrm>
           <a:prstGeom prst="rect">
@@ -24959,7 +24971,7 @@
                 <a:ea typeface="Trebuchet MS" pitchFamily="34" charset="-122"/>
                 <a:cs typeface="Trebuchet MS" pitchFamily="34" charset="-120"/>
               </a:rPr>
-              <a:t>ion</a:t>
+              <a:t>u</a:t>
             </a:r>
             <a:endParaRPr lang="en-US" sz="1300" dirty="0"/>
           </a:p>
@@ -24973,7 +24985,7 @@
         </p:nvSpPr>
         <p:spPr>
           <a:xfrm>
-            <a:off x="5803392" y="2569464"/>
+            <a:off x="4370832" y="2569464"/>
             <a:ext cx="1828800" cy="201168"/>
           </a:xfrm>
           <a:prstGeom prst="rect">
@@ -24998,7 +25010,7 @@
                 <a:ea typeface="Calibri" pitchFamily="34" charset="-122"/>
                 <a:cs typeface="Calibri" pitchFamily="34" charset="-120"/>
               </a:rPr>
-              <a:t>act or process of</a:t>
+              <a:t>connecting vowel</a:t>
             </a:r>
             <a:endParaRPr lang="en-US" sz="850" dirty="0"/>
           </a:p>
@@ -25006,7 +25018,158 @@
       </p:sp>
       <p:sp>
         <p:nvSpPr>
-          <p:cNvPr id="22" name="Shape 20"/>
+          <p:cNvPr id="22" name="Text 20"/>
+          <p:cNvSpPr/>
+          <p:nvPr/>
+        </p:nvSpPr>
+        <p:spPr>
+          <a:xfrm>
+            <a:off x="4370832" y="2752344"/>
+            <a:ext cx="1828800" cy="182880"/>
+          </a:xfrm>
+          <a:prstGeom prst="rect">
+            <a:avLst/>
+          </a:prstGeom>
+          <a:noFill/>
+          <a:ln/>
+        </p:spPr>
+        <p:txBody>
+          <a:bodyPr wrap="square" lIns="0" tIns="0" rIns="0" bIns="0" rtlCol="0" anchor="t"/>
+          <a:lstStyle/>
+          <a:p>
+            <a:pPr algn="ctr" indent="0" marL="0">
+              <a:buNone/>
+            </a:pPr>
+            <a:r>
+              <a:rPr lang="en-US" sz="700" i="1" dirty="0">
+                <a:solidFill>
+                  <a:srgbClr val="94A3B8"/>
+                </a:solidFill>
+                <a:latin typeface="Calibri" pitchFamily="34" charset="0"/>
+                <a:ea typeface="Calibri" pitchFamily="34" charset="-122"/>
+                <a:cs typeface="Calibri" pitchFamily="34" charset="-120"/>
+              </a:rPr>
+              <a:t>links base to suffix</a:t>
+            </a:r>
+            <a:endParaRPr lang="en-US" sz="700" dirty="0"/>
+          </a:p>
+        </p:txBody>
+      </p:sp>
+      <p:sp>
+        <p:nvSpPr>
+          <p:cNvPr id="23" name="Shape 21"/>
+          <p:cNvSpPr/>
+          <p:nvPr/>
+        </p:nvSpPr>
+        <p:spPr>
+          <a:xfrm>
+            <a:off x="6519672" y="2258568"/>
+            <a:ext cx="1828800" cy="292608"/>
+          </a:xfrm>
+          <a:prstGeom prst="rect">
+            <a:avLst>
+              <a:gd name="adj" fmla="val 25000"/>
+            </a:avLst>
+          </a:prstGeom>
+          <a:solidFill>
+            <a:srgbClr val="FCE7F3"/>
+          </a:solidFill>
+          <a:ln w="19050">
+            <a:solidFill>
+              <a:srgbClr val="DB2777"/>
+            </a:solidFill>
+            <a:prstDash val="solid"/>
+          </a:ln>
+          <a:effectLst>
+            <a:outerShdw sx="100000" sy="100000" kx="0" ky="0" algn="bl" rotWithShape="0" blurRad="101600" dist="38100" dir="8100000">
+              <a:srgbClr val="000000">
+                <a:alpha val="12000"/>
+              </a:srgbClr>
+            </a:outerShdw>
+          </a:effectLst>
+        </p:spPr>
+      </p:sp>
+      <p:sp>
+        <p:nvSpPr>
+          <p:cNvPr id="24" name="Text 22"/>
+          <p:cNvSpPr/>
+          <p:nvPr/>
+        </p:nvSpPr>
+        <p:spPr>
+          <a:xfrm>
+            <a:off x="6519672" y="2258568"/>
+            <a:ext cx="1828800" cy="292608"/>
+          </a:xfrm>
+          <a:prstGeom prst="rect">
+            <a:avLst/>
+          </a:prstGeom>
+          <a:noFill/>
+          <a:ln/>
+        </p:spPr>
+        <p:txBody>
+          <a:bodyPr wrap="square" lIns="0" tIns="0" rIns="0" bIns="0" rtlCol="0" anchor="ctr"/>
+          <a:lstStyle/>
+          <a:p>
+            <a:pPr algn="ctr" indent="0" marL="0">
+              <a:buNone/>
+            </a:pPr>
+            <a:r>
+              <a:rPr lang="en-US" sz="1300" b="1" dirty="0">
+                <a:solidFill>
+                  <a:srgbClr val="9D174D"/>
+                </a:solidFill>
+                <a:latin typeface="Trebuchet MS" pitchFamily="34" charset="0"/>
+                <a:ea typeface="Trebuchet MS" pitchFamily="34" charset="-122"/>
+                <a:cs typeface="Trebuchet MS" pitchFamily="34" charset="-120"/>
+              </a:rPr>
+              <a:t>al</a:t>
+            </a:r>
+            <a:endParaRPr lang="en-US" sz="1300" dirty="0"/>
+          </a:p>
+        </p:txBody>
+      </p:sp>
+      <p:sp>
+        <p:nvSpPr>
+          <p:cNvPr id="25" name="Text 23"/>
+          <p:cNvSpPr/>
+          <p:nvPr/>
+        </p:nvSpPr>
+        <p:spPr>
+          <a:xfrm>
+            <a:off x="6519672" y="2569464"/>
+            <a:ext cx="1828800" cy="201168"/>
+          </a:xfrm>
+          <a:prstGeom prst="rect">
+            <a:avLst/>
+          </a:prstGeom>
+          <a:noFill/>
+          <a:ln/>
+        </p:spPr>
+        <p:txBody>
+          <a:bodyPr wrap="square" lIns="0" tIns="0" rIns="0" bIns="0" rtlCol="0" anchor="t"/>
+          <a:lstStyle/>
+          <a:p>
+            <a:pPr algn="ctr" indent="0" marL="0">
+              <a:buNone/>
+            </a:pPr>
+            <a:r>
+              <a:rPr lang="en-US" sz="850" dirty="0">
+                <a:solidFill>
+                  <a:srgbClr val="475569"/>
+                </a:solidFill>
+                <a:latin typeface="Calibri" pitchFamily="34" charset="0"/>
+                <a:ea typeface="Calibri" pitchFamily="34" charset="-122"/>
+                <a:cs typeface="Calibri" pitchFamily="34" charset="-120"/>
+              </a:rPr>
+              <a:t>relating to</a:t>
+            </a:r>
+            <a:endParaRPr lang="en-US" sz="850" dirty="0"/>
+          </a:p>
+        </p:txBody>
+      </p:sp>
+      <p:sp>
+        <p:nvSpPr>
+          <p:cNvPr id="26" name="Shape 24"/>
           <p:cNvSpPr/>
           <p:nvPr/>
         </p:nvSpPr>
@@ -25033,7 +25196,7 @@
       </p:sp>
       <p:sp>
         <p:nvSpPr>
-          <p:cNvPr id="23" name="Text 21"/>
+          <p:cNvPr id="27" name="Text 25"/>
           <p:cNvSpPr/>
           <p:nvPr/>
         </p:nvSpPr>
@@ -25072,7 +25235,7 @@
       </p:sp>
       <p:sp>
         <p:nvSpPr>
-          <p:cNvPr id="24" name="Shape 22"/>
+          <p:cNvPr id="28" name="Shape 26"/>
           <p:cNvSpPr/>
           <p:nvPr/>
         </p:nvSpPr>
@@ -25099,7 +25262,7 @@
       </p:sp>
       <p:sp>
         <p:nvSpPr>
-          <p:cNvPr id="25" name="Text 23"/>
+          <p:cNvPr id="29" name="Text 27"/>
           <p:cNvSpPr/>
           <p:nvPr/>
         </p:nvSpPr>
@@ -25138,7 +25301,7 @@
       </p:sp>
       <p:sp>
         <p:nvSpPr>
-          <p:cNvPr id="26" name="Shape 24"/>
+          <p:cNvPr id="30" name="Shape 28"/>
           <p:cNvSpPr/>
           <p:nvPr/>
         </p:nvSpPr>
@@ -25165,7 +25328,7 @@
       </p:sp>
       <p:sp>
         <p:nvSpPr>
-          <p:cNvPr id="27" name="Text 25"/>
+          <p:cNvPr id="31" name="Text 29"/>
           <p:cNvSpPr/>
           <p:nvPr/>
         </p:nvSpPr>
@@ -25204,7 +25367,7 @@
       </p:sp>
       <p:sp>
         <p:nvSpPr>
-          <p:cNvPr id="28" name="Shape 26"/>
+          <p:cNvPr id="32" name="Shape 30"/>
           <p:cNvSpPr/>
           <p:nvPr/>
         </p:nvSpPr>
@@ -25231,7 +25394,7 @@
       </p:sp>
       <p:sp>
         <p:nvSpPr>
-          <p:cNvPr id="29" name="Text 27"/>
+          <p:cNvPr id="33" name="Text 31"/>
           <p:cNvSpPr/>
           <p:nvPr/>
         </p:nvSpPr>
@@ -26412,7 +26575,7 @@
                 <a:ea typeface="Trebuchet MS" pitchFamily="34" charset="-122"/>
                 <a:cs typeface="Trebuchet MS" pitchFamily="34" charset="-120"/>
               </a:rPr>
-              <a:t>vision</a:t>
+              <a:t>visual</a:t>
             </a:r>
             <a:endParaRPr lang="en-US" sz="2800" dirty="0"/>
           </a:p>
@@ -26492,7 +26655,7 @@
         </p:nvSpPr>
         <p:spPr>
           <a:xfrm>
-            <a:off x="2938272" y="2258568"/>
+            <a:off x="2221992" y="2258568"/>
             <a:ext cx="1828800" cy="292608"/>
           </a:xfrm>
           <a:prstGeom prst="rect">
@@ -26526,7 +26689,7 @@
         </p:nvSpPr>
         <p:spPr>
           <a:xfrm>
-            <a:off x="2938272" y="2258568"/>
+            <a:off x="2221992" y="2258568"/>
             <a:ext cx="1828800" cy="292608"/>
           </a:xfrm>
           <a:prstGeom prst="rect">
@@ -26565,7 +26728,7 @@
         </p:nvSpPr>
         <p:spPr>
           <a:xfrm>
-            <a:off x="2938272" y="2569464"/>
+            <a:off x="2221992" y="2569464"/>
             <a:ext cx="1828800" cy="201168"/>
           </a:xfrm>
           <a:prstGeom prst="rect">
@@ -26604,7 +26767,7 @@
         </p:nvSpPr>
         <p:spPr>
           <a:xfrm>
-            <a:off x="5803392" y="2258568"/>
+            <a:off x="4370832" y="2258568"/>
             <a:ext cx="1828800" cy="292608"/>
           </a:xfrm>
           <a:prstGeom prst="rect">
@@ -26638,7 +26801,7 @@
         </p:nvSpPr>
         <p:spPr>
           <a:xfrm>
-            <a:off x="5803392" y="2258568"/>
+            <a:off x="4370832" y="2258568"/>
             <a:ext cx="1828800" cy="292608"/>
           </a:xfrm>
           <a:prstGeom prst="rect">
@@ -26663,7 +26826,7 @@
                 <a:ea typeface="Trebuchet MS" pitchFamily="34" charset="-122"/>
                 <a:cs typeface="Trebuchet MS" pitchFamily="34" charset="-120"/>
               </a:rPr>
-              <a:t>ion</a:t>
+              <a:t>u</a:t>
             </a:r>
             <a:endParaRPr lang="en-US" sz="1300" dirty="0"/>
           </a:p>
@@ -26677,7 +26840,7 @@
         </p:nvSpPr>
         <p:spPr>
           <a:xfrm>
-            <a:off x="5803392" y="2569464"/>
+            <a:off x="4370832" y="2569464"/>
             <a:ext cx="1828800" cy="201168"/>
           </a:xfrm>
           <a:prstGeom prst="rect">
@@ -26702,7 +26865,7 @@
                 <a:ea typeface="Calibri" pitchFamily="34" charset="-122"/>
                 <a:cs typeface="Calibri" pitchFamily="34" charset="-120"/>
               </a:rPr>
-              <a:t>act or process of</a:t>
+              <a:t>connecting vowel</a:t>
             </a:r>
             <a:endParaRPr lang="en-US" sz="850" dirty="0"/>
           </a:p>
@@ -26710,7 +26873,158 @@
       </p:sp>
       <p:sp>
         <p:nvSpPr>
-          <p:cNvPr id="22" name="Shape 20"/>
+          <p:cNvPr id="22" name="Text 20"/>
+          <p:cNvSpPr/>
+          <p:nvPr/>
+        </p:nvSpPr>
+        <p:spPr>
+          <a:xfrm>
+            <a:off x="4370832" y="2752344"/>
+            <a:ext cx="1828800" cy="182880"/>
+          </a:xfrm>
+          <a:prstGeom prst="rect">
+            <a:avLst/>
+          </a:prstGeom>
+          <a:noFill/>
+          <a:ln/>
+        </p:spPr>
+        <p:txBody>
+          <a:bodyPr wrap="square" lIns="0" tIns="0" rIns="0" bIns="0" rtlCol="0" anchor="t"/>
+          <a:lstStyle/>
+          <a:p>
+            <a:pPr algn="ctr" indent="0" marL="0">
+              <a:buNone/>
+            </a:pPr>
+            <a:r>
+              <a:rPr lang="en-US" sz="700" i="1" dirty="0">
+                <a:solidFill>
+                  <a:srgbClr val="94A3B8"/>
+                </a:solidFill>
+                <a:latin typeface="Calibri" pitchFamily="34" charset="0"/>
+                <a:ea typeface="Calibri" pitchFamily="34" charset="-122"/>
+                <a:cs typeface="Calibri" pitchFamily="34" charset="-120"/>
+              </a:rPr>
+              <a:t>links base to suffix</a:t>
+            </a:r>
+            <a:endParaRPr lang="en-US" sz="700" dirty="0"/>
+          </a:p>
+        </p:txBody>
+      </p:sp>
+      <p:sp>
+        <p:nvSpPr>
+          <p:cNvPr id="23" name="Shape 21"/>
+          <p:cNvSpPr/>
+          <p:nvPr/>
+        </p:nvSpPr>
+        <p:spPr>
+          <a:xfrm>
+            <a:off x="6519672" y="2258568"/>
+            <a:ext cx="1828800" cy="292608"/>
+          </a:xfrm>
+          <a:prstGeom prst="rect">
+            <a:avLst>
+              <a:gd name="adj" fmla="val 25000"/>
+            </a:avLst>
+          </a:prstGeom>
+          <a:solidFill>
+            <a:srgbClr val="FCE7F3"/>
+          </a:solidFill>
+          <a:ln w="19050">
+            <a:solidFill>
+              <a:srgbClr val="DB2777"/>
+            </a:solidFill>
+            <a:prstDash val="solid"/>
+          </a:ln>
+          <a:effectLst>
+            <a:outerShdw sx="100000" sy="100000" kx="0" ky="0" algn="bl" rotWithShape="0" blurRad="101600" dist="38100" dir="8100000">
+              <a:srgbClr val="000000">
+                <a:alpha val="12000"/>
+              </a:srgbClr>
+            </a:outerShdw>
+          </a:effectLst>
+        </p:spPr>
+      </p:sp>
+      <p:sp>
+        <p:nvSpPr>
+          <p:cNvPr id="24" name="Text 22"/>
+          <p:cNvSpPr/>
+          <p:nvPr/>
+        </p:nvSpPr>
+        <p:spPr>
+          <a:xfrm>
+            <a:off x="6519672" y="2258568"/>
+            <a:ext cx="1828800" cy="292608"/>
+          </a:xfrm>
+          <a:prstGeom prst="rect">
+            <a:avLst/>
+          </a:prstGeom>
+          <a:noFill/>
+          <a:ln/>
+        </p:spPr>
+        <p:txBody>
+          <a:bodyPr wrap="square" lIns="0" tIns="0" rIns="0" bIns="0" rtlCol="0" anchor="ctr"/>
+          <a:lstStyle/>
+          <a:p>
+            <a:pPr algn="ctr" indent="0" marL="0">
+              <a:buNone/>
+            </a:pPr>
+            <a:r>
+              <a:rPr lang="en-US" sz="1300" b="1" dirty="0">
+                <a:solidFill>
+                  <a:srgbClr val="9D174D"/>
+                </a:solidFill>
+                <a:latin typeface="Trebuchet MS" pitchFamily="34" charset="0"/>
+                <a:ea typeface="Trebuchet MS" pitchFamily="34" charset="-122"/>
+                <a:cs typeface="Trebuchet MS" pitchFamily="34" charset="-120"/>
+              </a:rPr>
+              <a:t>al</a:t>
+            </a:r>
+            <a:endParaRPr lang="en-US" sz="1300" dirty="0"/>
+          </a:p>
+        </p:txBody>
+      </p:sp>
+      <p:sp>
+        <p:nvSpPr>
+          <p:cNvPr id="25" name="Text 23"/>
+          <p:cNvSpPr/>
+          <p:nvPr/>
+        </p:nvSpPr>
+        <p:spPr>
+          <a:xfrm>
+            <a:off x="6519672" y="2569464"/>
+            <a:ext cx="1828800" cy="201168"/>
+          </a:xfrm>
+          <a:prstGeom prst="rect">
+            <a:avLst/>
+          </a:prstGeom>
+          <a:noFill/>
+          <a:ln/>
+        </p:spPr>
+        <p:txBody>
+          <a:bodyPr wrap="square" lIns="0" tIns="0" rIns="0" bIns="0" rtlCol="0" anchor="t"/>
+          <a:lstStyle/>
+          <a:p>
+            <a:pPr algn="ctr" indent="0" marL="0">
+              <a:buNone/>
+            </a:pPr>
+            <a:r>
+              <a:rPr lang="en-US" sz="850" dirty="0">
+                <a:solidFill>
+                  <a:srgbClr val="475569"/>
+                </a:solidFill>
+                <a:latin typeface="Calibri" pitchFamily="34" charset="0"/>
+                <a:ea typeface="Calibri" pitchFamily="34" charset="-122"/>
+                <a:cs typeface="Calibri" pitchFamily="34" charset="-120"/>
+              </a:rPr>
+              <a:t>relating to</a:t>
+            </a:r>
+            <a:endParaRPr lang="en-US" sz="850" dirty="0"/>
+          </a:p>
+        </p:txBody>
+      </p:sp>
+      <p:sp>
+        <p:nvSpPr>
+          <p:cNvPr id="26" name="Shape 24"/>
           <p:cNvSpPr/>
           <p:nvPr/>
         </p:nvSpPr>
@@ -26737,7 +27051,7 @@
       </p:sp>
       <p:sp>
         <p:nvSpPr>
-          <p:cNvPr id="23" name="Text 21"/>
+          <p:cNvPr id="27" name="Text 25"/>
           <p:cNvSpPr/>
           <p:nvPr/>
         </p:nvSpPr>
@@ -26776,7 +27090,7 @@
       </p:sp>
       <p:sp>
         <p:nvSpPr>
-          <p:cNvPr id="24" name="Shape 22"/>
+          <p:cNvPr id="28" name="Shape 26"/>
           <p:cNvSpPr/>
           <p:nvPr/>
         </p:nvSpPr>
@@ -26803,13 +27117,13 @@
       </p:sp>
       <p:sp>
         <p:nvSpPr>
-          <p:cNvPr id="25" name="Shape 23"/>
-          <p:cNvSpPr/>
-          <p:nvPr/>
-        </p:nvSpPr>
-        <p:spPr>
-          <a:xfrm>
-            <a:off x="2999232" y="3364992"/>
+          <p:cNvPr id="29" name="Shape 27"/>
+          <p:cNvSpPr/>
+          <p:nvPr/>
+        </p:nvSpPr>
+        <p:spPr>
+          <a:xfrm>
+            <a:off x="2313432" y="3364992"/>
             <a:ext cx="1645920" cy="475488"/>
           </a:xfrm>
           <a:prstGeom prst="rect">
@@ -26830,13 +27144,13 @@
       </p:sp>
       <p:sp>
         <p:nvSpPr>
-          <p:cNvPr id="26" name="Text 24"/>
-          <p:cNvSpPr/>
-          <p:nvPr/>
-        </p:nvSpPr>
-        <p:spPr>
-          <a:xfrm>
-            <a:off x="2999232" y="3364992"/>
+          <p:cNvPr id="30" name="Text 28"/>
+          <p:cNvSpPr/>
+          <p:nvPr/>
+        </p:nvSpPr>
+        <p:spPr>
+          <a:xfrm>
+            <a:off x="2313432" y="3364992"/>
             <a:ext cx="1645920" cy="475488"/>
           </a:xfrm>
           <a:prstGeom prst="rect">
@@ -26869,14 +27183,14 @@
       </p:sp>
       <p:sp>
         <p:nvSpPr>
-          <p:cNvPr id="27" name="Text 25"/>
-          <p:cNvSpPr/>
-          <p:nvPr/>
-        </p:nvSpPr>
-        <p:spPr>
-          <a:xfrm>
-            <a:off x="4645152" y="3364992"/>
-            <a:ext cx="1097280" cy="475488"/>
+          <p:cNvPr id="31" name="Text 29"/>
+          <p:cNvSpPr/>
+          <p:nvPr/>
+        </p:nvSpPr>
+        <p:spPr>
+          <a:xfrm>
+            <a:off x="3959352" y="3364992"/>
+            <a:ext cx="411480" cy="475488"/>
           </a:xfrm>
           <a:prstGeom prst="rect">
             <a:avLst/>
@@ -26908,13 +27222,13 @@
       </p:sp>
       <p:sp>
         <p:nvSpPr>
-          <p:cNvPr id="28" name="Shape 26"/>
-          <p:cNvSpPr/>
-          <p:nvPr/>
-        </p:nvSpPr>
-        <p:spPr>
-          <a:xfrm>
-            <a:off x="5742432" y="3364992"/>
+          <p:cNvPr id="32" name="Shape 30"/>
+          <p:cNvSpPr/>
+          <p:nvPr/>
+        </p:nvSpPr>
+        <p:spPr>
+          <a:xfrm>
+            <a:off x="4370832" y="3364992"/>
             <a:ext cx="1645920" cy="475488"/>
           </a:xfrm>
           <a:prstGeom prst="rect">
@@ -26935,13 +27249,13 @@
       </p:sp>
       <p:sp>
         <p:nvSpPr>
-          <p:cNvPr id="29" name="Text 27"/>
-          <p:cNvSpPr/>
-          <p:nvPr/>
-        </p:nvSpPr>
-        <p:spPr>
-          <a:xfrm>
-            <a:off x="5742432" y="3364992"/>
+          <p:cNvPr id="33" name="Text 31"/>
+          <p:cNvSpPr/>
+          <p:nvPr/>
+        </p:nvSpPr>
+        <p:spPr>
+          <a:xfrm>
+            <a:off x="4370832" y="3364992"/>
             <a:ext cx="1645920" cy="475488"/>
           </a:xfrm>
           <a:prstGeom prst="rect">
@@ -26966,7 +27280,7 @@
                 <a:ea typeface="Trebuchet MS" pitchFamily="34" charset="-122"/>
                 <a:cs typeface="Trebuchet MS" pitchFamily="34" charset="-120"/>
               </a:rPr>
-              <a:t>sion</a:t>
+              <a:t>su</a:t>
             </a:r>
             <a:endParaRPr lang="en-US" sz="1400" dirty="0"/>
           </a:p>
@@ -26974,7 +27288,112 @@
       </p:sp>
       <p:sp>
         <p:nvSpPr>
-          <p:cNvPr id="30" name="Shape 28"/>
+          <p:cNvPr id="34" name="Text 32"/>
+          <p:cNvSpPr/>
+          <p:nvPr/>
+        </p:nvSpPr>
+        <p:spPr>
+          <a:xfrm>
+            <a:off x="6016752" y="3364992"/>
+            <a:ext cx="411480" cy="475488"/>
+          </a:xfrm>
+          <a:prstGeom prst="rect">
+            <a:avLst/>
+          </a:prstGeom>
+          <a:noFill/>
+          <a:ln/>
+        </p:spPr>
+        <p:txBody>
+          <a:bodyPr wrap="square" lIns="0" tIns="0" rIns="0" bIns="0" rtlCol="0" anchor="ctr"/>
+          <a:lstStyle/>
+          <a:p>
+            <a:pPr algn="ctr" indent="0" marL="0">
+              <a:buNone/>
+            </a:pPr>
+            <a:r>
+              <a:rPr lang="en-US" sz="1600" b="1" dirty="0">
+                <a:solidFill>
+                  <a:srgbClr val="0D9488"/>
+                </a:solidFill>
+                <a:latin typeface="Trebuchet MS" pitchFamily="34" charset="0"/>
+                <a:ea typeface="Trebuchet MS" pitchFamily="34" charset="-122"/>
+                <a:cs typeface="Trebuchet MS" pitchFamily="34" charset="-120"/>
+              </a:rPr>
+              <a:t>·</a:t>
+            </a:r>
+            <a:endParaRPr lang="en-US" sz="1600" dirty="0"/>
+          </a:p>
+        </p:txBody>
+      </p:sp>
+      <p:sp>
+        <p:nvSpPr>
+          <p:cNvPr id="35" name="Shape 33"/>
+          <p:cNvSpPr/>
+          <p:nvPr/>
+        </p:nvSpPr>
+        <p:spPr>
+          <a:xfrm>
+            <a:off x="6428232" y="3364992"/>
+            <a:ext cx="1645920" cy="475488"/>
+          </a:xfrm>
+          <a:prstGeom prst="rect">
+            <a:avLst>
+              <a:gd name="adj" fmla="val 9615"/>
+            </a:avLst>
+          </a:prstGeom>
+          <a:solidFill>
+            <a:srgbClr val="FFFFFF"/>
+          </a:solidFill>
+          <a:ln w="12700">
+            <a:solidFill>
+              <a:srgbClr val="0D9488"/>
+            </a:solidFill>
+            <a:prstDash val="solid"/>
+          </a:ln>
+        </p:spPr>
+      </p:sp>
+      <p:sp>
+        <p:nvSpPr>
+          <p:cNvPr id="36" name="Text 34"/>
+          <p:cNvSpPr/>
+          <p:nvPr/>
+        </p:nvSpPr>
+        <p:spPr>
+          <a:xfrm>
+            <a:off x="6428232" y="3364992"/>
+            <a:ext cx="1645920" cy="475488"/>
+          </a:xfrm>
+          <a:prstGeom prst="rect">
+            <a:avLst/>
+          </a:prstGeom>
+          <a:noFill/>
+          <a:ln/>
+        </p:spPr>
+        <p:txBody>
+          <a:bodyPr wrap="square" lIns="0" tIns="0" rIns="0" bIns="0" rtlCol="0" anchor="ctr"/>
+          <a:lstStyle/>
+          <a:p>
+            <a:pPr algn="ctr" indent="0" marL="0">
+              <a:buNone/>
+            </a:pPr>
+            <a:r>
+              <a:rPr lang="en-US" sz="1400" b="1" dirty="0">
+                <a:solidFill>
+                  <a:srgbClr val="0D9488"/>
+                </a:solidFill>
+                <a:latin typeface="Trebuchet MS" pitchFamily="34" charset="0"/>
+                <a:ea typeface="Trebuchet MS" pitchFamily="34" charset="-122"/>
+                <a:cs typeface="Trebuchet MS" pitchFamily="34" charset="-120"/>
+              </a:rPr>
+              <a:t>al</a:t>
+            </a:r>
+            <a:endParaRPr lang="en-US" sz="1400" dirty="0"/>
+          </a:p>
+        </p:txBody>
+      </p:sp>
+      <p:sp>
+        <p:nvSpPr>
+          <p:cNvPr id="37" name="Shape 35"/>
           <p:cNvSpPr/>
           <p:nvPr/>
         </p:nvSpPr>
@@ -27001,7 +27420,7 @@
       </p:sp>
       <p:sp>
         <p:nvSpPr>
-          <p:cNvPr id="31" name="Text 29"/>
+          <p:cNvPr id="38" name="Text 36"/>
           <p:cNvSpPr/>
           <p:nvPr/>
         </p:nvSpPr>
@@ -27040,7 +27459,7 @@
       </p:sp>
       <p:sp>
         <p:nvSpPr>
-          <p:cNvPr id="32" name="Shape 30"/>
+          <p:cNvPr id="39" name="Shape 37"/>
           <p:cNvSpPr/>
           <p:nvPr/>
         </p:nvSpPr>
@@ -27067,7 +27486,7 @@
       </p:sp>
       <p:sp>
         <p:nvSpPr>
-          <p:cNvPr id="33" name="Text 31"/>
+          <p:cNvPr id="40" name="Text 38"/>
           <p:cNvSpPr/>
           <p:nvPr/>
         </p:nvSpPr>
@@ -27529,7 +27948,7 @@
                 <a:ea typeface="Trebuchet MS" pitchFamily="34" charset="-122"/>
                 <a:cs typeface="Trebuchet MS" pitchFamily="34" charset="-120"/>
               </a:rPr>
-              <a:t>vision</a:t>
+              <a:t>visual</a:t>
             </a:r>
             <a:endParaRPr lang="en-US" sz="2800" dirty="0"/>
           </a:p>
@@ -27609,7 +28028,7 @@
         </p:nvSpPr>
         <p:spPr>
           <a:xfrm>
-            <a:off x="2938272" y="2258568"/>
+            <a:off x="2221992" y="2258568"/>
             <a:ext cx="1828800" cy="292608"/>
           </a:xfrm>
           <a:prstGeom prst="rect">
@@ -27643,7 +28062,7 @@
         </p:nvSpPr>
         <p:spPr>
           <a:xfrm>
-            <a:off x="2938272" y="2258568"/>
+            <a:off x="2221992" y="2258568"/>
             <a:ext cx="1828800" cy="292608"/>
           </a:xfrm>
           <a:prstGeom prst="rect">
@@ -27682,7 +28101,7 @@
         </p:nvSpPr>
         <p:spPr>
           <a:xfrm>
-            <a:off x="2938272" y="2569464"/>
+            <a:off x="2221992" y="2569464"/>
             <a:ext cx="1828800" cy="201168"/>
           </a:xfrm>
           <a:prstGeom prst="rect">
@@ -27721,7 +28140,7 @@
         </p:nvSpPr>
         <p:spPr>
           <a:xfrm>
-            <a:off x="5803392" y="2258568"/>
+            <a:off x="4370832" y="2258568"/>
             <a:ext cx="1828800" cy="292608"/>
           </a:xfrm>
           <a:prstGeom prst="rect">
@@ -27755,7 +28174,7 @@
         </p:nvSpPr>
         <p:spPr>
           <a:xfrm>
-            <a:off x="5803392" y="2258568"/>
+            <a:off x="4370832" y="2258568"/>
             <a:ext cx="1828800" cy="292608"/>
           </a:xfrm>
           <a:prstGeom prst="rect">
@@ -27780,7 +28199,7 @@
                 <a:ea typeface="Trebuchet MS" pitchFamily="34" charset="-122"/>
                 <a:cs typeface="Trebuchet MS" pitchFamily="34" charset="-120"/>
               </a:rPr>
-              <a:t>ion</a:t>
+              <a:t>u</a:t>
             </a:r>
             <a:endParaRPr lang="en-US" sz="1300" dirty="0"/>
           </a:p>
@@ -27794,7 +28213,7 @@
         </p:nvSpPr>
         <p:spPr>
           <a:xfrm>
-            <a:off x="5803392" y="2569464"/>
+            <a:off x="4370832" y="2569464"/>
             <a:ext cx="1828800" cy="201168"/>
           </a:xfrm>
           <a:prstGeom prst="rect">
@@ -27819,7 +28238,7 @@
                 <a:ea typeface="Calibri" pitchFamily="34" charset="-122"/>
                 <a:cs typeface="Calibri" pitchFamily="34" charset="-120"/>
               </a:rPr>
-              <a:t>act or process of</a:t>
+              <a:t>connecting vowel</a:t>
             </a:r>
             <a:endParaRPr lang="en-US" sz="850" dirty="0"/>
           </a:p>
@@ -27827,7 +28246,158 @@
       </p:sp>
       <p:sp>
         <p:nvSpPr>
-          <p:cNvPr id="22" name="Shape 20"/>
+          <p:cNvPr id="22" name="Text 20"/>
+          <p:cNvSpPr/>
+          <p:nvPr/>
+        </p:nvSpPr>
+        <p:spPr>
+          <a:xfrm>
+            <a:off x="4370832" y="2752344"/>
+            <a:ext cx="1828800" cy="182880"/>
+          </a:xfrm>
+          <a:prstGeom prst="rect">
+            <a:avLst/>
+          </a:prstGeom>
+          <a:noFill/>
+          <a:ln/>
+        </p:spPr>
+        <p:txBody>
+          <a:bodyPr wrap="square" lIns="0" tIns="0" rIns="0" bIns="0" rtlCol="0" anchor="t"/>
+          <a:lstStyle/>
+          <a:p>
+            <a:pPr algn="ctr" indent="0" marL="0">
+              <a:buNone/>
+            </a:pPr>
+            <a:r>
+              <a:rPr lang="en-US" sz="700" i="1" dirty="0">
+                <a:solidFill>
+                  <a:srgbClr val="94A3B8"/>
+                </a:solidFill>
+                <a:latin typeface="Calibri" pitchFamily="34" charset="0"/>
+                <a:ea typeface="Calibri" pitchFamily="34" charset="-122"/>
+                <a:cs typeface="Calibri" pitchFamily="34" charset="-120"/>
+              </a:rPr>
+              <a:t>links base to suffix</a:t>
+            </a:r>
+            <a:endParaRPr lang="en-US" sz="700" dirty="0"/>
+          </a:p>
+        </p:txBody>
+      </p:sp>
+      <p:sp>
+        <p:nvSpPr>
+          <p:cNvPr id="23" name="Shape 21"/>
+          <p:cNvSpPr/>
+          <p:nvPr/>
+        </p:nvSpPr>
+        <p:spPr>
+          <a:xfrm>
+            <a:off x="6519672" y="2258568"/>
+            <a:ext cx="1828800" cy="292608"/>
+          </a:xfrm>
+          <a:prstGeom prst="rect">
+            <a:avLst>
+              <a:gd name="adj" fmla="val 25000"/>
+            </a:avLst>
+          </a:prstGeom>
+          <a:solidFill>
+            <a:srgbClr val="FCE7F3"/>
+          </a:solidFill>
+          <a:ln w="19050">
+            <a:solidFill>
+              <a:srgbClr val="DB2777"/>
+            </a:solidFill>
+            <a:prstDash val="solid"/>
+          </a:ln>
+          <a:effectLst>
+            <a:outerShdw sx="100000" sy="100000" kx="0" ky="0" algn="bl" rotWithShape="0" blurRad="101600" dist="38100" dir="8100000">
+              <a:srgbClr val="000000">
+                <a:alpha val="12000"/>
+              </a:srgbClr>
+            </a:outerShdw>
+          </a:effectLst>
+        </p:spPr>
+      </p:sp>
+      <p:sp>
+        <p:nvSpPr>
+          <p:cNvPr id="24" name="Text 22"/>
+          <p:cNvSpPr/>
+          <p:nvPr/>
+        </p:nvSpPr>
+        <p:spPr>
+          <a:xfrm>
+            <a:off x="6519672" y="2258568"/>
+            <a:ext cx="1828800" cy="292608"/>
+          </a:xfrm>
+          <a:prstGeom prst="rect">
+            <a:avLst/>
+          </a:prstGeom>
+          <a:noFill/>
+          <a:ln/>
+        </p:spPr>
+        <p:txBody>
+          <a:bodyPr wrap="square" lIns="0" tIns="0" rIns="0" bIns="0" rtlCol="0" anchor="ctr"/>
+          <a:lstStyle/>
+          <a:p>
+            <a:pPr algn="ctr" indent="0" marL="0">
+              <a:buNone/>
+            </a:pPr>
+            <a:r>
+              <a:rPr lang="en-US" sz="1300" b="1" dirty="0">
+                <a:solidFill>
+                  <a:srgbClr val="9D174D"/>
+                </a:solidFill>
+                <a:latin typeface="Trebuchet MS" pitchFamily="34" charset="0"/>
+                <a:ea typeface="Trebuchet MS" pitchFamily="34" charset="-122"/>
+                <a:cs typeface="Trebuchet MS" pitchFamily="34" charset="-120"/>
+              </a:rPr>
+              <a:t>al</a:t>
+            </a:r>
+            <a:endParaRPr lang="en-US" sz="1300" dirty="0"/>
+          </a:p>
+        </p:txBody>
+      </p:sp>
+      <p:sp>
+        <p:nvSpPr>
+          <p:cNvPr id="25" name="Text 23"/>
+          <p:cNvSpPr/>
+          <p:nvPr/>
+        </p:nvSpPr>
+        <p:spPr>
+          <a:xfrm>
+            <a:off x="6519672" y="2569464"/>
+            <a:ext cx="1828800" cy="201168"/>
+          </a:xfrm>
+          <a:prstGeom prst="rect">
+            <a:avLst/>
+          </a:prstGeom>
+          <a:noFill/>
+          <a:ln/>
+        </p:spPr>
+        <p:txBody>
+          <a:bodyPr wrap="square" lIns="0" tIns="0" rIns="0" bIns="0" rtlCol="0" anchor="t"/>
+          <a:lstStyle/>
+          <a:p>
+            <a:pPr algn="ctr" indent="0" marL="0">
+              <a:buNone/>
+            </a:pPr>
+            <a:r>
+              <a:rPr lang="en-US" sz="850" dirty="0">
+                <a:solidFill>
+                  <a:srgbClr val="475569"/>
+                </a:solidFill>
+                <a:latin typeface="Calibri" pitchFamily="34" charset="0"/>
+                <a:ea typeface="Calibri" pitchFamily="34" charset="-122"/>
+                <a:cs typeface="Calibri" pitchFamily="34" charset="-120"/>
+              </a:rPr>
+              <a:t>relating to</a:t>
+            </a:r>
+            <a:endParaRPr lang="en-US" sz="850" dirty="0"/>
+          </a:p>
+        </p:txBody>
+      </p:sp>
+      <p:sp>
+        <p:nvSpPr>
+          <p:cNvPr id="26" name="Shape 24"/>
           <p:cNvSpPr/>
           <p:nvPr/>
         </p:nvSpPr>
@@ -27854,7 +28424,7 @@
       </p:sp>
       <p:sp>
         <p:nvSpPr>
-          <p:cNvPr id="23" name="Text 21"/>
+          <p:cNvPr id="27" name="Text 25"/>
           <p:cNvSpPr/>
           <p:nvPr/>
         </p:nvSpPr>
@@ -27893,7 +28463,7 @@
       </p:sp>
       <p:sp>
         <p:nvSpPr>
-          <p:cNvPr id="24" name="Shape 22"/>
+          <p:cNvPr id="28" name="Shape 26"/>
           <p:cNvSpPr/>
           <p:nvPr/>
         </p:nvSpPr>
@@ -27920,13 +28490,13 @@
       </p:sp>
       <p:sp>
         <p:nvSpPr>
-          <p:cNvPr id="25" name="Shape 23"/>
-          <p:cNvSpPr/>
-          <p:nvPr/>
-        </p:nvSpPr>
-        <p:spPr>
-          <a:xfrm>
-            <a:off x="2999232" y="3364992"/>
+          <p:cNvPr id="29" name="Shape 27"/>
+          <p:cNvSpPr/>
+          <p:nvPr/>
+        </p:nvSpPr>
+        <p:spPr>
+          <a:xfrm>
+            <a:off x="2313432" y="3364992"/>
             <a:ext cx="1645920" cy="475488"/>
           </a:xfrm>
           <a:prstGeom prst="rect">
@@ -27947,13 +28517,13 @@
       </p:sp>
       <p:sp>
         <p:nvSpPr>
-          <p:cNvPr id="26" name="Text 24"/>
-          <p:cNvSpPr/>
-          <p:nvPr/>
-        </p:nvSpPr>
-        <p:spPr>
-          <a:xfrm>
-            <a:off x="2999232" y="3364992"/>
+          <p:cNvPr id="30" name="Text 28"/>
+          <p:cNvSpPr/>
+          <p:nvPr/>
+        </p:nvSpPr>
+        <p:spPr>
+          <a:xfrm>
+            <a:off x="2313432" y="3364992"/>
             <a:ext cx="1645920" cy="475488"/>
           </a:xfrm>
           <a:prstGeom prst="rect">
@@ -27986,14 +28556,14 @@
       </p:sp>
       <p:sp>
         <p:nvSpPr>
-          <p:cNvPr id="27" name="Text 25"/>
-          <p:cNvSpPr/>
-          <p:nvPr/>
-        </p:nvSpPr>
-        <p:spPr>
-          <a:xfrm>
-            <a:off x="4645152" y="3364992"/>
-            <a:ext cx="1097280" cy="475488"/>
+          <p:cNvPr id="31" name="Text 29"/>
+          <p:cNvSpPr/>
+          <p:nvPr/>
+        </p:nvSpPr>
+        <p:spPr>
+          <a:xfrm>
+            <a:off x="3959352" y="3364992"/>
+            <a:ext cx="411480" cy="475488"/>
           </a:xfrm>
           <a:prstGeom prst="rect">
             <a:avLst/>
@@ -28025,13 +28595,13 @@
       </p:sp>
       <p:sp>
         <p:nvSpPr>
-          <p:cNvPr id="28" name="Shape 26"/>
-          <p:cNvSpPr/>
-          <p:nvPr/>
-        </p:nvSpPr>
-        <p:spPr>
-          <a:xfrm>
-            <a:off x="5742432" y="3364992"/>
+          <p:cNvPr id="32" name="Shape 30"/>
+          <p:cNvSpPr/>
+          <p:nvPr/>
+        </p:nvSpPr>
+        <p:spPr>
+          <a:xfrm>
+            <a:off x="4370832" y="3364992"/>
             <a:ext cx="1645920" cy="475488"/>
           </a:xfrm>
           <a:prstGeom prst="rect">
@@ -28052,13 +28622,13 @@
       </p:sp>
       <p:sp>
         <p:nvSpPr>
-          <p:cNvPr id="29" name="Text 27"/>
-          <p:cNvSpPr/>
-          <p:nvPr/>
-        </p:nvSpPr>
-        <p:spPr>
-          <a:xfrm>
-            <a:off x="5742432" y="3364992"/>
+          <p:cNvPr id="33" name="Text 31"/>
+          <p:cNvSpPr/>
+          <p:nvPr/>
+        </p:nvSpPr>
+        <p:spPr>
+          <a:xfrm>
+            <a:off x="4370832" y="3364992"/>
             <a:ext cx="1645920" cy="475488"/>
           </a:xfrm>
           <a:prstGeom prst="rect">
@@ -28083,7 +28653,7 @@
                 <a:ea typeface="Trebuchet MS" pitchFamily="34" charset="-122"/>
                 <a:cs typeface="Trebuchet MS" pitchFamily="34" charset="-120"/>
               </a:rPr>
-              <a:t>sion</a:t>
+              <a:t>su</a:t>
             </a:r>
             <a:endParaRPr lang="en-US" sz="1400" dirty="0"/>
           </a:p>
@@ -28091,7 +28661,112 @@
       </p:sp>
       <p:sp>
         <p:nvSpPr>
-          <p:cNvPr id="30" name="Shape 28"/>
+          <p:cNvPr id="34" name="Text 32"/>
+          <p:cNvSpPr/>
+          <p:nvPr/>
+        </p:nvSpPr>
+        <p:spPr>
+          <a:xfrm>
+            <a:off x="6016752" y="3364992"/>
+            <a:ext cx="411480" cy="475488"/>
+          </a:xfrm>
+          <a:prstGeom prst="rect">
+            <a:avLst/>
+          </a:prstGeom>
+          <a:noFill/>
+          <a:ln/>
+        </p:spPr>
+        <p:txBody>
+          <a:bodyPr wrap="square" lIns="0" tIns="0" rIns="0" bIns="0" rtlCol="0" anchor="ctr"/>
+          <a:lstStyle/>
+          <a:p>
+            <a:pPr algn="ctr" indent="0" marL="0">
+              <a:buNone/>
+            </a:pPr>
+            <a:r>
+              <a:rPr lang="en-US" sz="1600" b="1" dirty="0">
+                <a:solidFill>
+                  <a:srgbClr val="0D9488"/>
+                </a:solidFill>
+                <a:latin typeface="Trebuchet MS" pitchFamily="34" charset="0"/>
+                <a:ea typeface="Trebuchet MS" pitchFamily="34" charset="-122"/>
+                <a:cs typeface="Trebuchet MS" pitchFamily="34" charset="-120"/>
+              </a:rPr>
+              <a:t>·</a:t>
+            </a:r>
+            <a:endParaRPr lang="en-US" sz="1600" dirty="0"/>
+          </a:p>
+        </p:txBody>
+      </p:sp>
+      <p:sp>
+        <p:nvSpPr>
+          <p:cNvPr id="35" name="Shape 33"/>
+          <p:cNvSpPr/>
+          <p:nvPr/>
+        </p:nvSpPr>
+        <p:spPr>
+          <a:xfrm>
+            <a:off x="6428232" y="3364992"/>
+            <a:ext cx="1645920" cy="475488"/>
+          </a:xfrm>
+          <a:prstGeom prst="rect">
+            <a:avLst>
+              <a:gd name="adj" fmla="val 9615"/>
+            </a:avLst>
+          </a:prstGeom>
+          <a:solidFill>
+            <a:srgbClr val="FFFFFF"/>
+          </a:solidFill>
+          <a:ln w="12700">
+            <a:solidFill>
+              <a:srgbClr val="0D9488"/>
+            </a:solidFill>
+            <a:prstDash val="solid"/>
+          </a:ln>
+        </p:spPr>
+      </p:sp>
+      <p:sp>
+        <p:nvSpPr>
+          <p:cNvPr id="36" name="Text 34"/>
+          <p:cNvSpPr/>
+          <p:nvPr/>
+        </p:nvSpPr>
+        <p:spPr>
+          <a:xfrm>
+            <a:off x="6428232" y="3364992"/>
+            <a:ext cx="1645920" cy="475488"/>
+          </a:xfrm>
+          <a:prstGeom prst="rect">
+            <a:avLst/>
+          </a:prstGeom>
+          <a:noFill/>
+          <a:ln/>
+        </p:spPr>
+        <p:txBody>
+          <a:bodyPr wrap="square" lIns="0" tIns="0" rIns="0" bIns="0" rtlCol="0" anchor="ctr"/>
+          <a:lstStyle/>
+          <a:p>
+            <a:pPr algn="ctr" indent="0" marL="0">
+              <a:buNone/>
+            </a:pPr>
+            <a:r>
+              <a:rPr lang="en-US" sz="1400" b="1" dirty="0">
+                <a:solidFill>
+                  <a:srgbClr val="0D9488"/>
+                </a:solidFill>
+                <a:latin typeface="Trebuchet MS" pitchFamily="34" charset="0"/>
+                <a:ea typeface="Trebuchet MS" pitchFamily="34" charset="-122"/>
+                <a:cs typeface="Trebuchet MS" pitchFamily="34" charset="-120"/>
+              </a:rPr>
+              <a:t>al</a:t>
+            </a:r>
+            <a:endParaRPr lang="en-US" sz="1400" dirty="0"/>
+          </a:p>
+        </p:txBody>
+      </p:sp>
+      <p:sp>
+        <p:nvSpPr>
+          <p:cNvPr id="37" name="Shape 35"/>
           <p:cNvSpPr/>
           <p:nvPr/>
         </p:nvSpPr>
@@ -28118,7 +28793,7 @@
       </p:sp>
       <p:sp>
         <p:nvSpPr>
-          <p:cNvPr id="31" name="Text 29"/>
+          <p:cNvPr id="38" name="Text 36"/>
           <p:cNvSpPr/>
           <p:nvPr/>
         </p:nvSpPr>
@@ -28157,7 +28832,7 @@
       </p:sp>
       <p:sp>
         <p:nvSpPr>
-          <p:cNvPr id="32" name="Shape 30"/>
+          <p:cNvPr id="39" name="Shape 37"/>
           <p:cNvSpPr/>
           <p:nvPr/>
         </p:nvSpPr>
@@ -28184,13 +28859,13 @@
       </p:sp>
       <p:sp>
         <p:nvSpPr>
-          <p:cNvPr id="33" name="Shape 31"/>
-          <p:cNvSpPr/>
-          <p:nvPr/>
-        </p:nvSpPr>
-        <p:spPr>
-          <a:xfrm>
-            <a:off x="2670048" y="4169664"/>
+          <p:cNvPr id="40" name="Shape 38"/>
+          <p:cNvSpPr/>
+          <p:nvPr/>
+        </p:nvSpPr>
+        <p:spPr>
+          <a:xfrm>
+            <a:off x="2427732" y="4169664"/>
             <a:ext cx="685800" cy="384048"/>
           </a:xfrm>
           <a:prstGeom prst="rect">
@@ -28211,13 +28886,13 @@
       </p:sp>
       <p:sp>
         <p:nvSpPr>
-          <p:cNvPr id="34" name="Text 32"/>
-          <p:cNvSpPr/>
-          <p:nvPr/>
-        </p:nvSpPr>
-        <p:spPr>
-          <a:xfrm>
-            <a:off x="2670048" y="4169664"/>
+          <p:cNvPr id="41" name="Text 39"/>
+          <p:cNvSpPr/>
+          <p:nvPr/>
+        </p:nvSpPr>
+        <p:spPr>
+          <a:xfrm>
+            <a:off x="2427732" y="4169664"/>
             <a:ext cx="685800" cy="384048"/>
           </a:xfrm>
           <a:prstGeom prst="rect">
@@ -28250,13 +28925,13 @@
       </p:sp>
       <p:sp>
         <p:nvSpPr>
-          <p:cNvPr id="35" name="Shape 33"/>
-          <p:cNvSpPr/>
-          <p:nvPr/>
-        </p:nvSpPr>
-        <p:spPr>
-          <a:xfrm>
-            <a:off x="4123944" y="4169664"/>
+          <p:cNvPr id="42" name="Shape 40"/>
+          <p:cNvSpPr/>
+          <p:nvPr/>
+        </p:nvSpPr>
+        <p:spPr>
+          <a:xfrm>
+            <a:off x="3639312" y="4169664"/>
             <a:ext cx="685800" cy="384048"/>
           </a:xfrm>
           <a:prstGeom prst="rect">
@@ -28277,13 +28952,13 @@
       </p:sp>
       <p:sp>
         <p:nvSpPr>
-          <p:cNvPr id="36" name="Text 34"/>
-          <p:cNvSpPr/>
-          <p:nvPr/>
-        </p:nvSpPr>
-        <p:spPr>
-          <a:xfrm>
-            <a:off x="4123944" y="4169664"/>
+          <p:cNvPr id="43" name="Text 41"/>
+          <p:cNvSpPr/>
+          <p:nvPr/>
+        </p:nvSpPr>
+        <p:spPr>
+          <a:xfrm>
+            <a:off x="3639312" y="4169664"/>
             <a:ext cx="685800" cy="384048"/>
           </a:xfrm>
           <a:prstGeom prst="rect">
@@ -28316,13 +28991,13 @@
       </p:sp>
       <p:sp>
         <p:nvSpPr>
-          <p:cNvPr id="37" name="Shape 35"/>
-          <p:cNvSpPr/>
-          <p:nvPr/>
-        </p:nvSpPr>
-        <p:spPr>
-          <a:xfrm>
-            <a:off x="5577840" y="4169664"/>
+          <p:cNvPr id="44" name="Shape 42"/>
+          <p:cNvSpPr/>
+          <p:nvPr/>
+        </p:nvSpPr>
+        <p:spPr>
+          <a:xfrm>
+            <a:off x="4850892" y="4169664"/>
             <a:ext cx="685800" cy="384048"/>
           </a:xfrm>
           <a:prstGeom prst="rect">
@@ -28343,13 +29018,13 @@
       </p:sp>
       <p:sp>
         <p:nvSpPr>
-          <p:cNvPr id="38" name="Text 36"/>
-          <p:cNvSpPr/>
-          <p:nvPr/>
-        </p:nvSpPr>
-        <p:spPr>
-          <a:xfrm>
-            <a:off x="5577840" y="4169664"/>
+          <p:cNvPr id="45" name="Text 43"/>
+          <p:cNvSpPr/>
+          <p:nvPr/>
+        </p:nvSpPr>
+        <p:spPr>
+          <a:xfrm>
+            <a:off x="4850892" y="4169664"/>
             <a:ext cx="685800" cy="384048"/>
           </a:xfrm>
           <a:prstGeom prst="rect">
@@ -28374,7 +29049,7 @@
                 <a:ea typeface="Trebuchet MS" pitchFamily="34" charset="-122"/>
                 <a:cs typeface="Trebuchet MS" pitchFamily="34" charset="-120"/>
               </a:rPr>
-              <a:t>si</a:t>
+              <a:t>zh</a:t>
             </a:r>
             <a:endParaRPr lang="en-US" sz="900" dirty="0"/>
           </a:p>
@@ -28382,13 +29057,13 @@
       </p:sp>
       <p:sp>
         <p:nvSpPr>
-          <p:cNvPr id="39" name="Text 37"/>
-          <p:cNvSpPr/>
-          <p:nvPr/>
-        </p:nvSpPr>
-        <p:spPr>
-          <a:xfrm>
-            <a:off x="5577840" y="4572000"/>
+          <p:cNvPr id="46" name="Text 44"/>
+          <p:cNvSpPr/>
+          <p:nvPr/>
+        </p:nvSpPr>
+        <p:spPr>
+          <a:xfrm>
+            <a:off x="4850892" y="4572000"/>
             <a:ext cx="685800" cy="219456"/>
           </a:xfrm>
           <a:prstGeom prst="rect">
@@ -28421,13 +29096,13 @@
       </p:sp>
       <p:sp>
         <p:nvSpPr>
-          <p:cNvPr id="40" name="Shape 38"/>
-          <p:cNvSpPr/>
-          <p:nvPr/>
-        </p:nvSpPr>
-        <p:spPr>
-          <a:xfrm>
-            <a:off x="7031736" y="4169664"/>
+          <p:cNvPr id="47" name="Shape 45"/>
+          <p:cNvSpPr/>
+          <p:nvPr/>
+        </p:nvSpPr>
+        <p:spPr>
+          <a:xfrm>
+            <a:off x="6062472" y="4169664"/>
             <a:ext cx="685800" cy="384048"/>
           </a:xfrm>
           <a:prstGeom prst="rect">
@@ -28448,13 +29123,13 @@
       </p:sp>
       <p:sp>
         <p:nvSpPr>
-          <p:cNvPr id="41" name="Text 39"/>
-          <p:cNvSpPr/>
-          <p:nvPr/>
-        </p:nvSpPr>
-        <p:spPr>
-          <a:xfrm>
-            <a:off x="7031736" y="4169664"/>
+          <p:cNvPr id="48" name="Text 46"/>
+          <p:cNvSpPr/>
+          <p:nvPr/>
+        </p:nvSpPr>
+        <p:spPr>
+          <a:xfrm>
+            <a:off x="6062472" y="4169664"/>
             <a:ext cx="685800" cy="384048"/>
           </a:xfrm>
           <a:prstGeom prst="rect">
@@ -28479,7 +29154,73 @@
                 <a:ea typeface="Trebuchet MS" pitchFamily="34" charset="-122"/>
                 <a:cs typeface="Trebuchet MS" pitchFamily="34" charset="-120"/>
               </a:rPr>
-              <a:t>on</a:t>
+              <a:t>u</a:t>
+            </a:r>
+            <a:endParaRPr lang="en-US" sz="900" dirty="0"/>
+          </a:p>
+        </p:txBody>
+      </p:sp>
+      <p:sp>
+        <p:nvSpPr>
+          <p:cNvPr id="49" name="Shape 47"/>
+          <p:cNvSpPr/>
+          <p:nvPr/>
+        </p:nvSpPr>
+        <p:spPr>
+          <a:xfrm>
+            <a:off x="7274052" y="4169664"/>
+            <a:ext cx="685800" cy="384048"/>
+          </a:xfrm>
+          <a:prstGeom prst="rect">
+            <a:avLst>
+              <a:gd name="adj" fmla="val 9524"/>
+            </a:avLst>
+          </a:prstGeom>
+          <a:solidFill>
+            <a:srgbClr val="FFFFFF"/>
+          </a:solidFill>
+          <a:ln w="12700">
+            <a:solidFill>
+              <a:srgbClr val="DB2777"/>
+            </a:solidFill>
+            <a:prstDash val="solid"/>
+          </a:ln>
+        </p:spPr>
+      </p:sp>
+      <p:sp>
+        <p:nvSpPr>
+          <p:cNvPr id="50" name="Text 48"/>
+          <p:cNvSpPr/>
+          <p:nvPr/>
+        </p:nvSpPr>
+        <p:spPr>
+          <a:xfrm>
+            <a:off x="7274052" y="4169664"/>
+            <a:ext cx="685800" cy="384048"/>
+          </a:xfrm>
+          <a:prstGeom prst="rect">
+            <a:avLst/>
+          </a:prstGeom>
+          <a:noFill/>
+          <a:ln/>
+        </p:spPr>
+        <p:txBody>
+          <a:bodyPr wrap="square" lIns="0" tIns="0" rIns="0" bIns="0" rtlCol="0" anchor="ctr"/>
+          <a:lstStyle/>
+          <a:p>
+            <a:pPr algn="ctr" indent="0" marL="0">
+              <a:buNone/>
+            </a:pPr>
+            <a:r>
+              <a:rPr lang="en-US" sz="900" b="1" dirty="0">
+                <a:solidFill>
+                  <a:srgbClr val="9D174D"/>
+                </a:solidFill>
+                <a:latin typeface="Trebuchet MS" pitchFamily="34" charset="0"/>
+                <a:ea typeface="Trebuchet MS" pitchFamily="34" charset="-122"/>
+                <a:cs typeface="Trebuchet MS" pitchFamily="34" charset="-120"/>
+              </a:rPr>
+              <a:t>al</a:t>
             </a:r>
             <a:endParaRPr lang="en-US" sz="900" dirty="0"/>
           </a:p>
@@ -28910,7 +29651,7 @@
                 <a:ea typeface="Trebuchet MS" pitchFamily="34" charset="-122"/>
                 <a:cs typeface="Trebuchet MS" pitchFamily="34" charset="-120"/>
               </a:rPr>
-              <a:t>visited</a:t>
+              <a:t>television</a:t>
             </a:r>
             <a:endParaRPr lang="en-US" sz="2800" dirty="0"/>
           </a:p>
@@ -29737,7 +30478,7 @@
                 <a:ea typeface="Trebuchet MS" pitchFamily="34" charset="-122"/>
                 <a:cs typeface="Trebuchet MS" pitchFamily="34" charset="-120"/>
               </a:rPr>
-              <a:t>visited</a:t>
+              <a:t>television</a:t>
             </a:r>
             <a:endParaRPr lang="en-US" sz="2800" dirty="0"/>
           </a:p>
@@ -29826,11 +30567,11 @@
             </a:avLst>
           </a:prstGeom>
           <a:solidFill>
-            <a:srgbClr val="CCFBF1"/>
+            <a:srgbClr val="DDD6FE"/>
           </a:solidFill>
           <a:ln w="19050">
             <a:solidFill>
-              <a:srgbClr val="0D9488"/>
+              <a:srgbClr val="7C3AED"/>
             </a:solidFill>
             <a:prstDash val="solid"/>
           </a:ln>
@@ -29870,13 +30611,13 @@
             <a:r>
               <a:rPr lang="en-US" sz="1300" b="1" dirty="0">
                 <a:solidFill>
-                  <a:srgbClr val="0F766E"/>
+                  <a:srgbClr val="4C1D95"/>
                 </a:solidFill>
                 <a:latin typeface="Trebuchet MS" pitchFamily="34" charset="0"/>
                 <a:ea typeface="Trebuchet MS" pitchFamily="34" charset="-122"/>
                 <a:cs typeface="Trebuchet MS" pitchFamily="34" charset="-120"/>
               </a:rPr>
-              <a:t>vis</a:t>
+              <a:t>tele</a:t>
             </a:r>
             <a:endParaRPr lang="en-US" sz="1300" dirty="0"/>
           </a:p>
@@ -29915,7 +30656,7 @@
                 <a:ea typeface="Calibri" pitchFamily="34" charset="-122"/>
                 <a:cs typeface="Calibri" pitchFamily="34" charset="-120"/>
               </a:rPr>
-              <a:t>to see</a:t>
+              <a:t>far away</a:t>
             </a:r>
             <a:endParaRPr lang="en-US" sz="850" dirty="0"/>
           </a:p>
@@ -29938,11 +30679,11 @@
             </a:avLst>
           </a:prstGeom>
           <a:solidFill>
-            <a:srgbClr val="FCE7F3"/>
+            <a:srgbClr val="CCFBF1"/>
           </a:solidFill>
           <a:ln w="19050">
             <a:solidFill>
-              <a:srgbClr val="DB2777"/>
+              <a:srgbClr val="0D9488"/>
             </a:solidFill>
             <a:prstDash val="solid"/>
           </a:ln>
@@ -29982,13 +30723,13 @@
             <a:r>
               <a:rPr lang="en-US" sz="1300" b="1" dirty="0">
                 <a:solidFill>
-                  <a:srgbClr val="9D174D"/>
+                  <a:srgbClr val="0F766E"/>
                 </a:solidFill>
                 <a:latin typeface="Trebuchet MS" pitchFamily="34" charset="0"/>
                 <a:ea typeface="Trebuchet MS" pitchFamily="34" charset="-122"/>
                 <a:cs typeface="Trebuchet MS" pitchFamily="34" charset="-120"/>
               </a:rPr>
-              <a:t>it</a:t>
+              <a:t>vis</a:t>
             </a:r>
             <a:endParaRPr lang="en-US" sz="1300" dirty="0"/>
           </a:p>
@@ -30027,7 +30768,7 @@
                 <a:ea typeface="Calibri" pitchFamily="34" charset="-122"/>
                 <a:cs typeface="Calibri" pitchFamily="34" charset="-120"/>
               </a:rPr>
-              <a:t>action</a:t>
+              <a:t>to see</a:t>
             </a:r>
             <a:endParaRPr lang="en-US" sz="850" dirty="0"/>
           </a:p>
@@ -30100,7 +30841,7 @@
                 <a:ea typeface="Trebuchet MS" pitchFamily="34" charset="-122"/>
                 <a:cs typeface="Trebuchet MS" pitchFamily="34" charset="-120"/>
               </a:rPr>
-              <a:t>ed</a:t>
+              <a:t>ion</a:t>
             </a:r>
             <a:endParaRPr lang="en-US" sz="1300" dirty="0"/>
           </a:p>
@@ -30139,7 +30880,7 @@
                 <a:ea typeface="Calibri" pitchFamily="34" charset="-122"/>
                 <a:cs typeface="Calibri" pitchFamily="34" charset="-120"/>
               </a:rPr>
-              <a:t>past tense</a:t>
+              <a:t>act or process of</a:t>
             </a:r>
             <a:endParaRPr lang="en-US" sz="850" dirty="0"/>
           </a:p>
@@ -30834,7 +31575,7 @@
                 <a:ea typeface="Trebuchet MS" pitchFamily="34" charset="-122"/>
                 <a:cs typeface="Trebuchet MS" pitchFamily="34" charset="-120"/>
               </a:rPr>
-              <a:t>visited</a:t>
+              <a:t>television</a:t>
             </a:r>
             <a:endParaRPr lang="en-US" sz="2800" dirty="0"/>
           </a:p>
@@ -30923,11 +31664,11 @@
             </a:avLst>
           </a:prstGeom>
           <a:solidFill>
-            <a:srgbClr val="CCFBF1"/>
+            <a:srgbClr val="DDD6FE"/>
           </a:solidFill>
           <a:ln w="19050">
             <a:solidFill>
-              <a:srgbClr val="0D9488"/>
+              <a:srgbClr val="7C3AED"/>
             </a:solidFill>
             <a:prstDash val="solid"/>
           </a:ln>
@@ -30967,13 +31708,13 @@
             <a:r>
               <a:rPr lang="en-US" sz="1300" b="1" dirty="0">
                 <a:solidFill>
-                  <a:srgbClr val="0F766E"/>
+                  <a:srgbClr val="4C1D95"/>
                 </a:solidFill>
                 <a:latin typeface="Trebuchet MS" pitchFamily="34" charset="0"/>
                 <a:ea typeface="Trebuchet MS" pitchFamily="34" charset="-122"/>
                 <a:cs typeface="Trebuchet MS" pitchFamily="34" charset="-120"/>
               </a:rPr>
-              <a:t>vis</a:t>
+              <a:t>tele</a:t>
             </a:r>
             <a:endParaRPr lang="en-US" sz="1300" dirty="0"/>
           </a:p>
@@ -31012,7 +31753,7 @@
                 <a:ea typeface="Calibri" pitchFamily="34" charset="-122"/>
                 <a:cs typeface="Calibri" pitchFamily="34" charset="-120"/>
               </a:rPr>
-              <a:t>to see</a:t>
+              <a:t>far away</a:t>
             </a:r>
             <a:endParaRPr lang="en-US" sz="850" dirty="0"/>
           </a:p>
@@ -31035,11 +31776,11 @@
             </a:avLst>
           </a:prstGeom>
           <a:solidFill>
-            <a:srgbClr val="FCE7F3"/>
+            <a:srgbClr val="CCFBF1"/>
           </a:solidFill>
           <a:ln w="19050">
             <a:solidFill>
-              <a:srgbClr val="DB2777"/>
+              <a:srgbClr val="0D9488"/>
             </a:solidFill>
             <a:prstDash val="solid"/>
           </a:ln>
@@ -31079,13 +31820,13 @@
             <a:r>
               <a:rPr lang="en-US" sz="1300" b="1" dirty="0">
                 <a:solidFill>
-                  <a:srgbClr val="9D174D"/>
+                  <a:srgbClr val="0F766E"/>
                 </a:solidFill>
                 <a:latin typeface="Trebuchet MS" pitchFamily="34" charset="0"/>
                 <a:ea typeface="Trebuchet MS" pitchFamily="34" charset="-122"/>
                 <a:cs typeface="Trebuchet MS" pitchFamily="34" charset="-120"/>
               </a:rPr>
-              <a:t>it</a:t>
+              <a:t>vis</a:t>
             </a:r>
             <a:endParaRPr lang="en-US" sz="1300" dirty="0"/>
           </a:p>
@@ -31124,7 +31865,7 @@
                 <a:ea typeface="Calibri" pitchFamily="34" charset="-122"/>
                 <a:cs typeface="Calibri" pitchFamily="34" charset="-120"/>
               </a:rPr>
-              <a:t>action</a:t>
+              <a:t>to see</a:t>
             </a:r>
             <a:endParaRPr lang="en-US" sz="850" dirty="0"/>
           </a:p>
@@ -31197,7 +31938,7 @@
                 <a:ea typeface="Trebuchet MS" pitchFamily="34" charset="-122"/>
                 <a:cs typeface="Trebuchet MS" pitchFamily="34" charset="-120"/>
               </a:rPr>
-              <a:t>ed</a:t>
+              <a:t>ion</a:t>
             </a:r>
             <a:endParaRPr lang="en-US" sz="1300" dirty="0"/>
           </a:p>
@@ -31236,7 +31977,7 @@
                 <a:ea typeface="Calibri" pitchFamily="34" charset="-122"/>
                 <a:cs typeface="Calibri" pitchFamily="34" charset="-120"/>
               </a:rPr>
-              <a:t>past tense</a:t>
+              <a:t>act or process of</a:t>
             </a:r>
             <a:endParaRPr lang="en-US" sz="850" dirty="0"/>
           </a:p>
@@ -31343,8 +32084,8 @@
         </p:nvSpPr>
         <p:spPr>
           <a:xfrm>
-            <a:off x="2313432" y="3364992"/>
-            <a:ext cx="1645920" cy="475488"/>
+            <a:off x="1975104" y="3364992"/>
+            <a:ext cx="1554480" cy="475488"/>
           </a:xfrm>
           <a:prstGeom prst="rect">
             <a:avLst>
@@ -31370,8 +32111,8 @@
         </p:nvSpPr>
         <p:spPr>
           <a:xfrm>
-            <a:off x="2313432" y="3364992"/>
-            <a:ext cx="1645920" cy="475488"/>
+            <a:off x="1975104" y="3364992"/>
+            <a:ext cx="1554480" cy="475488"/>
           </a:xfrm>
           <a:prstGeom prst="rect">
             <a:avLst/>
@@ -31395,7 +32136,7 @@
                 <a:ea typeface="Trebuchet MS" pitchFamily="34" charset="-122"/>
                 <a:cs typeface="Trebuchet MS" pitchFamily="34" charset="-120"/>
               </a:rPr>
-              <a:t>vis</a:t>
+              <a:t>te</a:t>
             </a:r>
             <a:endParaRPr lang="en-US" sz="1400" dirty="0"/>
           </a:p>
@@ -31409,8 +32150,8 @@
         </p:nvSpPr>
         <p:spPr>
           <a:xfrm>
-            <a:off x="3959352" y="3364992"/>
-            <a:ext cx="411480" cy="475488"/>
+            <a:off x="3529584" y="3364992"/>
+            <a:ext cx="73152" cy="475488"/>
           </a:xfrm>
           <a:prstGeom prst="rect">
             <a:avLst/>
@@ -31448,8 +32189,8 @@
         </p:nvSpPr>
         <p:spPr>
           <a:xfrm>
-            <a:off x="4370832" y="3364992"/>
-            <a:ext cx="1645920" cy="475488"/>
+            <a:off x="3602736" y="3364992"/>
+            <a:ext cx="1554480" cy="475488"/>
           </a:xfrm>
           <a:prstGeom prst="rect">
             <a:avLst>
@@ -31475,8 +32216,8 @@
         </p:nvSpPr>
         <p:spPr>
           <a:xfrm>
-            <a:off x="4370832" y="3364992"/>
-            <a:ext cx="1645920" cy="475488"/>
+            <a:off x="3602736" y="3364992"/>
+            <a:ext cx="1554480" cy="475488"/>
           </a:xfrm>
           <a:prstGeom prst="rect">
             <a:avLst/>
@@ -31500,7 +32241,7 @@
                 <a:ea typeface="Trebuchet MS" pitchFamily="34" charset="-122"/>
                 <a:cs typeface="Trebuchet MS" pitchFamily="34" charset="-120"/>
               </a:rPr>
-              <a:t>it</a:t>
+              <a:t>le</a:t>
             </a:r>
             <a:endParaRPr lang="en-US" sz="1400" dirty="0"/>
           </a:p>
@@ -31514,8 +32255,8 @@
         </p:nvSpPr>
         <p:spPr>
           <a:xfrm>
-            <a:off x="6016752" y="3364992"/>
-            <a:ext cx="411480" cy="475488"/>
+            <a:off x="5157216" y="3364992"/>
+            <a:ext cx="73152" cy="475488"/>
           </a:xfrm>
           <a:prstGeom prst="rect">
             <a:avLst/>
@@ -31553,8 +32294,8 @@
         </p:nvSpPr>
         <p:spPr>
           <a:xfrm>
-            <a:off x="6428232" y="3364992"/>
-            <a:ext cx="1645920" cy="475488"/>
+            <a:off x="5230368" y="3364992"/>
+            <a:ext cx="1554480" cy="475488"/>
           </a:xfrm>
           <a:prstGeom prst="rect">
             <a:avLst>
@@ -31580,8 +32321,8 @@
         </p:nvSpPr>
         <p:spPr>
           <a:xfrm>
-            <a:off x="6428232" y="3364992"/>
-            <a:ext cx="1645920" cy="475488"/>
+            <a:off x="5230368" y="3364992"/>
+            <a:ext cx="1554480" cy="475488"/>
           </a:xfrm>
           <a:prstGeom prst="rect">
             <a:avLst/>
@@ -31605,7 +32346,7 @@
                 <a:ea typeface="Trebuchet MS" pitchFamily="34" charset="-122"/>
                 <a:cs typeface="Trebuchet MS" pitchFamily="34" charset="-120"/>
               </a:rPr>
-              <a:t>ed</a:t>
+              <a:t>vi</a:t>
             </a:r>
             <a:endParaRPr lang="en-US" sz="1400" dirty="0"/>
           </a:p>
@@ -31613,7 +32354,112 @@
       </p:sp>
       <p:sp>
         <p:nvSpPr>
-          <p:cNvPr id="36" name="Shape 34"/>
+          <p:cNvPr id="36" name="Text 34"/>
+          <p:cNvSpPr/>
+          <p:nvPr/>
+        </p:nvSpPr>
+        <p:spPr>
+          <a:xfrm>
+            <a:off x="6784848" y="3364992"/>
+            <a:ext cx="73152" cy="475488"/>
+          </a:xfrm>
+          <a:prstGeom prst="rect">
+            <a:avLst/>
+          </a:prstGeom>
+          <a:noFill/>
+          <a:ln/>
+        </p:spPr>
+        <p:txBody>
+          <a:bodyPr wrap="square" lIns="0" tIns="0" rIns="0" bIns="0" rtlCol="0" anchor="ctr"/>
+          <a:lstStyle/>
+          <a:p>
+            <a:pPr algn="ctr" indent="0" marL="0">
+              <a:buNone/>
+            </a:pPr>
+            <a:r>
+              <a:rPr lang="en-US" sz="1600" b="1" dirty="0">
+                <a:solidFill>
+                  <a:srgbClr val="0D9488"/>
+                </a:solidFill>
+                <a:latin typeface="Trebuchet MS" pitchFamily="34" charset="0"/>
+                <a:ea typeface="Trebuchet MS" pitchFamily="34" charset="-122"/>
+                <a:cs typeface="Trebuchet MS" pitchFamily="34" charset="-120"/>
+              </a:rPr>
+              <a:t>·</a:t>
+            </a:r>
+            <a:endParaRPr lang="en-US" sz="1600" dirty="0"/>
+          </a:p>
+        </p:txBody>
+      </p:sp>
+      <p:sp>
+        <p:nvSpPr>
+          <p:cNvPr id="37" name="Shape 35"/>
+          <p:cNvSpPr/>
+          <p:nvPr/>
+        </p:nvSpPr>
+        <p:spPr>
+          <a:xfrm>
+            <a:off x="6858000" y="3364992"/>
+            <a:ext cx="1554480" cy="475488"/>
+          </a:xfrm>
+          <a:prstGeom prst="rect">
+            <a:avLst>
+              <a:gd name="adj" fmla="val 9615"/>
+            </a:avLst>
+          </a:prstGeom>
+          <a:solidFill>
+            <a:srgbClr val="FFFFFF"/>
+          </a:solidFill>
+          <a:ln w="12700">
+            <a:solidFill>
+              <a:srgbClr val="0D9488"/>
+            </a:solidFill>
+            <a:prstDash val="solid"/>
+          </a:ln>
+        </p:spPr>
+      </p:sp>
+      <p:sp>
+        <p:nvSpPr>
+          <p:cNvPr id="38" name="Text 36"/>
+          <p:cNvSpPr/>
+          <p:nvPr/>
+        </p:nvSpPr>
+        <p:spPr>
+          <a:xfrm>
+            <a:off x="6858000" y="3364992"/>
+            <a:ext cx="1554480" cy="475488"/>
+          </a:xfrm>
+          <a:prstGeom prst="rect">
+            <a:avLst/>
+          </a:prstGeom>
+          <a:noFill/>
+          <a:ln/>
+        </p:spPr>
+        <p:txBody>
+          <a:bodyPr wrap="square" lIns="0" tIns="0" rIns="0" bIns="0" rtlCol="0" anchor="ctr"/>
+          <a:lstStyle/>
+          <a:p>
+            <a:pPr algn="ctr" indent="0" marL="0">
+              <a:buNone/>
+            </a:pPr>
+            <a:r>
+              <a:rPr lang="en-US" sz="1400" b="1" dirty="0">
+                <a:solidFill>
+                  <a:srgbClr val="0D9488"/>
+                </a:solidFill>
+                <a:latin typeface="Trebuchet MS" pitchFamily="34" charset="0"/>
+                <a:ea typeface="Trebuchet MS" pitchFamily="34" charset="-122"/>
+                <a:cs typeface="Trebuchet MS" pitchFamily="34" charset="-120"/>
+              </a:rPr>
+              <a:t>sion</a:t>
+            </a:r>
+            <a:endParaRPr lang="en-US" sz="1400" dirty="0"/>
+          </a:p>
+        </p:txBody>
+      </p:sp>
+      <p:sp>
+        <p:nvSpPr>
+          <p:cNvPr id="39" name="Shape 37"/>
           <p:cNvSpPr/>
           <p:nvPr/>
         </p:nvSpPr>
@@ -31640,7 +32486,7 @@
       </p:sp>
       <p:sp>
         <p:nvSpPr>
-          <p:cNvPr id="37" name="Text 35"/>
+          <p:cNvPr id="40" name="Text 38"/>
           <p:cNvSpPr/>
           <p:nvPr/>
         </p:nvSpPr>
@@ -31679,7 +32525,7 @@
       </p:sp>
       <p:sp>
         <p:nvSpPr>
-          <p:cNvPr id="38" name="Shape 36"/>
+          <p:cNvPr id="41" name="Shape 39"/>
           <p:cNvSpPr/>
           <p:nvPr/>
         </p:nvSpPr>
@@ -31706,7 +32552,7 @@
       </p:sp>
       <p:sp>
         <p:nvSpPr>
-          <p:cNvPr id="39" name="Text 37"/>
+          <p:cNvPr id="42" name="Text 40"/>
           <p:cNvSpPr/>
           <p:nvPr/>
         </p:nvSpPr>
@@ -32168,7 +33014,7 @@
                 <a:ea typeface="Trebuchet MS" pitchFamily="34" charset="-122"/>
                 <a:cs typeface="Trebuchet MS" pitchFamily="34" charset="-120"/>
               </a:rPr>
-              <a:t>visited</a:t>
+              <a:t>television</a:t>
             </a:r>
             <a:endParaRPr lang="en-US" sz="2800" dirty="0"/>
           </a:p>
@@ -32257,11 +33103,11 @@
             </a:avLst>
           </a:prstGeom>
           <a:solidFill>
-            <a:srgbClr val="CCFBF1"/>
+            <a:srgbClr val="DDD6FE"/>
           </a:solidFill>
           <a:ln w="19050">
             <a:solidFill>
-              <a:srgbClr val="0D9488"/>
+              <a:srgbClr val="7C3AED"/>
             </a:solidFill>
             <a:prstDash val="solid"/>
           </a:ln>
@@ -32301,13 +33147,13 @@
             <a:r>
               <a:rPr lang="en-US" sz="1300" b="1" dirty="0">
                 <a:solidFill>
-                  <a:srgbClr val="0F766E"/>
+                  <a:srgbClr val="4C1D95"/>
                 </a:solidFill>
                 <a:latin typeface="Trebuchet MS" pitchFamily="34" charset="0"/>
                 <a:ea typeface="Trebuchet MS" pitchFamily="34" charset="-122"/>
                 <a:cs typeface="Trebuchet MS" pitchFamily="34" charset="-120"/>
               </a:rPr>
-              <a:t>vis</a:t>
+              <a:t>tele</a:t>
             </a:r>
             <a:endParaRPr lang="en-US" sz="1300" dirty="0"/>
           </a:p>
@@ -32346,7 +33192,7 @@
                 <a:ea typeface="Calibri" pitchFamily="34" charset="-122"/>
                 <a:cs typeface="Calibri" pitchFamily="34" charset="-120"/>
               </a:rPr>
-              <a:t>to see</a:t>
+              <a:t>far away</a:t>
             </a:r>
             <a:endParaRPr lang="en-US" sz="850" dirty="0"/>
           </a:p>
@@ -32369,11 +33215,11 @@
             </a:avLst>
           </a:prstGeom>
           <a:solidFill>
-            <a:srgbClr val="FCE7F3"/>
+            <a:srgbClr val="CCFBF1"/>
           </a:solidFill>
           <a:ln w="19050">
             <a:solidFill>
-              <a:srgbClr val="DB2777"/>
+              <a:srgbClr val="0D9488"/>
             </a:solidFill>
             <a:prstDash val="solid"/>
           </a:ln>
@@ -32413,13 +33259,13 @@
             <a:r>
               <a:rPr lang="en-US" sz="1300" b="1" dirty="0">
                 <a:solidFill>
-                  <a:srgbClr val="9D174D"/>
+                  <a:srgbClr val="0F766E"/>
                 </a:solidFill>
                 <a:latin typeface="Trebuchet MS" pitchFamily="34" charset="0"/>
                 <a:ea typeface="Trebuchet MS" pitchFamily="34" charset="-122"/>
                 <a:cs typeface="Trebuchet MS" pitchFamily="34" charset="-120"/>
               </a:rPr>
-              <a:t>it</a:t>
+              <a:t>vis</a:t>
             </a:r>
             <a:endParaRPr lang="en-US" sz="1300" dirty="0"/>
           </a:p>
@@ -32458,7 +33304,7 @@
                 <a:ea typeface="Calibri" pitchFamily="34" charset="-122"/>
                 <a:cs typeface="Calibri" pitchFamily="34" charset="-120"/>
               </a:rPr>
-              <a:t>action</a:t>
+              <a:t>to see</a:t>
             </a:r>
             <a:endParaRPr lang="en-US" sz="850" dirty="0"/>
           </a:p>
@@ -32531,7 +33377,7 @@
                 <a:ea typeface="Trebuchet MS" pitchFamily="34" charset="-122"/>
                 <a:cs typeface="Trebuchet MS" pitchFamily="34" charset="-120"/>
               </a:rPr>
-              <a:t>ed</a:t>
+              <a:t>ion</a:t>
             </a:r>
             <a:endParaRPr lang="en-US" sz="1300" dirty="0"/>
           </a:p>
@@ -32570,7 +33416,7 @@
                 <a:ea typeface="Calibri" pitchFamily="34" charset="-122"/>
                 <a:cs typeface="Calibri" pitchFamily="34" charset="-120"/>
               </a:rPr>
-              <a:t>past tense</a:t>
+              <a:t>act or process of</a:t>
             </a:r>
             <a:endParaRPr lang="en-US" sz="850" dirty="0"/>
           </a:p>
@@ -32677,8 +33523,8 @@
         </p:nvSpPr>
         <p:spPr>
           <a:xfrm>
-            <a:off x="2313432" y="3364992"/>
-            <a:ext cx="1645920" cy="475488"/>
+            <a:off x="1975104" y="3364992"/>
+            <a:ext cx="1554480" cy="475488"/>
           </a:xfrm>
           <a:prstGeom prst="rect">
             <a:avLst>
@@ -32704,8 +33550,8 @@
         </p:nvSpPr>
         <p:spPr>
           <a:xfrm>
-            <a:off x="2313432" y="3364992"/>
-            <a:ext cx="1645920" cy="475488"/>
+            <a:off x="1975104" y="3364992"/>
+            <a:ext cx="1554480" cy="475488"/>
           </a:xfrm>
           <a:prstGeom prst="rect">
             <a:avLst/>
@@ -32729,7 +33575,7 @@
                 <a:ea typeface="Trebuchet MS" pitchFamily="34" charset="-122"/>
                 <a:cs typeface="Trebuchet MS" pitchFamily="34" charset="-120"/>
               </a:rPr>
-              <a:t>vis</a:t>
+              <a:t>te</a:t>
             </a:r>
             <a:endParaRPr lang="en-US" sz="1400" dirty="0"/>
           </a:p>
@@ -32743,8 +33589,8 @@
         </p:nvSpPr>
         <p:spPr>
           <a:xfrm>
-            <a:off x="3959352" y="3364992"/>
-            <a:ext cx="411480" cy="475488"/>
+            <a:off x="3529584" y="3364992"/>
+            <a:ext cx="73152" cy="475488"/>
           </a:xfrm>
           <a:prstGeom prst="rect">
             <a:avLst/>
@@ -32782,8 +33628,8 @@
         </p:nvSpPr>
         <p:spPr>
           <a:xfrm>
-            <a:off x="4370832" y="3364992"/>
-            <a:ext cx="1645920" cy="475488"/>
+            <a:off x="3602736" y="3364992"/>
+            <a:ext cx="1554480" cy="475488"/>
           </a:xfrm>
           <a:prstGeom prst="rect">
             <a:avLst>
@@ -32809,8 +33655,8 @@
         </p:nvSpPr>
         <p:spPr>
           <a:xfrm>
-            <a:off x="4370832" y="3364992"/>
-            <a:ext cx="1645920" cy="475488"/>
+            <a:off x="3602736" y="3364992"/>
+            <a:ext cx="1554480" cy="475488"/>
           </a:xfrm>
           <a:prstGeom prst="rect">
             <a:avLst/>
@@ -32834,7 +33680,7 @@
                 <a:ea typeface="Trebuchet MS" pitchFamily="34" charset="-122"/>
                 <a:cs typeface="Trebuchet MS" pitchFamily="34" charset="-120"/>
               </a:rPr>
-              <a:t>it</a:t>
+              <a:t>le</a:t>
             </a:r>
             <a:endParaRPr lang="en-US" sz="1400" dirty="0"/>
           </a:p>
@@ -32848,8 +33694,8 @@
         </p:nvSpPr>
         <p:spPr>
           <a:xfrm>
-            <a:off x="6016752" y="3364992"/>
-            <a:ext cx="411480" cy="475488"/>
+            <a:off x="5157216" y="3364992"/>
+            <a:ext cx="73152" cy="475488"/>
           </a:xfrm>
           <a:prstGeom prst="rect">
             <a:avLst/>
@@ -32887,8 +33733,8 @@
         </p:nvSpPr>
         <p:spPr>
           <a:xfrm>
-            <a:off x="6428232" y="3364992"/>
-            <a:ext cx="1645920" cy="475488"/>
+            <a:off x="5230368" y="3364992"/>
+            <a:ext cx="1554480" cy="475488"/>
           </a:xfrm>
           <a:prstGeom prst="rect">
             <a:avLst>
@@ -32914,8 +33760,8 @@
         </p:nvSpPr>
         <p:spPr>
           <a:xfrm>
-            <a:off x="6428232" y="3364992"/>
-            <a:ext cx="1645920" cy="475488"/>
+            <a:off x="5230368" y="3364992"/>
+            <a:ext cx="1554480" cy="475488"/>
           </a:xfrm>
           <a:prstGeom prst="rect">
             <a:avLst/>
@@ -32939,7 +33785,7 @@
                 <a:ea typeface="Trebuchet MS" pitchFamily="34" charset="-122"/>
                 <a:cs typeface="Trebuchet MS" pitchFamily="34" charset="-120"/>
               </a:rPr>
-              <a:t>ed</a:t>
+              <a:t>vi</a:t>
             </a:r>
             <a:endParaRPr lang="en-US" sz="1400" dirty="0"/>
           </a:p>
@@ -32947,7 +33793,112 @@
       </p:sp>
       <p:sp>
         <p:nvSpPr>
-          <p:cNvPr id="36" name="Shape 34"/>
+          <p:cNvPr id="36" name="Text 34"/>
+          <p:cNvSpPr/>
+          <p:nvPr/>
+        </p:nvSpPr>
+        <p:spPr>
+          <a:xfrm>
+            <a:off x="6784848" y="3364992"/>
+            <a:ext cx="73152" cy="475488"/>
+          </a:xfrm>
+          <a:prstGeom prst="rect">
+            <a:avLst/>
+          </a:prstGeom>
+          <a:noFill/>
+          <a:ln/>
+        </p:spPr>
+        <p:txBody>
+          <a:bodyPr wrap="square" lIns="0" tIns="0" rIns="0" bIns="0" rtlCol="0" anchor="ctr"/>
+          <a:lstStyle/>
+          <a:p>
+            <a:pPr algn="ctr" indent="0" marL="0">
+              <a:buNone/>
+            </a:pPr>
+            <a:r>
+              <a:rPr lang="en-US" sz="1600" b="1" dirty="0">
+                <a:solidFill>
+                  <a:srgbClr val="0D9488"/>
+                </a:solidFill>
+                <a:latin typeface="Trebuchet MS" pitchFamily="34" charset="0"/>
+                <a:ea typeface="Trebuchet MS" pitchFamily="34" charset="-122"/>
+                <a:cs typeface="Trebuchet MS" pitchFamily="34" charset="-120"/>
+              </a:rPr>
+              <a:t>·</a:t>
+            </a:r>
+            <a:endParaRPr lang="en-US" sz="1600" dirty="0"/>
+          </a:p>
+        </p:txBody>
+      </p:sp>
+      <p:sp>
+        <p:nvSpPr>
+          <p:cNvPr id="37" name="Shape 35"/>
+          <p:cNvSpPr/>
+          <p:nvPr/>
+        </p:nvSpPr>
+        <p:spPr>
+          <a:xfrm>
+            <a:off x="6858000" y="3364992"/>
+            <a:ext cx="1554480" cy="475488"/>
+          </a:xfrm>
+          <a:prstGeom prst="rect">
+            <a:avLst>
+              <a:gd name="adj" fmla="val 9615"/>
+            </a:avLst>
+          </a:prstGeom>
+          <a:solidFill>
+            <a:srgbClr val="FFFFFF"/>
+          </a:solidFill>
+          <a:ln w="12700">
+            <a:solidFill>
+              <a:srgbClr val="0D9488"/>
+            </a:solidFill>
+            <a:prstDash val="solid"/>
+          </a:ln>
+        </p:spPr>
+      </p:sp>
+      <p:sp>
+        <p:nvSpPr>
+          <p:cNvPr id="38" name="Text 36"/>
+          <p:cNvSpPr/>
+          <p:nvPr/>
+        </p:nvSpPr>
+        <p:spPr>
+          <a:xfrm>
+            <a:off x="6858000" y="3364992"/>
+            <a:ext cx="1554480" cy="475488"/>
+          </a:xfrm>
+          <a:prstGeom prst="rect">
+            <a:avLst/>
+          </a:prstGeom>
+          <a:noFill/>
+          <a:ln/>
+        </p:spPr>
+        <p:txBody>
+          <a:bodyPr wrap="square" lIns="0" tIns="0" rIns="0" bIns="0" rtlCol="0" anchor="ctr"/>
+          <a:lstStyle/>
+          <a:p>
+            <a:pPr algn="ctr" indent="0" marL="0">
+              <a:buNone/>
+            </a:pPr>
+            <a:r>
+              <a:rPr lang="en-US" sz="1400" b="1" dirty="0">
+                <a:solidFill>
+                  <a:srgbClr val="0D9488"/>
+                </a:solidFill>
+                <a:latin typeface="Trebuchet MS" pitchFamily="34" charset="0"/>
+                <a:ea typeface="Trebuchet MS" pitchFamily="34" charset="-122"/>
+                <a:cs typeface="Trebuchet MS" pitchFamily="34" charset="-120"/>
+              </a:rPr>
+              <a:t>sion</a:t>
+            </a:r>
+            <a:endParaRPr lang="en-US" sz="1400" dirty="0"/>
+          </a:p>
+        </p:txBody>
+      </p:sp>
+      <p:sp>
+        <p:nvSpPr>
+          <p:cNvPr id="39" name="Shape 37"/>
           <p:cNvSpPr/>
           <p:nvPr/>
         </p:nvSpPr>
@@ -32974,7 +33925,7 @@
       </p:sp>
       <p:sp>
         <p:nvSpPr>
-          <p:cNvPr id="37" name="Text 35"/>
+          <p:cNvPr id="40" name="Text 38"/>
           <p:cNvSpPr/>
           <p:nvPr/>
         </p:nvSpPr>
@@ -33013,18 +33964,18 @@
       </p:sp>
       <p:sp>
         <p:nvSpPr>
-          <p:cNvPr id="38" name="Shape 36"/>
+          <p:cNvPr id="41" name="Shape 39"/>
           <p:cNvSpPr/>
           <p:nvPr/>
         </p:nvSpPr>
         <p:spPr>
           <a:xfrm>
             <a:off x="1874520" y="4096512"/>
-            <a:ext cx="6903720" cy="658368"/>
+            <a:ext cx="6903720" cy="804672"/>
           </a:xfrm>
           <a:prstGeom prst="rect">
             <a:avLst>
-              <a:gd name="adj" fmla="val 8333"/>
+              <a:gd name="adj" fmla="val 6818"/>
             </a:avLst>
           </a:prstGeom>
           <a:solidFill>
@@ -33040,18 +33991,18 @@
       </p:sp>
       <p:sp>
         <p:nvSpPr>
-          <p:cNvPr id="39" name="Shape 37"/>
-          <p:cNvSpPr/>
-          <p:nvPr/>
-        </p:nvSpPr>
-        <p:spPr>
-          <a:xfrm>
-            <a:off x="2254649" y="4169664"/>
-            <a:ext cx="685800" cy="475488"/>
+          <p:cNvPr id="42" name="Shape 40"/>
+          <p:cNvSpPr/>
+          <p:nvPr/>
+        </p:nvSpPr>
+        <p:spPr>
+          <a:xfrm>
+            <a:off x="2023872" y="4169664"/>
+            <a:ext cx="685800" cy="384048"/>
           </a:xfrm>
           <a:prstGeom prst="rect">
             <a:avLst>
-              <a:gd name="adj" fmla="val 7692"/>
+              <a:gd name="adj" fmla="val 9524"/>
             </a:avLst>
           </a:prstGeom>
           <a:solidFill>
@@ -33067,14 +34018,14 @@
       </p:sp>
       <p:sp>
         <p:nvSpPr>
-          <p:cNvPr id="40" name="Text 38"/>
-          <p:cNvSpPr/>
-          <p:nvPr/>
-        </p:nvSpPr>
-        <p:spPr>
-          <a:xfrm>
-            <a:off x="2254649" y="4169664"/>
-            <a:ext cx="685800" cy="475488"/>
+          <p:cNvPr id="43" name="Text 41"/>
+          <p:cNvSpPr/>
+          <p:nvPr/>
+        </p:nvSpPr>
+        <p:spPr>
+          <a:xfrm>
+            <a:off x="2023872" y="4169664"/>
+            <a:ext cx="685800" cy="384048"/>
           </a:xfrm>
           <a:prstGeom prst="rect">
             <a:avLst/>
@@ -33098,7 +34049,7 @@
                 <a:ea typeface="Trebuchet MS" pitchFamily="34" charset="-122"/>
                 <a:cs typeface="Trebuchet MS" pitchFamily="34" charset="-120"/>
               </a:rPr>
-              <a:t>v</a:t>
+              <a:t>t</a:t>
             </a:r>
             <a:endParaRPr lang="en-US" sz="900" dirty="0"/>
           </a:p>
@@ -33106,18 +34057,18 @@
       </p:sp>
       <p:sp>
         <p:nvSpPr>
-          <p:cNvPr id="41" name="Shape 39"/>
-          <p:cNvSpPr/>
-          <p:nvPr/>
-        </p:nvSpPr>
-        <p:spPr>
-          <a:xfrm>
-            <a:off x="3293146" y="4169664"/>
-            <a:ext cx="685800" cy="475488"/>
+          <p:cNvPr id="44" name="Shape 42"/>
+          <p:cNvSpPr/>
+          <p:nvPr/>
+        </p:nvSpPr>
+        <p:spPr>
+          <a:xfrm>
+            <a:off x="2831592" y="4169664"/>
+            <a:ext cx="685800" cy="384048"/>
           </a:xfrm>
           <a:prstGeom prst="rect">
             <a:avLst>
-              <a:gd name="adj" fmla="val 7692"/>
+              <a:gd name="adj" fmla="val 9524"/>
             </a:avLst>
           </a:prstGeom>
           <a:solidFill>
@@ -33133,14 +34084,14 @@
       </p:sp>
       <p:sp>
         <p:nvSpPr>
-          <p:cNvPr id="42" name="Text 40"/>
-          <p:cNvSpPr/>
-          <p:nvPr/>
-        </p:nvSpPr>
-        <p:spPr>
-          <a:xfrm>
-            <a:off x="3293146" y="4169664"/>
-            <a:ext cx="685800" cy="475488"/>
+          <p:cNvPr id="45" name="Text 43"/>
+          <p:cNvSpPr/>
+          <p:nvPr/>
+        </p:nvSpPr>
+        <p:spPr>
+          <a:xfrm>
+            <a:off x="2831592" y="4169664"/>
+            <a:ext cx="685800" cy="384048"/>
           </a:xfrm>
           <a:prstGeom prst="rect">
             <a:avLst/>
@@ -33164,7 +34115,7 @@
                 <a:ea typeface="Trebuchet MS" pitchFamily="34" charset="-122"/>
                 <a:cs typeface="Trebuchet MS" pitchFamily="34" charset="-120"/>
               </a:rPr>
-              <a:t>i</a:t>
+              <a:t>e</a:t>
             </a:r>
             <a:endParaRPr lang="en-US" sz="900" dirty="0"/>
           </a:p>
@@ -33172,18 +34123,18 @@
       </p:sp>
       <p:sp>
         <p:nvSpPr>
-          <p:cNvPr id="43" name="Shape 41"/>
-          <p:cNvSpPr/>
-          <p:nvPr/>
-        </p:nvSpPr>
-        <p:spPr>
-          <a:xfrm>
-            <a:off x="4331643" y="4169664"/>
-            <a:ext cx="685800" cy="475488"/>
+          <p:cNvPr id="46" name="Shape 44"/>
+          <p:cNvSpPr/>
+          <p:nvPr/>
+        </p:nvSpPr>
+        <p:spPr>
+          <a:xfrm>
+            <a:off x="3639312" y="4169664"/>
+            <a:ext cx="685800" cy="384048"/>
           </a:xfrm>
           <a:prstGeom prst="rect">
             <a:avLst>
-              <a:gd name="adj" fmla="val 7692"/>
+              <a:gd name="adj" fmla="val 9524"/>
             </a:avLst>
           </a:prstGeom>
           <a:solidFill>
@@ -33199,14 +34150,14 @@
       </p:sp>
       <p:sp>
         <p:nvSpPr>
-          <p:cNvPr id="44" name="Text 42"/>
-          <p:cNvSpPr/>
-          <p:nvPr/>
-        </p:nvSpPr>
-        <p:spPr>
-          <a:xfrm>
-            <a:off x="4331643" y="4169664"/>
-            <a:ext cx="685800" cy="475488"/>
+          <p:cNvPr id="47" name="Text 45"/>
+          <p:cNvSpPr/>
+          <p:nvPr/>
+        </p:nvSpPr>
+        <p:spPr>
+          <a:xfrm>
+            <a:off x="3639312" y="4169664"/>
+            <a:ext cx="685800" cy="384048"/>
           </a:xfrm>
           <a:prstGeom prst="rect">
             <a:avLst/>
@@ -33230,7 +34181,7 @@
                 <a:ea typeface="Trebuchet MS" pitchFamily="34" charset="-122"/>
                 <a:cs typeface="Trebuchet MS" pitchFamily="34" charset="-120"/>
               </a:rPr>
-              <a:t>s</a:t>
+              <a:t>l</a:t>
             </a:r>
             <a:endParaRPr lang="en-US" sz="900" dirty="0"/>
           </a:p>
@@ -33238,18 +34189,18 @@
       </p:sp>
       <p:sp>
         <p:nvSpPr>
-          <p:cNvPr id="45" name="Shape 43"/>
-          <p:cNvSpPr/>
-          <p:nvPr/>
-        </p:nvSpPr>
-        <p:spPr>
-          <a:xfrm>
-            <a:off x="5370141" y="4169664"/>
-            <a:ext cx="685800" cy="475488"/>
+          <p:cNvPr id="48" name="Shape 46"/>
+          <p:cNvSpPr/>
+          <p:nvPr/>
+        </p:nvSpPr>
+        <p:spPr>
+          <a:xfrm>
+            <a:off x="4447032" y="4169664"/>
+            <a:ext cx="685800" cy="384048"/>
           </a:xfrm>
           <a:prstGeom prst="rect">
             <a:avLst>
-              <a:gd name="adj" fmla="val 7692"/>
+              <a:gd name="adj" fmla="val 9524"/>
             </a:avLst>
           </a:prstGeom>
           <a:solidFill>
@@ -33265,14 +34216,14 @@
       </p:sp>
       <p:sp>
         <p:nvSpPr>
-          <p:cNvPr id="46" name="Text 44"/>
-          <p:cNvSpPr/>
-          <p:nvPr/>
-        </p:nvSpPr>
-        <p:spPr>
-          <a:xfrm>
-            <a:off x="5370141" y="4169664"/>
-            <a:ext cx="685800" cy="475488"/>
+          <p:cNvPr id="49" name="Text 47"/>
+          <p:cNvSpPr/>
+          <p:nvPr/>
+        </p:nvSpPr>
+        <p:spPr>
+          <a:xfrm>
+            <a:off x="4447032" y="4169664"/>
+            <a:ext cx="685800" cy="384048"/>
           </a:xfrm>
           <a:prstGeom prst="rect">
             <a:avLst/>
@@ -33296,7 +34247,7 @@
                 <a:ea typeface="Trebuchet MS" pitchFamily="34" charset="-122"/>
                 <a:cs typeface="Trebuchet MS" pitchFamily="34" charset="-120"/>
               </a:rPr>
-              <a:t>i</a:t>
+              <a:t>e</a:t>
             </a:r>
             <a:endParaRPr lang="en-US" sz="900" dirty="0"/>
           </a:p>
@@ -33304,18 +34255,18 @@
       </p:sp>
       <p:sp>
         <p:nvSpPr>
-          <p:cNvPr id="47" name="Shape 45"/>
-          <p:cNvSpPr/>
-          <p:nvPr/>
-        </p:nvSpPr>
-        <p:spPr>
-          <a:xfrm>
-            <a:off x="6408638" y="4169664"/>
-            <a:ext cx="685800" cy="475488"/>
+          <p:cNvPr id="50" name="Shape 48"/>
+          <p:cNvSpPr/>
+          <p:nvPr/>
+        </p:nvSpPr>
+        <p:spPr>
+          <a:xfrm>
+            <a:off x="5254752" y="4169664"/>
+            <a:ext cx="685800" cy="384048"/>
           </a:xfrm>
           <a:prstGeom prst="rect">
             <a:avLst>
-              <a:gd name="adj" fmla="val 7692"/>
+              <a:gd name="adj" fmla="val 9524"/>
             </a:avLst>
           </a:prstGeom>
           <a:solidFill>
@@ -33331,14 +34282,14 @@
       </p:sp>
       <p:sp>
         <p:nvSpPr>
-          <p:cNvPr id="48" name="Text 46"/>
-          <p:cNvSpPr/>
-          <p:nvPr/>
-        </p:nvSpPr>
-        <p:spPr>
-          <a:xfrm>
-            <a:off x="6408638" y="4169664"/>
-            <a:ext cx="685800" cy="475488"/>
+          <p:cNvPr id="51" name="Text 49"/>
+          <p:cNvSpPr/>
+          <p:nvPr/>
+        </p:nvSpPr>
+        <p:spPr>
+          <a:xfrm>
+            <a:off x="5254752" y="4169664"/>
+            <a:ext cx="685800" cy="384048"/>
           </a:xfrm>
           <a:prstGeom prst="rect">
             <a:avLst/>
@@ -33362,7 +34313,7 @@
                 <a:ea typeface="Trebuchet MS" pitchFamily="34" charset="-122"/>
                 <a:cs typeface="Trebuchet MS" pitchFamily="34" charset="-120"/>
               </a:rPr>
-              <a:t>t</a:t>
+              <a:t>v</a:t>
             </a:r>
             <a:endParaRPr lang="en-US" sz="900" dirty="0"/>
           </a:p>
@@ -33370,18 +34321,18 @@
       </p:sp>
       <p:sp>
         <p:nvSpPr>
-          <p:cNvPr id="49" name="Shape 47"/>
-          <p:cNvSpPr/>
-          <p:nvPr/>
-        </p:nvSpPr>
-        <p:spPr>
-          <a:xfrm>
-            <a:off x="7447135" y="4169664"/>
-            <a:ext cx="685800" cy="475488"/>
+          <p:cNvPr id="52" name="Shape 50"/>
+          <p:cNvSpPr/>
+          <p:nvPr/>
+        </p:nvSpPr>
+        <p:spPr>
+          <a:xfrm>
+            <a:off x="6062472" y="4169664"/>
+            <a:ext cx="685800" cy="384048"/>
           </a:xfrm>
           <a:prstGeom prst="rect">
             <a:avLst>
-              <a:gd name="adj" fmla="val 7692"/>
+              <a:gd name="adj" fmla="val 9524"/>
             </a:avLst>
           </a:prstGeom>
           <a:solidFill>
@@ -33397,14 +34348,14 @@
       </p:sp>
       <p:sp>
         <p:nvSpPr>
-          <p:cNvPr id="50" name="Text 48"/>
-          <p:cNvSpPr/>
-          <p:nvPr/>
-        </p:nvSpPr>
-        <p:spPr>
-          <a:xfrm>
-            <a:off x="7447135" y="4169664"/>
-            <a:ext cx="685800" cy="475488"/>
+          <p:cNvPr id="53" name="Text 51"/>
+          <p:cNvSpPr/>
+          <p:nvPr/>
+        </p:nvSpPr>
+        <p:spPr>
+          <a:xfrm>
+            <a:off x="6062472" y="4169664"/>
+            <a:ext cx="685800" cy="384048"/>
           </a:xfrm>
           <a:prstGeom prst="rect">
             <a:avLst/>
@@ -33428,7 +34379,178 @@
                 <a:ea typeface="Trebuchet MS" pitchFamily="34" charset="-122"/>
                 <a:cs typeface="Trebuchet MS" pitchFamily="34" charset="-120"/>
               </a:rPr>
-              <a:t>ed</a:t>
+              <a:t>i</a:t>
+            </a:r>
+            <a:endParaRPr lang="en-US" sz="900" dirty="0"/>
+          </a:p>
+        </p:txBody>
+      </p:sp>
+      <p:sp>
+        <p:nvSpPr>
+          <p:cNvPr id="54" name="Shape 52"/>
+          <p:cNvSpPr/>
+          <p:nvPr/>
+        </p:nvSpPr>
+        <p:spPr>
+          <a:xfrm>
+            <a:off x="6870192" y="4169664"/>
+            <a:ext cx="685800" cy="384048"/>
+          </a:xfrm>
+          <a:prstGeom prst="rect">
+            <a:avLst>
+              <a:gd name="adj" fmla="val 9524"/>
+            </a:avLst>
+          </a:prstGeom>
+          <a:solidFill>
+            <a:srgbClr val="FFFFFF"/>
+          </a:solidFill>
+          <a:ln w="12700">
+            <a:solidFill>
+              <a:srgbClr val="DB2777"/>
+            </a:solidFill>
+            <a:prstDash val="solid"/>
+          </a:ln>
+        </p:spPr>
+      </p:sp>
+      <p:sp>
+        <p:nvSpPr>
+          <p:cNvPr id="55" name="Text 53"/>
+          <p:cNvSpPr/>
+          <p:nvPr/>
+        </p:nvSpPr>
+        <p:spPr>
+          <a:xfrm>
+            <a:off x="6870192" y="4169664"/>
+            <a:ext cx="685800" cy="384048"/>
+          </a:xfrm>
+          <a:prstGeom prst="rect">
+            <a:avLst/>
+          </a:prstGeom>
+          <a:noFill/>
+          <a:ln/>
+        </p:spPr>
+        <p:txBody>
+          <a:bodyPr wrap="square" lIns="0" tIns="0" rIns="0" bIns="0" rtlCol="0" anchor="ctr"/>
+          <a:lstStyle/>
+          <a:p>
+            <a:pPr algn="ctr" indent="0" marL="0">
+              <a:buNone/>
+            </a:pPr>
+            <a:r>
+              <a:rPr lang="en-US" sz="900" b="1" dirty="0">
+                <a:solidFill>
+                  <a:srgbClr val="9D174D"/>
+                </a:solidFill>
+                <a:latin typeface="Trebuchet MS" pitchFamily="34" charset="0"/>
+                <a:ea typeface="Trebuchet MS" pitchFamily="34" charset="-122"/>
+                <a:cs typeface="Trebuchet MS" pitchFamily="34" charset="-120"/>
+              </a:rPr>
+              <a:t>si</a:t>
+            </a:r>
+            <a:endParaRPr lang="en-US" sz="900" dirty="0"/>
+          </a:p>
+        </p:txBody>
+      </p:sp>
+      <p:sp>
+        <p:nvSpPr>
+          <p:cNvPr id="56" name="Text 54"/>
+          <p:cNvSpPr/>
+          <p:nvPr/>
+        </p:nvSpPr>
+        <p:spPr>
+          <a:xfrm>
+            <a:off x="6870192" y="4572000"/>
+            <a:ext cx="685800" cy="219456"/>
+          </a:xfrm>
+          <a:prstGeom prst="rect">
+            <a:avLst/>
+          </a:prstGeom>
+          <a:noFill/>
+          <a:ln/>
+        </p:spPr>
+        <p:txBody>
+          <a:bodyPr wrap="square" lIns="0" tIns="0" rIns="0" bIns="0" rtlCol="0" anchor="t"/>
+          <a:lstStyle/>
+          <a:p>
+            <a:pPr algn="ctr" indent="0" marL="0">
+              <a:buNone/>
+            </a:pPr>
+            <a:r>
+              <a:rPr lang="en-US" sz="750" i="1" dirty="0">
+                <a:solidFill>
+                  <a:srgbClr val="94A3B8"/>
+                </a:solidFill>
+                <a:latin typeface="Calibri" pitchFamily="34" charset="0"/>
+                <a:ea typeface="Calibri" pitchFamily="34" charset="-122"/>
+                <a:cs typeface="Calibri" pitchFamily="34" charset="-120"/>
+              </a:rPr>
+              <a:t>/zh/</a:t>
+            </a:r>
+            <a:endParaRPr lang="en-US" sz="750" dirty="0"/>
+          </a:p>
+        </p:txBody>
+      </p:sp>
+      <p:sp>
+        <p:nvSpPr>
+          <p:cNvPr id="57" name="Shape 55"/>
+          <p:cNvSpPr/>
+          <p:nvPr/>
+        </p:nvSpPr>
+        <p:spPr>
+          <a:xfrm>
+            <a:off x="7677912" y="4169664"/>
+            <a:ext cx="685800" cy="384048"/>
+          </a:xfrm>
+          <a:prstGeom prst="rect">
+            <a:avLst>
+              <a:gd name="adj" fmla="val 9524"/>
+            </a:avLst>
+          </a:prstGeom>
+          <a:solidFill>
+            <a:srgbClr val="FFFFFF"/>
+          </a:solidFill>
+          <a:ln w="12700">
+            <a:solidFill>
+              <a:srgbClr val="DB2777"/>
+            </a:solidFill>
+            <a:prstDash val="solid"/>
+          </a:ln>
+        </p:spPr>
+      </p:sp>
+      <p:sp>
+        <p:nvSpPr>
+          <p:cNvPr id="58" name="Text 56"/>
+          <p:cNvSpPr/>
+          <p:nvPr/>
+        </p:nvSpPr>
+        <p:spPr>
+          <a:xfrm>
+            <a:off x="7677912" y="4169664"/>
+            <a:ext cx="685800" cy="384048"/>
+          </a:xfrm>
+          <a:prstGeom prst="rect">
+            <a:avLst/>
+          </a:prstGeom>
+          <a:noFill/>
+          <a:ln/>
+        </p:spPr>
+        <p:txBody>
+          <a:bodyPr wrap="square" lIns="0" tIns="0" rIns="0" bIns="0" rtlCol="0" anchor="ctr"/>
+          <a:lstStyle/>
+          <a:p>
+            <a:pPr algn="ctr" indent="0" marL="0">
+              <a:buNone/>
+            </a:pPr>
+            <a:r>
+              <a:rPr lang="en-US" sz="900" b="1" dirty="0">
+                <a:solidFill>
+                  <a:srgbClr val="9D174D"/>
+                </a:solidFill>
+                <a:latin typeface="Trebuchet MS" pitchFamily="34" charset="0"/>
+                <a:ea typeface="Trebuchet MS" pitchFamily="34" charset="-122"/>
+                <a:cs typeface="Trebuchet MS" pitchFamily="34" charset="-120"/>
+              </a:rPr>
+              <a:t>on</a:t>
             </a:r>
             <a:endParaRPr lang="en-US" sz="900" dirty="0"/>
           </a:p>
@@ -35930,7 +37052,7 @@
                 <a:ea typeface="Trebuchet MS" pitchFamily="34" charset="-122"/>
                 <a:cs typeface="Trebuchet MS" pitchFamily="34" charset="-120"/>
               </a:rPr>
-              <a:t>-it</a:t>
+              <a:t>-ible</a:t>
             </a:r>
             <a:endParaRPr lang="en-US" sz="1300" dirty="0"/>
           </a:p>
@@ -36035,7 +37157,7 @@
                 <a:ea typeface="Trebuchet MS" pitchFamily="34" charset="-122"/>
                 <a:cs typeface="Trebuchet MS" pitchFamily="34" charset="-120"/>
               </a:rPr>
-              <a:t>visible</a:t>
+              <a:t>vision</a:t>
             </a:r>
             <a:endParaRPr lang="en-US" sz="1200" dirty="0"/>
           </a:p>
@@ -36101,7 +37223,7 @@
                 <a:ea typeface="Trebuchet MS" pitchFamily="34" charset="-122"/>
                 <a:cs typeface="Trebuchet MS" pitchFamily="34" charset="-120"/>
               </a:rPr>
-              <a:t>vision</a:t>
+              <a:t>visible</a:t>
             </a:r>
             <a:endParaRPr lang="en-US" sz="1200" dirty="0"/>
           </a:p>
@@ -36167,7 +37289,7 @@
                 <a:ea typeface="Trebuchet MS" pitchFamily="34" charset="-122"/>
                 <a:cs typeface="Trebuchet MS" pitchFamily="34" charset="-120"/>
               </a:rPr>
-              <a:t>visit</a:t>
+              <a:t>invisible</a:t>
             </a:r>
             <a:endParaRPr lang="en-US" sz="1200" dirty="0"/>
           </a:p>
@@ -36299,7 +37421,7 @@
                 <a:ea typeface="Trebuchet MS" pitchFamily="34" charset="-122"/>
                 <a:cs typeface="Trebuchet MS" pitchFamily="34" charset="-120"/>
               </a:rPr>
-              <a:t>invisible</a:t>
+              <a:t>visual</a:t>
             </a:r>
             <a:endParaRPr lang="en-US" sz="1200" dirty="0"/>
           </a:p>
@@ -37685,7 +38807,7 @@
                 <a:ea typeface="Calibri" pitchFamily="34" charset="-122"/>
                 <a:cs typeface="Calibri" pitchFamily="34" charset="-120"/>
               </a:rPr>
-              <a:t>1.  The root 'vis' comes from a Latin word meaning 'to see'.</a:t>
+              <a:t>1.  The root 'vis' comes from a Latin word meaning to see.</a:t>
             </a:r>
             <a:endParaRPr lang="en-US" sz="1300" dirty="0"/>
           </a:p>
@@ -37824,7 +38946,7 @@
                 <a:ea typeface="Calibri" pitchFamily="34" charset="-122"/>
                 <a:cs typeface="Calibri" pitchFamily="34" charset="-120"/>
               </a:rPr>
-              <a:t>2.  The word 'invisible' means something that is very easy to see.</a:t>
+              <a:t>2.  The prefix 'in' added to 'visible' makes a word meaning not able to be seen.</a:t>
             </a:r>
             <a:endParaRPr lang="en-US" sz="1300" dirty="0"/>
           </a:p>
@@ -37847,11 +38969,11 @@
             </a:avLst>
           </a:prstGeom>
           <a:solidFill>
-            <a:srgbClr val="FEE2E2"/>
-          </a:solidFill>
-          <a:ln w="12700">
-            <a:solidFill>
-              <a:srgbClr val="DC2626"/>
+            <a:srgbClr val="DCFCE7"/>
+          </a:solidFill>
+          <a:ln w="12700">
+            <a:solidFill>
+              <a:srgbClr val="16A34A"/>
             </a:solidFill>
             <a:prstDash val="solid"/>
           </a:ln>
@@ -37884,13 +39006,13 @@
             <a:r>
               <a:rPr lang="en-US" sz="1100" b="1" dirty="0">
                 <a:solidFill>
-                  <a:srgbClr val="DC2626"/>
+                  <a:srgbClr val="16A34A"/>
                 </a:solidFill>
                 <a:latin typeface="Trebuchet MS" pitchFamily="34" charset="0"/>
                 <a:ea typeface="Trebuchet MS" pitchFamily="34" charset="-122"/>
                 <a:cs typeface="Trebuchet MS" pitchFamily="34" charset="-120"/>
               </a:rPr>
-              <a:t>FALSE</a:t>
+              <a:t>TRUE</a:t>
             </a:r>
             <a:endParaRPr lang="en-US" sz="1100" dirty="0"/>
           </a:p>
@@ -37963,7 +39085,7 @@
                 <a:ea typeface="Calibri" pitchFamily="34" charset="-122"/>
                 <a:cs typeface="Calibri" pitchFamily="34" charset="-120"/>
               </a:rPr>
-              <a:t>3.  A visitor is someone who comes to see a place or person.</a:t>
+              <a:t>3.  The word 'invisible' means something that can be seen very clearly.</a:t>
             </a:r>
             <a:endParaRPr lang="en-US" sz="1300" dirty="0"/>
           </a:p>
@@ -37986,11 +39108,11 @@
             </a:avLst>
           </a:prstGeom>
           <a:solidFill>
-            <a:srgbClr val="DCFCE7"/>
-          </a:solidFill>
-          <a:ln w="12700">
-            <a:solidFill>
-              <a:srgbClr val="16A34A"/>
+            <a:srgbClr val="FEE2E2"/>
+          </a:solidFill>
+          <a:ln w="12700">
+            <a:solidFill>
+              <a:srgbClr val="DC2626"/>
             </a:solidFill>
             <a:prstDash val="solid"/>
           </a:ln>
@@ -38023,13 +39145,13 @@
             <a:r>
               <a:rPr lang="en-US" sz="1100" b="1" dirty="0">
                 <a:solidFill>
-                  <a:srgbClr val="16A34A"/>
+                  <a:srgbClr val="DC2626"/>
                 </a:solidFill>
                 <a:latin typeface="Trebuchet MS" pitchFamily="34" charset="0"/>
                 <a:ea typeface="Trebuchet MS" pitchFamily="34" charset="-122"/>
                 <a:cs typeface="Trebuchet MS" pitchFamily="34" charset="-120"/>
               </a:rPr>
-              <a:t>TRUE</a:t>
+              <a:t>FALSE</a:t>
             </a:r>
             <a:endParaRPr lang="en-US" sz="1100" dirty="0"/>
           </a:p>
@@ -38102,7 +39224,7 @@
                 <a:ea typeface="Calibri" pitchFamily="34" charset="-122"/>
                 <a:cs typeface="Calibri" pitchFamily="34" charset="-120"/>
               </a:rPr>
-              <a:t>4.  The root 'vis' can be found in the word 'television'.</a:t>
+              <a:t>4.  The root 'vis' is found in the word 'visitor'.</a:t>
             </a:r>
             <a:endParaRPr lang="en-US" sz="1300" dirty="0"/>
           </a:p>
@@ -38241,7 +39363,7 @@
                 <a:ea typeface="Calibri" pitchFamily="34" charset="-122"/>
                 <a:cs typeface="Calibri" pitchFamily="34" charset="-120"/>
               </a:rPr>
-              <a:t>5.  The prefix 'super' in 'supervise' means 'under' or 'below'.</a:t>
+              <a:t>5.  The root 'vis' comes from a Greek word meaning to listen.</a:t>
             </a:r>
             <a:endParaRPr lang="en-US" sz="1300" dirty="0"/>
           </a:p>
@@ -38880,7 +40002,7 @@
                 <a:ea typeface="Trebuchet MS" pitchFamily="34" charset="-122"/>
                 <a:cs typeface="Trebuchet MS" pitchFamily="34" charset="-120"/>
               </a:rPr>
-              <a:t>visible</a:t>
+              <a:t>vision</a:t>
             </a:r>
             <a:endParaRPr lang="en-US" sz="1300" dirty="0"/>
           </a:p>
@@ -38946,7 +40068,7 @@
                 <a:ea typeface="Trebuchet MS" pitchFamily="34" charset="-122"/>
                 <a:cs typeface="Trebuchet MS" pitchFamily="34" charset="-120"/>
               </a:rPr>
-              <a:t>vision</a:t>
+              <a:t>visible</a:t>
             </a:r>
             <a:endParaRPr lang="en-US" sz="1300" dirty="0"/>
           </a:p>
@@ -39012,7 +40134,7 @@
                 <a:ea typeface="Trebuchet MS" pitchFamily="34" charset="-122"/>
                 <a:cs typeface="Trebuchet MS" pitchFamily="34" charset="-120"/>
               </a:rPr>
-              <a:t>visit</a:t>
+              <a:t>invisible</a:t>
             </a:r>
             <a:endParaRPr lang="en-US" sz="1300" dirty="0"/>
           </a:p>
@@ -39144,7 +40266,7 @@
                 <a:ea typeface="Trebuchet MS" pitchFamily="34" charset="-122"/>
                 <a:cs typeface="Trebuchet MS" pitchFamily="34" charset="-120"/>
               </a:rPr>
-              <a:t>invisible</a:t>
+              <a:t>visual</a:t>
             </a:r>
             <a:endParaRPr lang="en-US" sz="1300" dirty="0"/>
           </a:p>
@@ -40609,7 +41731,7 @@
                 <a:ea typeface="Trebuchet MS" pitchFamily="34" charset="-122"/>
                 <a:cs typeface="Trebuchet MS" pitchFamily="34" charset="-120"/>
               </a:rPr>
-              <a:t>-it</a:t>
+              <a:t>-ible</a:t>
             </a:r>
             <a:endParaRPr lang="en-US" sz="1300" dirty="0"/>
           </a:p>
@@ -41050,7 +42172,7 @@
                 <a:ea typeface="Trebuchet MS" pitchFamily="34" charset="-122"/>
                 <a:cs typeface="Trebuchet MS" pitchFamily="34" charset="-120"/>
               </a:rPr>
-              <a:t>visible</a:t>
+              <a:t>vision</a:t>
             </a:r>
             <a:endParaRPr lang="en-US" sz="1400" dirty="0"/>
           </a:p>
@@ -41454,7 +42576,7 @@
                 <a:ea typeface="Trebuchet MS" pitchFamily="34" charset="-122"/>
                 <a:cs typeface="Trebuchet MS" pitchFamily="34" charset="-120"/>
               </a:rPr>
-              <a:t>visible</a:t>
+              <a:t>vision</a:t>
             </a:r>
             <a:endParaRPr lang="en-US" sz="1200" dirty="0"/>
           </a:p>
@@ -41520,7 +42642,7 @@
                 <a:ea typeface="Calibri" pitchFamily="34" charset="-122"/>
                 <a:cs typeface="Calibri" pitchFamily="34" charset="-120"/>
               </a:rPr>
-              <a:t>To go somewhere to see a person or place.</a:t>
+              <a:t>Something that cannot be seen at all.</a:t>
             </a:r>
             <a:endParaRPr lang="en-US" sz="1200" dirty="0"/>
           </a:p>
@@ -41593,7 +42715,7 @@
                 <a:ea typeface="Trebuchet MS" pitchFamily="34" charset="-122"/>
                 <a:cs typeface="Trebuchet MS" pitchFamily="34" charset="-120"/>
               </a:rPr>
-              <a:t>vision</a:t>
+              <a:t>visible</a:t>
             </a:r>
             <a:endParaRPr lang="en-US" sz="1200" dirty="0"/>
           </a:p>
@@ -41659,7 +42781,7 @@
                 <a:ea typeface="Calibri" pitchFamily="34" charset="-122"/>
                 <a:cs typeface="Calibri" pitchFamily="34" charset="-120"/>
               </a:rPr>
-              <a:t>Something that cannot be seen at all.</a:t>
+              <a:t>Relating to things that you see with your eyes.</a:t>
             </a:r>
             <a:endParaRPr lang="en-US" sz="1200" dirty="0"/>
           </a:p>
@@ -41732,7 +42854,7 @@
                 <a:ea typeface="Trebuchet MS" pitchFamily="34" charset="-122"/>
                 <a:cs typeface="Trebuchet MS" pitchFamily="34" charset="-120"/>
               </a:rPr>
-              <a:t>visit</a:t>
+              <a:t>invisible</a:t>
             </a:r>
             <a:endParaRPr lang="en-US" sz="1200" dirty="0"/>
           </a:p>
@@ -41798,7 +42920,7 @@
                 <a:ea typeface="Calibri" pitchFamily="34" charset="-122"/>
                 <a:cs typeface="Calibri" pitchFamily="34" charset="-120"/>
               </a:rPr>
-              <a:t>Something that can be seen or noticed easily.</a:t>
+              <a:t>The ability to see, or a picture you imagine in your mind.</a:t>
             </a:r>
             <a:endParaRPr lang="en-US" sz="1200" dirty="0"/>
           </a:p>
@@ -41937,7 +43059,7 @@
                 <a:ea typeface="Calibri" pitchFamily="34" charset="-122"/>
                 <a:cs typeface="Calibri" pitchFamily="34" charset="-120"/>
               </a:rPr>
-              <a:t>To watch over people to make sure they are doing the right thing.</a:t>
+              <a:t>To watch over and check that people are doing things correctly.</a:t>
             </a:r>
             <a:endParaRPr lang="en-US" sz="1200" dirty="0"/>
           </a:p>
@@ -42010,7 +43132,7 @@
                 <a:ea typeface="Trebuchet MS" pitchFamily="34" charset="-122"/>
                 <a:cs typeface="Trebuchet MS" pitchFamily="34" charset="-120"/>
               </a:rPr>
-              <a:t>invisible</a:t>
+              <a:t>visual</a:t>
             </a:r>
             <a:endParaRPr lang="en-US" sz="1200" dirty="0"/>
           </a:p>
@@ -42354,7 +43476,7 @@
                 <a:ea typeface="Calibri" pitchFamily="34" charset="-122"/>
                 <a:cs typeface="Calibri" pitchFamily="34" charset="-120"/>
               </a:rPr>
-              <a:t>The ability to see, or a picture you imagine in your mind.</a:t>
+              <a:t>Something that can be seen or noticed easily.</a:t>
             </a:r>
             <a:endParaRPr lang="en-US" sz="1200" dirty="0"/>
           </a:p>
@@ -42849,7 +43971,7 @@
                 <a:ea typeface="Calibri" pitchFamily="34" charset="-122"/>
                 <a:cs typeface="Calibri" pitchFamily="34" charset="-120"/>
               </a:rPr>
-              <a:t>The stars were barely visible through the thick clouds last night.</a:t>
+              <a:t>The stars were not visible in the sky because of the thick clouds.</a:t>
             </a:r>
             <a:endParaRPr lang="en-US" sz="1500" dirty="0"/>
           </a:p>
@@ -43013,7 +44135,7 @@
                 <a:ea typeface="Calibri" pitchFamily="34" charset="-122"/>
                 <a:cs typeface="Calibri" pitchFamily="34" charset="-120"/>
               </a:rPr>
-              <a:t>Our teacher asked us to do a revision of our stories before we handed them in.</a:t>
+              <a:t>Our teacher asked us to supervise the younger students during lunch.</a:t>
             </a:r>
             <a:endParaRPr lang="en-US" sz="1500" dirty="0"/>
           </a:p>
@@ -43177,7 +44299,7 @@
                 <a:ea typeface="Calibri" pitchFamily="34" charset="-122"/>
                 <a:cs typeface="Calibri" pitchFamily="34" charset="-120"/>
               </a:rPr>
-              <a:t>We had a visitor come to our school to talk about caring for native animals.</a:t>
+              <a:t>The artist had an amazing vision of what her painting would look like.</a:t>
             </a:r>
             <a:endParaRPr lang="en-US" sz="1500" dirty="0"/>
           </a:p>

--- a/output/wordlabs-vis-3day.pptx
+++ b/output/wordlabs-vis-3day.pptx
@@ -28839,11 +28839,11 @@
         <p:spPr>
           <a:xfrm>
             <a:off x="1874520" y="4096512"/>
-            <a:ext cx="6903720" cy="804672"/>
+            <a:ext cx="6903720" cy="658368"/>
           </a:xfrm>
           <a:prstGeom prst="rect">
             <a:avLst>
-              <a:gd name="adj" fmla="val 6818"/>
+              <a:gd name="adj" fmla="val 8333"/>
             </a:avLst>
           </a:prstGeom>
           <a:solidFill>
@@ -28865,12 +28865,12 @@
         </p:nvSpPr>
         <p:spPr>
           <a:xfrm>
-            <a:off x="2427732" y="4169664"/>
-            <a:ext cx="685800" cy="384048"/>
+            <a:off x="2254649" y="4169664"/>
+            <a:ext cx="685800" cy="475488"/>
           </a:xfrm>
           <a:prstGeom prst="rect">
             <a:avLst>
-              <a:gd name="adj" fmla="val 9524"/>
+              <a:gd name="adj" fmla="val 7692"/>
             </a:avLst>
           </a:prstGeom>
           <a:solidFill>
@@ -28892,8 +28892,8 @@
         </p:nvSpPr>
         <p:spPr>
           <a:xfrm>
-            <a:off x="2427732" y="4169664"/>
-            <a:ext cx="685800" cy="384048"/>
+            <a:off x="2254649" y="4169664"/>
+            <a:ext cx="685800" cy="475488"/>
           </a:xfrm>
           <a:prstGeom prst="rect">
             <a:avLst/>
@@ -28931,12 +28931,12 @@
         </p:nvSpPr>
         <p:spPr>
           <a:xfrm>
-            <a:off x="3639312" y="4169664"/>
-            <a:ext cx="685800" cy="384048"/>
+            <a:off x="3293146" y="4169664"/>
+            <a:ext cx="685800" cy="475488"/>
           </a:xfrm>
           <a:prstGeom prst="rect">
             <a:avLst>
-              <a:gd name="adj" fmla="val 9524"/>
+              <a:gd name="adj" fmla="val 7692"/>
             </a:avLst>
           </a:prstGeom>
           <a:solidFill>
@@ -28958,8 +28958,8 @@
         </p:nvSpPr>
         <p:spPr>
           <a:xfrm>
-            <a:off x="3639312" y="4169664"/>
-            <a:ext cx="685800" cy="384048"/>
+            <a:off x="3293146" y="4169664"/>
+            <a:ext cx="685800" cy="475488"/>
           </a:xfrm>
           <a:prstGeom prst="rect">
             <a:avLst/>
@@ -28997,12 +28997,12 @@
         </p:nvSpPr>
         <p:spPr>
           <a:xfrm>
-            <a:off x="4850892" y="4169664"/>
-            <a:ext cx="685800" cy="384048"/>
+            <a:off x="4331643" y="4169664"/>
+            <a:ext cx="685800" cy="475488"/>
           </a:xfrm>
           <a:prstGeom prst="rect">
             <a:avLst>
-              <a:gd name="adj" fmla="val 9524"/>
+              <a:gd name="adj" fmla="val 7692"/>
             </a:avLst>
           </a:prstGeom>
           <a:solidFill>
@@ -29024,8 +29024,8 @@
         </p:nvSpPr>
         <p:spPr>
           <a:xfrm>
-            <a:off x="4850892" y="4169664"/>
-            <a:ext cx="685800" cy="384048"/>
+            <a:off x="4331643" y="4169664"/>
+            <a:ext cx="685800" cy="475488"/>
           </a:xfrm>
           <a:prstGeom prst="rect">
             <a:avLst/>
@@ -29049,7 +29049,7 @@
                 <a:ea typeface="Trebuchet MS" pitchFamily="34" charset="-122"/>
                 <a:cs typeface="Trebuchet MS" pitchFamily="34" charset="-120"/>
               </a:rPr>
-              <a:t>zh</a:t>
+              <a:t>s</a:t>
             </a:r>
             <a:endParaRPr lang="en-US" sz="900" dirty="0"/>
           </a:p>
@@ -29057,57 +29057,18 @@
       </p:sp>
       <p:sp>
         <p:nvSpPr>
-          <p:cNvPr id="46" name="Text 44"/>
-          <p:cNvSpPr/>
-          <p:nvPr/>
-        </p:nvSpPr>
-        <p:spPr>
-          <a:xfrm>
-            <a:off x="4850892" y="4572000"/>
-            <a:ext cx="685800" cy="219456"/>
-          </a:xfrm>
-          <a:prstGeom prst="rect">
-            <a:avLst/>
-          </a:prstGeom>
-          <a:noFill/>
-          <a:ln/>
-        </p:spPr>
-        <p:txBody>
-          <a:bodyPr wrap="square" lIns="0" tIns="0" rIns="0" bIns="0" rtlCol="0" anchor="t"/>
-          <a:lstStyle/>
-          <a:p>
-            <a:pPr algn="ctr" indent="0" marL="0">
-              <a:buNone/>
-            </a:pPr>
-            <a:r>
-              <a:rPr lang="en-US" sz="750" i="1" dirty="0">
-                <a:solidFill>
-                  <a:srgbClr val="94A3B8"/>
-                </a:solidFill>
-                <a:latin typeface="Calibri" pitchFamily="34" charset="0"/>
-                <a:ea typeface="Calibri" pitchFamily="34" charset="-122"/>
-                <a:cs typeface="Calibri" pitchFamily="34" charset="-120"/>
-              </a:rPr>
-              <a:t>/zh/</a:t>
-            </a:r>
-            <a:endParaRPr lang="en-US" sz="750" dirty="0"/>
-          </a:p>
-        </p:txBody>
-      </p:sp>
-      <p:sp>
-        <p:nvSpPr>
-          <p:cNvPr id="47" name="Shape 45"/>
-          <p:cNvSpPr/>
-          <p:nvPr/>
-        </p:nvSpPr>
-        <p:spPr>
-          <a:xfrm>
-            <a:off x="6062472" y="4169664"/>
-            <a:ext cx="685800" cy="384048"/>
+          <p:cNvPr id="46" name="Shape 44"/>
+          <p:cNvSpPr/>
+          <p:nvPr/>
+        </p:nvSpPr>
+        <p:spPr>
+          <a:xfrm>
+            <a:off x="5370141" y="4169664"/>
+            <a:ext cx="685800" cy="475488"/>
           </a:xfrm>
           <a:prstGeom prst="rect">
             <a:avLst>
-              <a:gd name="adj" fmla="val 9524"/>
+              <a:gd name="adj" fmla="val 7692"/>
             </a:avLst>
           </a:prstGeom>
           <a:solidFill>
@@ -29123,14 +29084,14 @@
       </p:sp>
       <p:sp>
         <p:nvSpPr>
-          <p:cNvPr id="48" name="Text 46"/>
-          <p:cNvSpPr/>
-          <p:nvPr/>
-        </p:nvSpPr>
-        <p:spPr>
-          <a:xfrm>
-            <a:off x="6062472" y="4169664"/>
-            <a:ext cx="685800" cy="384048"/>
+          <p:cNvPr id="47" name="Text 45"/>
+          <p:cNvSpPr/>
+          <p:nvPr/>
+        </p:nvSpPr>
+        <p:spPr>
+          <a:xfrm>
+            <a:off x="5370141" y="4169664"/>
+            <a:ext cx="685800" cy="475488"/>
           </a:xfrm>
           <a:prstGeom prst="rect">
             <a:avLst/>
@@ -29162,18 +29123,18 @@
       </p:sp>
       <p:sp>
         <p:nvSpPr>
-          <p:cNvPr id="49" name="Shape 47"/>
-          <p:cNvSpPr/>
-          <p:nvPr/>
-        </p:nvSpPr>
-        <p:spPr>
-          <a:xfrm>
-            <a:off x="7274052" y="4169664"/>
-            <a:ext cx="685800" cy="384048"/>
+          <p:cNvPr id="48" name="Shape 46"/>
+          <p:cNvSpPr/>
+          <p:nvPr/>
+        </p:nvSpPr>
+        <p:spPr>
+          <a:xfrm>
+            <a:off x="6408638" y="4169664"/>
+            <a:ext cx="685800" cy="475488"/>
           </a:xfrm>
           <a:prstGeom prst="rect">
             <a:avLst>
-              <a:gd name="adj" fmla="val 9524"/>
+              <a:gd name="adj" fmla="val 7692"/>
             </a:avLst>
           </a:prstGeom>
           <a:solidFill>
@@ -29189,14 +29150,14 @@
       </p:sp>
       <p:sp>
         <p:nvSpPr>
-          <p:cNvPr id="50" name="Text 48"/>
-          <p:cNvSpPr/>
-          <p:nvPr/>
-        </p:nvSpPr>
-        <p:spPr>
-          <a:xfrm>
-            <a:off x="7274052" y="4169664"/>
-            <a:ext cx="685800" cy="384048"/>
+          <p:cNvPr id="49" name="Text 47"/>
+          <p:cNvSpPr/>
+          <p:nvPr/>
+        </p:nvSpPr>
+        <p:spPr>
+          <a:xfrm>
+            <a:off x="6408638" y="4169664"/>
+            <a:ext cx="685800" cy="475488"/>
           </a:xfrm>
           <a:prstGeom prst="rect">
             <a:avLst/>
@@ -29220,7 +29181,73 @@
                 <a:ea typeface="Trebuchet MS" pitchFamily="34" charset="-122"/>
                 <a:cs typeface="Trebuchet MS" pitchFamily="34" charset="-120"/>
               </a:rPr>
-              <a:t>al</a:t>
+              <a:t>a</a:t>
+            </a:r>
+            <a:endParaRPr lang="en-US" sz="900" dirty="0"/>
+          </a:p>
+        </p:txBody>
+      </p:sp>
+      <p:sp>
+        <p:nvSpPr>
+          <p:cNvPr id="50" name="Shape 48"/>
+          <p:cNvSpPr/>
+          <p:nvPr/>
+        </p:nvSpPr>
+        <p:spPr>
+          <a:xfrm>
+            <a:off x="7447135" y="4169664"/>
+            <a:ext cx="685800" cy="475488"/>
+          </a:xfrm>
+          <a:prstGeom prst="rect">
+            <a:avLst>
+              <a:gd name="adj" fmla="val 7692"/>
+            </a:avLst>
+          </a:prstGeom>
+          <a:solidFill>
+            <a:srgbClr val="FFFFFF"/>
+          </a:solidFill>
+          <a:ln w="12700">
+            <a:solidFill>
+              <a:srgbClr val="DB2777"/>
+            </a:solidFill>
+            <a:prstDash val="solid"/>
+          </a:ln>
+        </p:spPr>
+      </p:sp>
+      <p:sp>
+        <p:nvSpPr>
+          <p:cNvPr id="51" name="Text 49"/>
+          <p:cNvSpPr/>
+          <p:nvPr/>
+        </p:nvSpPr>
+        <p:spPr>
+          <a:xfrm>
+            <a:off x="7447135" y="4169664"/>
+            <a:ext cx="685800" cy="475488"/>
+          </a:xfrm>
+          <a:prstGeom prst="rect">
+            <a:avLst/>
+          </a:prstGeom>
+          <a:noFill/>
+          <a:ln/>
+        </p:spPr>
+        <p:txBody>
+          <a:bodyPr wrap="square" lIns="0" tIns="0" rIns="0" bIns="0" rtlCol="0" anchor="ctr"/>
+          <a:lstStyle/>
+          <a:p>
+            <a:pPr algn="ctr" indent="0" marL="0">
+              <a:buNone/>
+            </a:pPr>
+            <a:r>
+              <a:rPr lang="en-US" sz="900" b="1" dirty="0">
+                <a:solidFill>
+                  <a:srgbClr val="9D174D"/>
+                </a:solidFill>
+                <a:latin typeface="Trebuchet MS" pitchFamily="34" charset="0"/>
+                <a:ea typeface="Trebuchet MS" pitchFamily="34" charset="-122"/>
+                <a:cs typeface="Trebuchet MS" pitchFamily="34" charset="-120"/>
+              </a:rPr>
+              <a:t>l</a:t>
             </a:r>
             <a:endParaRPr lang="en-US" sz="900" dirty="0"/>
           </a:p>
@@ -38807,7 +38834,7 @@
                 <a:ea typeface="Calibri" pitchFamily="34" charset="-122"/>
                 <a:cs typeface="Calibri" pitchFamily="34" charset="-120"/>
               </a:rPr>
-              <a:t>1.  The root 'vis' comes from a Latin word meaning to see.</a:t>
+              <a:t>1.  The root 'vis' is found in the word 'visitor'.</a:t>
             </a:r>
             <a:endParaRPr lang="en-US" sz="1300" dirty="0"/>
           </a:p>
@@ -38946,7 +38973,7 @@
                 <a:ea typeface="Calibri" pitchFamily="34" charset="-122"/>
                 <a:cs typeface="Calibri" pitchFamily="34" charset="-120"/>
               </a:rPr>
-              <a:t>2.  The prefix 'in' added to 'visible' makes a word meaning not able to be seen.</a:t>
+              <a:t>2.  The word 'invisible' means something that can be seen very clearly.</a:t>
             </a:r>
             <a:endParaRPr lang="en-US" sz="1300" dirty="0"/>
           </a:p>
@@ -38969,11 +38996,11 @@
             </a:avLst>
           </a:prstGeom>
           <a:solidFill>
-            <a:srgbClr val="DCFCE7"/>
-          </a:solidFill>
-          <a:ln w="12700">
-            <a:solidFill>
-              <a:srgbClr val="16A34A"/>
+            <a:srgbClr val="FEE2E2"/>
+          </a:solidFill>
+          <a:ln w="12700">
+            <a:solidFill>
+              <a:srgbClr val="DC2626"/>
             </a:solidFill>
             <a:prstDash val="solid"/>
           </a:ln>
@@ -39006,13 +39033,13 @@
             <a:r>
               <a:rPr lang="en-US" sz="1100" b="1" dirty="0">
                 <a:solidFill>
-                  <a:srgbClr val="16A34A"/>
+                  <a:srgbClr val="DC2626"/>
                 </a:solidFill>
                 <a:latin typeface="Trebuchet MS" pitchFamily="34" charset="0"/>
                 <a:ea typeface="Trebuchet MS" pitchFamily="34" charset="-122"/>
                 <a:cs typeface="Trebuchet MS" pitchFamily="34" charset="-120"/>
               </a:rPr>
-              <a:t>TRUE</a:t>
+              <a:t>FALSE</a:t>
             </a:r>
             <a:endParaRPr lang="en-US" sz="1100" dirty="0"/>
           </a:p>
@@ -39085,7 +39112,7 @@
                 <a:ea typeface="Calibri" pitchFamily="34" charset="-122"/>
                 <a:cs typeface="Calibri" pitchFamily="34" charset="-120"/>
               </a:rPr>
-              <a:t>3.  The word 'invisible' means something that can be seen very clearly.</a:t>
+              <a:t>3.  The root 'vis' comes from a Greek word meaning to listen.</a:t>
             </a:r>
             <a:endParaRPr lang="en-US" sz="1300" dirty="0"/>
           </a:p>
@@ -39224,7 +39251,7 @@
                 <a:ea typeface="Calibri" pitchFamily="34" charset="-122"/>
                 <a:cs typeface="Calibri" pitchFamily="34" charset="-120"/>
               </a:rPr>
-              <a:t>4.  The root 'vis' is found in the word 'visitor'.</a:t>
+              <a:t>4.  The root 'vis' comes from a Latin word meaning to see.</a:t>
             </a:r>
             <a:endParaRPr lang="en-US" sz="1300" dirty="0"/>
           </a:p>
@@ -39363,7 +39390,7 @@
                 <a:ea typeface="Calibri" pitchFamily="34" charset="-122"/>
                 <a:cs typeface="Calibri" pitchFamily="34" charset="-120"/>
               </a:rPr>
-              <a:t>5.  The root 'vis' comes from a Greek word meaning to listen.</a:t>
+              <a:t>5.  The prefix 'in' added to 'visible' makes a word meaning not able to be seen.</a:t>
             </a:r>
             <a:endParaRPr lang="en-US" sz="1300" dirty="0"/>
           </a:p>
@@ -39386,11 +39413,11 @@
             </a:avLst>
           </a:prstGeom>
           <a:solidFill>
-            <a:srgbClr val="FEE2E2"/>
-          </a:solidFill>
-          <a:ln w="12700">
-            <a:solidFill>
-              <a:srgbClr val="DC2626"/>
+            <a:srgbClr val="DCFCE7"/>
+          </a:solidFill>
+          <a:ln w="12700">
+            <a:solidFill>
+              <a:srgbClr val="16A34A"/>
             </a:solidFill>
             <a:prstDash val="solid"/>
           </a:ln>
@@ -39423,13 +39450,13 @@
             <a:r>
               <a:rPr lang="en-US" sz="1100" b="1" dirty="0">
                 <a:solidFill>
-                  <a:srgbClr val="DC2626"/>
+                  <a:srgbClr val="16A34A"/>
                 </a:solidFill>
                 <a:latin typeface="Trebuchet MS" pitchFamily="34" charset="0"/>
                 <a:ea typeface="Trebuchet MS" pitchFamily="34" charset="-122"/>
                 <a:cs typeface="Trebuchet MS" pitchFamily="34" charset="-120"/>
               </a:rPr>
-              <a:t>FALSE</a:t>
+              <a:t>TRUE</a:t>
             </a:r>
             <a:endParaRPr lang="en-US" sz="1100" dirty="0"/>
           </a:p>
